--- a/docs/content/05-teaching-resources/slides/core/14-quality-management.pptx
+++ b/docs/content/05-teaching-resources/slides/core/14-quality-management.pptx
@@ -11,10 +11,16 @@
     <p:sldId id="259" r:id="rId10"/>
     <p:sldId id="260" r:id="rId11"/>
     <p:sldId id="261" r:id="rId12"/>
-    <p:sldId id="262" r:id="rId13"/>
+    <p:sldId id="262" r:id="rId14"/>
     <p:sldId id="263" r:id="rId15"/>
     <p:sldId id="264" r:id="rId16"/>
     <p:sldId id="265" r:id="rId17"/>
+    <p:sldId id="266" r:id="rId18"/>
+    <p:sldId id="267" r:id="rId19"/>
+    <p:sldId id="268" r:id="rId20"/>
+    <p:sldId id="269" r:id="rId21"/>
+    <p:sldId id="270" r:id="rId22"/>
+    <p:sldId id="271" r:id="rId23"/>
   </p:sldIdLst>
   <p:sldSz cx="12191695" cy="6858000" type="screen4x3"/>
   <p:notesSz cx="6858000" cy="9144000"/>
@@ -511,7 +517,22 @@
           <a:lstStyle/>
           <a:p>
             <a:r>
-              <a:t>Give students a few minutes to answer on mini whiteboards or paper, then reveal the answers on the next slide.</a:t>
+              <a:t>Answers:</a:t>
+            </a:r>
+          </a:p>
+          <a:p>
+            <a:r>
+              <a:t>1. QC.</a:t>
+            </a:r>
+          </a:p>
+          <a:p>
+            <a:r>
+              <a:t>2. Samples production to spot drift before defects occur.</a:t>
+            </a:r>
+          </a:p>
+          <a:p>
+            <a:r>
+              <a:t>3. Getting it correct without rework.</a:t>
             </a:r>
           </a:p>
         </p:txBody>
@@ -581,7 +602,22 @@
           <a:lstStyle/>
           <a:p>
             <a:r>
-              <a:t>Talk through any answers the class found difficult.</a:t>
+              <a:t>Answers:</a:t>
+            </a:r>
+          </a:p>
+          <a:p>
+            <a:r>
+              <a:t>1. Which few causes create most problems.</a:t>
+            </a:r>
+          </a:p>
+          <a:p>
+            <a:r>
+              <a:t>2. A small team of workers solving quality problems.</a:t>
+            </a:r>
+          </a:p>
+          <a:p>
+            <a:r>
+              <a:t>3. Variation and defects.</a:t>
             </a:r>
           </a:p>
         </p:txBody>
@@ -607,6 +643,231 @@
 </file>
 
 <file path=ppt/notesSlides/notesSlide3.xml><?xml version="1.0" encoding="utf-8"?>
+<p:notes xmlns:a="http://schemas.openxmlformats.org/drawingml/2006/main" xmlns:p="http://schemas.openxmlformats.org/presentationml/2006/main" xmlns:r="http://schemas.openxmlformats.org/officeDocument/2006/relationships">
+  <p:cSld>
+    <p:spTree>
+      <p:nvGrpSpPr>
+        <p:cNvPr id="1" name=""/>
+        <p:cNvGrpSpPr/>
+        <p:nvPr/>
+      </p:nvGrpSpPr>
+      <p:grpSpPr>
+        <a:xfrm>
+          <a:off x="0" y="0"/>
+          <a:ext cx="0" cy="0"/>
+          <a:chOff x="0" y="0"/>
+          <a:chExt cx="0" cy="0"/>
+        </a:xfrm>
+      </p:grpSpPr>
+      <p:sp>
+        <p:nvSpPr>
+          <p:cNvPr id="2" name="Slide Image Placeholder 1"/>
+          <p:cNvSpPr>
+            <a:spLocks noGrp="1"/>
+          </p:cNvSpPr>
+          <p:nvPr>
+            <p:ph type="sldImg" idx="2"/>
+          </p:nvPr>
+        </p:nvSpPr>
+        <p:spPr/>
+      </p:sp>
+      <p:sp>
+        <p:nvSpPr>
+          <p:cNvPr id="3" name="Notes Placeholder 2"/>
+          <p:cNvSpPr>
+            <a:spLocks noGrp="1"/>
+          </p:cNvSpPr>
+          <p:nvPr>
+            <p:ph type="body" idx="3" sz="quarter"/>
+          </p:nvPr>
+        </p:nvSpPr>
+        <p:spPr/>
+        <p:txBody>
+          <a:bodyPr/>
+          <a:lstStyle/>
+          <a:p>
+            <a:r>
+              <a:t>Answers:</a:t>
+            </a:r>
+          </a:p>
+          <a:p>
+            <a:r>
+              <a:t>1. A written step-by-step procedure for doing a task consistently.</a:t>
+            </a:r>
+          </a:p>
+          <a:p>
+            <a:r>
+              <a:t>2. E.g. consistency, safety, training, customer satisfaction.</a:t>
+            </a:r>
+          </a:p>
+          <a:p>
+            <a:r>
+              <a:t>3. To show which version is current and what changed.</a:t>
+            </a:r>
+          </a:p>
+        </p:txBody>
+      </p:sp>
+      <p:sp>
+        <p:nvSpPr>
+          <p:cNvPr id="4" name="Slide Number Placeholder 3"/>
+          <p:cNvSpPr>
+            <a:spLocks noGrp="1"/>
+          </p:cNvSpPr>
+          <p:nvPr>
+            <p:ph type="sldNum" idx="5" sz="quarter"/>
+          </p:nvPr>
+        </p:nvSpPr>
+        <p:spPr/>
+      </p:sp>
+    </p:spTree>
+  </p:cSld>
+  <p:clrMapOvr>
+    <a:masterClrMapping/>
+  </p:clrMapOvr>
+</p:notes>
+</file>
+
+<file path=ppt/notesSlides/notesSlide4.xml><?xml version="1.0" encoding="utf-8"?>
+<p:notes xmlns:a="http://schemas.openxmlformats.org/drawingml/2006/main" xmlns:p="http://schemas.openxmlformats.org/presentationml/2006/main" xmlns:r="http://schemas.openxmlformats.org/officeDocument/2006/relationships">
+  <p:cSld>
+    <p:spTree>
+      <p:nvGrpSpPr>
+        <p:cNvPr id="1" name=""/>
+        <p:cNvGrpSpPr/>
+        <p:nvPr/>
+      </p:nvGrpSpPr>
+      <p:grpSpPr>
+        <a:xfrm>
+          <a:off x="0" y="0"/>
+          <a:ext cx="0" cy="0"/>
+          <a:chOff x="0" y="0"/>
+          <a:chExt cx="0" cy="0"/>
+        </a:xfrm>
+      </p:grpSpPr>
+      <p:sp>
+        <p:nvSpPr>
+          <p:cNvPr id="2" name="Slide Image Placeholder 1"/>
+          <p:cNvSpPr>
+            <a:spLocks noGrp="1"/>
+          </p:cNvSpPr>
+          <p:nvPr>
+            <p:ph type="sldImg" idx="2"/>
+          </p:nvPr>
+        </p:nvSpPr>
+        <p:spPr/>
+      </p:sp>
+      <p:sp>
+        <p:nvSpPr>
+          <p:cNvPr id="3" name="Notes Placeholder 2"/>
+          <p:cNvSpPr>
+            <a:spLocks noGrp="1"/>
+          </p:cNvSpPr>
+          <p:nvPr>
+            <p:ph type="body" idx="3" sz="quarter"/>
+          </p:nvPr>
+        </p:nvSpPr>
+        <p:spPr/>
+        <p:txBody>
+          <a:bodyPr/>
+          <a:lstStyle/>
+          <a:p>
+            <a:r>
+              <a:t>Give students a few minutes to answer on mini whiteboards or paper, then reveal the answers on the next slide.</a:t>
+            </a:r>
+          </a:p>
+        </p:txBody>
+      </p:sp>
+      <p:sp>
+        <p:nvSpPr>
+          <p:cNvPr id="4" name="Slide Number Placeholder 3"/>
+          <p:cNvSpPr>
+            <a:spLocks noGrp="1"/>
+          </p:cNvSpPr>
+          <p:nvPr>
+            <p:ph type="sldNum" idx="5" sz="quarter"/>
+          </p:nvPr>
+        </p:nvSpPr>
+        <p:spPr/>
+      </p:sp>
+    </p:spTree>
+  </p:cSld>
+  <p:clrMapOvr>
+    <a:masterClrMapping/>
+  </p:clrMapOvr>
+</p:notes>
+</file>
+
+<file path=ppt/notesSlides/notesSlide5.xml><?xml version="1.0" encoding="utf-8"?>
+<p:notes xmlns:a="http://schemas.openxmlformats.org/drawingml/2006/main" xmlns:p="http://schemas.openxmlformats.org/presentationml/2006/main" xmlns:r="http://schemas.openxmlformats.org/officeDocument/2006/relationships">
+  <p:cSld>
+    <p:spTree>
+      <p:nvGrpSpPr>
+        <p:cNvPr id="1" name=""/>
+        <p:cNvGrpSpPr/>
+        <p:nvPr/>
+      </p:nvGrpSpPr>
+      <p:grpSpPr>
+        <a:xfrm>
+          <a:off x="0" y="0"/>
+          <a:ext cx="0" cy="0"/>
+          <a:chOff x="0" y="0"/>
+          <a:chExt cx="0" cy="0"/>
+        </a:xfrm>
+      </p:grpSpPr>
+      <p:sp>
+        <p:nvSpPr>
+          <p:cNvPr id="2" name="Slide Image Placeholder 1"/>
+          <p:cNvSpPr>
+            <a:spLocks noGrp="1"/>
+          </p:cNvSpPr>
+          <p:nvPr>
+            <p:ph type="sldImg" idx="2"/>
+          </p:nvPr>
+        </p:nvSpPr>
+        <p:spPr/>
+      </p:sp>
+      <p:sp>
+        <p:nvSpPr>
+          <p:cNvPr id="3" name="Notes Placeholder 2"/>
+          <p:cNvSpPr>
+            <a:spLocks noGrp="1"/>
+          </p:cNvSpPr>
+          <p:nvPr>
+            <p:ph type="body" idx="3" sz="quarter"/>
+          </p:nvPr>
+        </p:nvSpPr>
+        <p:spPr/>
+        <p:txBody>
+          <a:bodyPr/>
+          <a:lstStyle/>
+          <a:p>
+            <a:r>
+              <a:t>Talk through any answers the class found difficult.</a:t>
+            </a:r>
+          </a:p>
+        </p:txBody>
+      </p:sp>
+      <p:sp>
+        <p:nvSpPr>
+          <p:cNvPr id="4" name="Slide Number Placeholder 3"/>
+          <p:cNvSpPr>
+            <a:spLocks noGrp="1"/>
+          </p:cNvSpPr>
+          <p:nvPr>
+            <p:ph type="sldNum" idx="5" sz="quarter"/>
+          </p:nvPr>
+        </p:nvSpPr>
+        <p:spPr/>
+      </p:sp>
+    </p:spTree>
+  </p:cSld>
+  <p:clrMapOvr>
+    <a:masterClrMapping/>
+  </p:clrMapOvr>
+</p:notes>
+</file>
+
+<file path=ppt/notesSlides/notesSlide6.xml><?xml version="1.0" encoding="utf-8"?>
 <p:notes xmlns:a="http://schemas.openxmlformats.org/drawingml/2006/main" xmlns:p="http://schemas.openxmlformats.org/presentationml/2006/main" xmlns:r="http://schemas.openxmlformats.org/officeDocument/2006/relationships">
   <p:cSld>
     <p:spTree>
@@ -3982,6 +4243,3125 @@
     <p:bg>
       <p:bgPr>
         <a:solidFill>
+          <a:srgbClr val="FFFFFF"/>
+        </a:solidFill>
+        <a:effectLst/>
+      </p:bgPr>
+    </p:bg>
+    <p:spTree>
+      <p:nvGrpSpPr>
+        <p:cNvPr id="1" name=""/>
+        <p:cNvGrpSpPr/>
+        <p:nvPr/>
+      </p:nvGrpSpPr>
+      <p:grpSpPr/>
+      <p:sp>
+        <p:nvSpPr>
+          <p:cNvPr id="2" name="TextBox 1"/>
+          <p:cNvSpPr txBox="1"/>
+          <p:nvPr/>
+        </p:nvSpPr>
+        <p:spPr>
+          <a:xfrm>
+            <a:off x="548640" y="320040"/>
+            <a:ext cx="11094415" cy="274320"/>
+          </a:xfrm>
+          <a:prstGeom prst="rect">
+            <a:avLst/>
+          </a:prstGeom>
+          <a:noFill/>
+        </p:spPr>
+        <p:txBody>
+          <a:bodyPr wrap="square" anchor="t" lIns="0" rIns="0" tIns="0" bIns="0"/>
+          <a:lstStyle/>
+          <a:p>
+            <a:pPr algn="l"/>
+            <a:r>
+              <a:rPr sz="1100" b="1" i="0">
+                <a:solidFill>
+                  <a:srgbClr val="54595D"/>
+                </a:solidFill>
+                <a:latin typeface="Calibri"/>
+              </a:rPr>
+              <a:t>ENGINEERING CORE  ·  Core topic 11</a:t>
+            </a:r>
+          </a:p>
+        </p:txBody>
+      </p:sp>
+      <p:sp>
+        <p:nvSpPr>
+          <p:cNvPr id="3" name="TextBox 2"/>
+          <p:cNvSpPr txBox="1"/>
+          <p:nvPr/>
+        </p:nvSpPr>
+        <p:spPr>
+          <a:xfrm>
+            <a:off x="548640" y="566928"/>
+            <a:ext cx="11094415" cy="822960"/>
+          </a:xfrm>
+          <a:prstGeom prst="rect">
+            <a:avLst/>
+          </a:prstGeom>
+          <a:noFill/>
+        </p:spPr>
+        <p:txBody>
+          <a:bodyPr wrap="square" anchor="ctr" lIns="0" rIns="0" tIns="0" bIns="0"/>
+          <a:lstStyle/>
+          <a:p>
+            <a:pPr algn="l"/>
+            <a:r>
+              <a:rPr sz="3200" b="1" i="0">
+                <a:solidFill>
+                  <a:srgbClr val="03306E"/>
+                </a:solidFill>
+                <a:latin typeface="Cambria"/>
+              </a:rPr>
+              <a:t>Standard operating procedures</a:t>
+            </a:r>
+          </a:p>
+        </p:txBody>
+      </p:sp>
+      <p:sp>
+        <p:nvSpPr>
+          <p:cNvPr id="4" name="TextBox 3"/>
+          <p:cNvSpPr txBox="1"/>
+          <p:nvPr/>
+        </p:nvSpPr>
+        <p:spPr>
+          <a:xfrm>
+            <a:off x="548640" y="6446520"/>
+            <a:ext cx="8229600" cy="274320"/>
+          </a:xfrm>
+          <a:prstGeom prst="rect">
+            <a:avLst/>
+          </a:prstGeom>
+          <a:noFill/>
+        </p:spPr>
+        <p:txBody>
+          <a:bodyPr wrap="square" anchor="t" lIns="0" rIns="0" tIns="0" bIns="0"/>
+          <a:lstStyle/>
+          <a:p>
+            <a:pPr algn="l"/>
+            <a:r>
+              <a:rPr sz="1000" b="0" i="0">
+                <a:solidFill>
+                  <a:srgbClr val="54595D"/>
+                </a:solidFill>
+                <a:latin typeface="Calibri"/>
+              </a:rPr>
+              <a:t>Design and Development for Engineering and Manufacturing T Level  ·  Quality Management and SOPs</a:t>
+            </a:r>
+          </a:p>
+        </p:txBody>
+      </p:sp>
+      <p:sp>
+        <p:nvSpPr>
+          <p:cNvPr id="5" name="TextBox 4"/>
+          <p:cNvSpPr txBox="1"/>
+          <p:nvPr/>
+        </p:nvSpPr>
+        <p:spPr>
+          <a:xfrm>
+            <a:off x="10728655" y="6446520"/>
+            <a:ext cx="914400" cy="274320"/>
+          </a:xfrm>
+          <a:prstGeom prst="rect">
+            <a:avLst/>
+          </a:prstGeom>
+          <a:noFill/>
+        </p:spPr>
+        <p:txBody>
+          <a:bodyPr wrap="square" anchor="t" lIns="0" rIns="0" tIns="0" bIns="0"/>
+          <a:lstStyle/>
+          <a:p>
+            <a:pPr algn="r"/>
+            <a:r>
+              <a:rPr sz="1000" b="0" i="0">
+                <a:solidFill>
+                  <a:srgbClr val="54595D"/>
+                </a:solidFill>
+                <a:latin typeface="Calibri"/>
+              </a:rPr>
+              <a:t>10</a:t>
+            </a:r>
+          </a:p>
+        </p:txBody>
+      </p:sp>
+      <p:sp>
+        <p:nvSpPr>
+          <p:cNvPr id="6" name="TextBox 5"/>
+          <p:cNvSpPr txBox="1"/>
+          <p:nvPr/>
+        </p:nvSpPr>
+        <p:spPr>
+          <a:xfrm>
+            <a:off x="548640" y="1554480"/>
+            <a:ext cx="6720840" cy="4617720"/>
+          </a:xfrm>
+          <a:prstGeom prst="rect">
+            <a:avLst/>
+          </a:prstGeom>
+          <a:noFill/>
+        </p:spPr>
+        <p:txBody>
+          <a:bodyPr wrap="square" lIns="0" rIns="0" tIns="0" bIns="0">
+            <a:spAutoFit/>
+          </a:bodyPr>
+          <a:lstStyle/>
+          <a:p>
+            <a:pPr>
+              <a:spcAft>
+                <a:spcPts val="1320"/>
+              </a:spcAft>
+            </a:pPr>
+            <a:r>
+              <a:rPr sz="2200" b="0">
+                <a:solidFill>
+                  <a:srgbClr val="202122"/>
+                </a:solidFill>
+                <a:latin typeface="Calibri"/>
+              </a:rPr>
+              <a:t>A standard operating procedure (SOP) is a written, step-by-step instruction for doing a task the same way every time.</a:t>
+            </a:r>
+          </a:p>
+          <a:p>
+            <a:pPr>
+              <a:spcAft>
+                <a:spcPts val="1320"/>
+              </a:spcAft>
+            </a:pPr>
+            <a:r>
+              <a:rPr sz="2200" b="0">
+                <a:solidFill>
+                  <a:srgbClr val="202122"/>
+                </a:solidFill>
+                <a:latin typeface="Calibri"/>
+              </a:rPr>
+              <a:t>Types include manufacturing, quality and maintenance SOPs. They standardise work, keep customers satisfied with consistent products, keep people safe and support training.</a:t>
+            </a:r>
+          </a:p>
+          <a:p>
+            <a:pPr>
+              <a:spcAft>
+                <a:spcPts val="1320"/>
+              </a:spcAft>
+            </a:pPr>
+            <a:r>
+              <a:rPr sz="2200" b="0">
+                <a:solidFill>
+                  <a:srgbClr val="202122"/>
+                </a:solidFill>
+                <a:latin typeface="Calibri"/>
+              </a:rPr>
+              <a:t>An SOP typically includes a title, purpose, scope, responsibilities, equipment, the method step by step, safety notes and a revision history. SOPs are written, put into use, evaluated and updated under version control.</a:t>
+            </a:r>
+          </a:p>
+        </p:txBody>
+      </p:sp>
+      <p:sp>
+        <p:nvSpPr>
+          <p:cNvPr id="7" name="Rounded Rectangle 6"/>
+          <p:cNvSpPr/>
+          <p:nvPr/>
+        </p:nvSpPr>
+        <p:spPr>
+          <a:xfrm>
+            <a:off x="7772400" y="1554480"/>
+            <a:ext cx="3867912" cy="4526280"/>
+          </a:xfrm>
+          <a:prstGeom prst="roundRect">
+            <a:avLst>
+              <a:gd name="adj" fmla="val 8000"/>
+            </a:avLst>
+          </a:prstGeom>
+          <a:solidFill>
+            <a:srgbClr val="03306E"/>
+          </a:solidFill>
+          <a:ln>
+            <a:noFill/>
+          </a:ln>
+          <a:effectLst/>
+        </p:spPr>
+        <p:style>
+          <a:lnRef idx="1">
+            <a:schemeClr val="accent1"/>
+          </a:lnRef>
+          <a:fillRef idx="3">
+            <a:schemeClr val="accent1"/>
+          </a:fillRef>
+          <a:effectRef idx="2">
+            <a:schemeClr val="accent1"/>
+          </a:effectRef>
+          <a:fontRef idx="minor">
+            <a:schemeClr val="lt1"/>
+          </a:fontRef>
+        </p:style>
+        <p:txBody>
+          <a:bodyPr rtlCol="0" anchor="ctr"/>
+          <a:lstStyle/>
+          <a:p/>
+        </p:txBody>
+      </p:sp>
+      <p:sp>
+        <p:nvSpPr>
+          <p:cNvPr id="8" name="Oval 7"/>
+          <p:cNvSpPr/>
+          <p:nvPr/>
+        </p:nvSpPr>
+        <p:spPr>
+          <a:xfrm>
+            <a:off x="8046720" y="1828800"/>
+            <a:ext cx="548640" cy="548640"/>
+          </a:xfrm>
+          <a:prstGeom prst="ellipse">
+            <a:avLst/>
+          </a:prstGeom>
+          <a:solidFill>
+            <a:srgbClr val="F2B705"/>
+          </a:solidFill>
+          <a:ln>
+            <a:noFill/>
+          </a:ln>
+          <a:effectLst/>
+        </p:spPr>
+        <p:style>
+          <a:lnRef idx="1">
+            <a:schemeClr val="accent1"/>
+          </a:lnRef>
+          <a:fillRef idx="3">
+            <a:schemeClr val="accent1"/>
+          </a:fillRef>
+          <a:effectRef idx="2">
+            <a:schemeClr val="accent1"/>
+          </a:effectRef>
+          <a:fontRef idx="minor">
+            <a:schemeClr val="lt1"/>
+          </a:fontRef>
+        </p:style>
+        <p:txBody>
+          <a:bodyPr rtlCol="0" anchor="ctr" lIns="0" rIns="0" tIns="0" bIns="0"/>
+          <a:lstStyle/>
+          <a:p>
+            <a:pPr algn="ctr"/>
+            <a:r>
+              <a:rPr sz="1300" b="1">
+                <a:solidFill>
+                  <a:srgbClr val="202122"/>
+                </a:solidFill>
+                <a:latin typeface="Calibri"/>
+              </a:rPr>
+              <a:t>e.g.</a:t>
+            </a:r>
+          </a:p>
+        </p:txBody>
+      </p:sp>
+      <p:sp>
+        <p:nvSpPr>
+          <p:cNvPr id="9" name="TextBox 8"/>
+          <p:cNvSpPr txBox="1"/>
+          <p:nvPr/>
+        </p:nvSpPr>
+        <p:spPr>
+          <a:xfrm>
+            <a:off x="8046720" y="2560320"/>
+            <a:ext cx="3291840" cy="365760"/>
+          </a:xfrm>
+          <a:prstGeom prst="rect">
+            <a:avLst/>
+          </a:prstGeom>
+          <a:noFill/>
+        </p:spPr>
+        <p:txBody>
+          <a:bodyPr wrap="square" anchor="t" lIns="0" rIns="0" tIns="0" bIns="0"/>
+          <a:lstStyle/>
+          <a:p>
+            <a:pPr algn="l"/>
+            <a:r>
+              <a:rPr sz="1300" b="1" i="0">
+                <a:solidFill>
+                  <a:srgbClr val="A9C8F0"/>
+                </a:solidFill>
+                <a:latin typeface="Calibri"/>
+              </a:rPr>
+              <a:t>EXAMPLE</a:t>
+            </a:r>
+          </a:p>
+        </p:txBody>
+      </p:sp>
+      <p:sp>
+        <p:nvSpPr>
+          <p:cNvPr id="10" name="TextBox 9"/>
+          <p:cNvSpPr txBox="1"/>
+          <p:nvPr/>
+        </p:nvSpPr>
+        <p:spPr>
+          <a:xfrm>
+            <a:off x="8046720" y="2971800"/>
+            <a:ext cx="3291840" cy="2971800"/>
+          </a:xfrm>
+          <a:prstGeom prst="rect">
+            <a:avLst/>
+          </a:prstGeom>
+          <a:noFill/>
+        </p:spPr>
+        <p:txBody>
+          <a:bodyPr wrap="square" anchor="t" lIns="0" rIns="0" tIns="0" bIns="0"/>
+          <a:lstStyle/>
+          <a:p>
+            <a:pPr algn="l"/>
+            <a:r>
+              <a:rPr sz="1900" b="0" i="0">
+                <a:solidFill>
+                  <a:srgbClr val="FFFFFF"/>
+                </a:solidFill>
+                <a:latin typeface="Cambria"/>
+              </a:rPr>
+              <a:t>An SOP for setting up a lathe means every operator fits the guard, checks the chuck key is removed and sets the speed the same way.</a:t>
+            </a:r>
+          </a:p>
+        </p:txBody>
+      </p:sp>
+    </p:spTree>
+  </p:cSld>
+  <p:clrMapOvr>
+    <a:masterClrMapping/>
+  </p:clrMapOvr>
+</p:sld>
+</file>
+
+<file path=ppt/slides/slide11.xml><?xml version="1.0" encoding="utf-8"?>
+<p:sld xmlns:a="http://schemas.openxmlformats.org/drawingml/2006/main" xmlns:p="http://schemas.openxmlformats.org/presentationml/2006/main" xmlns:r="http://schemas.openxmlformats.org/officeDocument/2006/relationships">
+  <p:cSld>
+    <p:bg>
+      <p:bgPr>
+        <a:solidFill>
+          <a:srgbClr val="FFFFFF"/>
+        </a:solidFill>
+        <a:effectLst/>
+      </p:bgPr>
+    </p:bg>
+    <p:spTree>
+      <p:nvGrpSpPr>
+        <p:cNvPr id="1" name=""/>
+        <p:cNvGrpSpPr/>
+        <p:nvPr/>
+      </p:nvGrpSpPr>
+      <p:grpSpPr/>
+      <p:sp>
+        <p:nvSpPr>
+          <p:cNvPr id="2" name="TextBox 1"/>
+          <p:cNvSpPr txBox="1"/>
+          <p:nvPr/>
+        </p:nvSpPr>
+        <p:spPr>
+          <a:xfrm>
+            <a:off x="548640" y="320040"/>
+            <a:ext cx="11094415" cy="274320"/>
+          </a:xfrm>
+          <a:prstGeom prst="rect">
+            <a:avLst/>
+          </a:prstGeom>
+          <a:noFill/>
+        </p:spPr>
+        <p:txBody>
+          <a:bodyPr wrap="square" anchor="t" lIns="0" rIns="0" tIns="0" bIns="0"/>
+          <a:lstStyle/>
+          <a:p>
+            <a:pPr algn="l"/>
+            <a:r>
+              <a:rPr sz="1100" b="1" i="0">
+                <a:solidFill>
+                  <a:srgbClr val="54595D"/>
+                </a:solidFill>
+                <a:latin typeface="Calibri"/>
+              </a:rPr>
+              <a:t>ENGINEERING CORE  ·  Core topic 11</a:t>
+            </a:r>
+          </a:p>
+        </p:txBody>
+      </p:sp>
+      <p:sp>
+        <p:nvSpPr>
+          <p:cNvPr id="3" name="TextBox 2"/>
+          <p:cNvSpPr txBox="1"/>
+          <p:nvPr/>
+        </p:nvSpPr>
+        <p:spPr>
+          <a:xfrm>
+            <a:off x="548640" y="566928"/>
+            <a:ext cx="11094415" cy="822960"/>
+          </a:xfrm>
+          <a:prstGeom prst="rect">
+            <a:avLst/>
+          </a:prstGeom>
+          <a:noFill/>
+        </p:spPr>
+        <p:txBody>
+          <a:bodyPr wrap="square" anchor="ctr" lIns="0" rIns="0" tIns="0" bIns="0"/>
+          <a:lstStyle/>
+          <a:p>
+            <a:pPr algn="l"/>
+            <a:r>
+              <a:rPr sz="3200" b="1" i="0">
+                <a:solidFill>
+                  <a:srgbClr val="03306E"/>
+                </a:solidFill>
+                <a:latin typeface="Cambria"/>
+              </a:rPr>
+              <a:t>Standard operating procedures</a:t>
+            </a:r>
+          </a:p>
+        </p:txBody>
+      </p:sp>
+      <p:sp>
+        <p:nvSpPr>
+          <p:cNvPr id="4" name="TextBox 3"/>
+          <p:cNvSpPr txBox="1"/>
+          <p:nvPr/>
+        </p:nvSpPr>
+        <p:spPr>
+          <a:xfrm>
+            <a:off x="548640" y="6446520"/>
+            <a:ext cx="8229600" cy="274320"/>
+          </a:xfrm>
+          <a:prstGeom prst="rect">
+            <a:avLst/>
+          </a:prstGeom>
+          <a:noFill/>
+        </p:spPr>
+        <p:txBody>
+          <a:bodyPr wrap="square" anchor="t" lIns="0" rIns="0" tIns="0" bIns="0"/>
+          <a:lstStyle/>
+          <a:p>
+            <a:pPr algn="l"/>
+            <a:r>
+              <a:rPr sz="1000" b="0" i="0">
+                <a:solidFill>
+                  <a:srgbClr val="54595D"/>
+                </a:solidFill>
+                <a:latin typeface="Calibri"/>
+              </a:rPr>
+              <a:t>Design and Development for Engineering and Manufacturing T Level  ·  Quality Management and SOPs</a:t>
+            </a:r>
+          </a:p>
+        </p:txBody>
+      </p:sp>
+      <p:sp>
+        <p:nvSpPr>
+          <p:cNvPr id="5" name="TextBox 4"/>
+          <p:cNvSpPr txBox="1"/>
+          <p:nvPr/>
+        </p:nvSpPr>
+        <p:spPr>
+          <a:xfrm>
+            <a:off x="10728655" y="6446520"/>
+            <a:ext cx="914400" cy="274320"/>
+          </a:xfrm>
+          <a:prstGeom prst="rect">
+            <a:avLst/>
+          </a:prstGeom>
+          <a:noFill/>
+        </p:spPr>
+        <p:txBody>
+          <a:bodyPr wrap="square" anchor="t" lIns="0" rIns="0" tIns="0" bIns="0"/>
+          <a:lstStyle/>
+          <a:p>
+            <a:pPr algn="r"/>
+            <a:r>
+              <a:rPr sz="1000" b="0" i="0">
+                <a:solidFill>
+                  <a:srgbClr val="54595D"/>
+                </a:solidFill>
+                <a:latin typeface="Calibri"/>
+              </a:rPr>
+              <a:t>11</a:t>
+            </a:r>
+          </a:p>
+        </p:txBody>
+      </p:sp>
+      <p:sp>
+        <p:nvSpPr>
+          <p:cNvPr id="6" name="TextBox 5"/>
+          <p:cNvSpPr txBox="1"/>
+          <p:nvPr/>
+        </p:nvSpPr>
+        <p:spPr>
+          <a:xfrm>
+            <a:off x="548640" y="1600200"/>
+            <a:ext cx="6675120" cy="4572000"/>
+          </a:xfrm>
+          <a:prstGeom prst="rect">
+            <a:avLst/>
+          </a:prstGeom>
+          <a:noFill/>
+        </p:spPr>
+        <p:txBody>
+          <a:bodyPr wrap="square" lIns="0" rIns="0" tIns="0" bIns="0">
+            <a:spAutoFit/>
+          </a:bodyPr>
+          <a:lstStyle/>
+          <a:p>
+            <a:pPr marL="274320" indent="-274320">
+              <a:spcAft>
+                <a:spcPts val="1035"/>
+              </a:spcAft>
+              <a:buClr>
+                <a:srgbClr val="0645AD"/>
+              </a:buClr>
+              <a:buFont typeface="Arial"/>
+              <a:buChar char="•"/>
+            </a:pPr>
+            <a:r>
+              <a:rPr sz="2300" b="1">
+                <a:solidFill>
+                  <a:srgbClr val="202122"/>
+                </a:solidFill>
+                <a:latin typeface="Calibri"/>
+              </a:rPr>
+              <a:t>Types:</a:t>
+            </a:r>
+            <a:r>
+              <a:rPr sz="2300" b="0">
+                <a:solidFill>
+                  <a:srgbClr val="202122"/>
+                </a:solidFill>
+                <a:latin typeface="Calibri"/>
+              </a:rPr>
+              <a:t> manufacturing, quality and maintenance SOPs.</a:t>
+            </a:r>
+          </a:p>
+          <a:p>
+            <a:pPr marL="274320" indent="-274320">
+              <a:spcAft>
+                <a:spcPts val="1035"/>
+              </a:spcAft>
+              <a:buClr>
+                <a:srgbClr val="0645AD"/>
+              </a:buClr>
+              <a:buFont typeface="Arial"/>
+              <a:buChar char="•"/>
+            </a:pPr>
+            <a:r>
+              <a:rPr sz="2300" b="1">
+                <a:solidFill>
+                  <a:srgbClr val="202122"/>
+                </a:solidFill>
+                <a:latin typeface="Calibri"/>
+              </a:rPr>
+              <a:t>Purpose:</a:t>
+            </a:r>
+            <a:r>
+              <a:rPr sz="2300" b="0">
+                <a:solidFill>
+                  <a:srgbClr val="202122"/>
+                </a:solidFill>
+                <a:latin typeface="Calibri"/>
+              </a:rPr>
+              <a:t> standardise activity, satisfy customers, keep people safe, support training.</a:t>
+            </a:r>
+          </a:p>
+          <a:p>
+            <a:pPr marL="274320" indent="-274320">
+              <a:spcAft>
+                <a:spcPts val="1035"/>
+              </a:spcAft>
+              <a:buClr>
+                <a:srgbClr val="0645AD"/>
+              </a:buClr>
+              <a:buFont typeface="Arial"/>
+              <a:buChar char="•"/>
+            </a:pPr>
+            <a:r>
+              <a:rPr sz="2300" b="1">
+                <a:solidFill>
+                  <a:srgbClr val="202122"/>
+                </a:solidFill>
+                <a:latin typeface="Calibri"/>
+              </a:rPr>
+              <a:t>Typical format:</a:t>
+            </a:r>
+            <a:r>
+              <a:rPr sz="2300" b="0">
+                <a:solidFill>
+                  <a:srgbClr val="202122"/>
+                </a:solidFill>
+                <a:latin typeface="Calibri"/>
+              </a:rPr>
+              <a:t> title, purpose, scope, responsibilities, equipment, step-by-step method, safety notes, revision history.</a:t>
+            </a:r>
+          </a:p>
+          <a:p>
+            <a:pPr marL="274320" indent="-274320">
+              <a:spcAft>
+                <a:spcPts val="1035"/>
+              </a:spcAft>
+              <a:buClr>
+                <a:srgbClr val="0645AD"/>
+              </a:buClr>
+              <a:buFont typeface="Arial"/>
+              <a:buChar char="•"/>
+            </a:pPr>
+            <a:r>
+              <a:rPr sz="2300" b="0">
+                <a:solidFill>
+                  <a:srgbClr val="202122"/>
+                </a:solidFill>
+                <a:latin typeface="Calibri"/>
+              </a:rPr>
+              <a:t>They are produced, implemented and evaluated, then updated under version control.</a:t>
+            </a:r>
+          </a:p>
+        </p:txBody>
+      </p:sp>
+      <p:sp>
+        <p:nvSpPr>
+          <p:cNvPr id="7" name="Rounded Rectangle 6"/>
+          <p:cNvSpPr/>
+          <p:nvPr/>
+        </p:nvSpPr>
+        <p:spPr>
+          <a:xfrm>
+            <a:off x="7772400" y="1600200"/>
+            <a:ext cx="3867912" cy="4434840"/>
+          </a:xfrm>
+          <a:prstGeom prst="roundRect">
+            <a:avLst>
+              <a:gd name="adj" fmla="val 8000"/>
+            </a:avLst>
+          </a:prstGeom>
+          <a:solidFill>
+            <a:srgbClr val="03306E"/>
+          </a:solidFill>
+          <a:ln>
+            <a:noFill/>
+          </a:ln>
+          <a:effectLst/>
+        </p:spPr>
+        <p:style>
+          <a:lnRef idx="1">
+            <a:schemeClr val="accent1"/>
+          </a:lnRef>
+          <a:fillRef idx="3">
+            <a:schemeClr val="accent1"/>
+          </a:fillRef>
+          <a:effectRef idx="2">
+            <a:schemeClr val="accent1"/>
+          </a:effectRef>
+          <a:fontRef idx="minor">
+            <a:schemeClr val="lt1"/>
+          </a:fontRef>
+        </p:style>
+        <p:txBody>
+          <a:bodyPr rtlCol="0" anchor="ctr"/>
+          <a:lstStyle/>
+          <a:p/>
+        </p:txBody>
+      </p:sp>
+      <p:sp>
+        <p:nvSpPr>
+          <p:cNvPr id="8" name="Oval 7"/>
+          <p:cNvSpPr/>
+          <p:nvPr/>
+        </p:nvSpPr>
+        <p:spPr>
+          <a:xfrm>
+            <a:off x="8046720" y="1874519"/>
+            <a:ext cx="548640" cy="548640"/>
+          </a:xfrm>
+          <a:prstGeom prst="ellipse">
+            <a:avLst/>
+          </a:prstGeom>
+          <a:solidFill>
+            <a:srgbClr val="F2B705"/>
+          </a:solidFill>
+          <a:ln>
+            <a:noFill/>
+          </a:ln>
+          <a:effectLst/>
+        </p:spPr>
+        <p:style>
+          <a:lnRef idx="1">
+            <a:schemeClr val="accent1"/>
+          </a:lnRef>
+          <a:fillRef idx="3">
+            <a:schemeClr val="accent1"/>
+          </a:fillRef>
+          <a:effectRef idx="2">
+            <a:schemeClr val="accent1"/>
+          </a:effectRef>
+          <a:fontRef idx="minor">
+            <a:schemeClr val="lt1"/>
+          </a:fontRef>
+        </p:style>
+        <p:txBody>
+          <a:bodyPr rtlCol="0" anchor="ctr" lIns="0" rIns="0" tIns="0" bIns="0"/>
+          <a:lstStyle/>
+          <a:p>
+            <a:pPr algn="ctr"/>
+            <a:r>
+              <a:rPr sz="2000" b="1">
+                <a:solidFill>
+                  <a:srgbClr val="202122"/>
+                </a:solidFill>
+                <a:latin typeface="Calibri"/>
+              </a:rPr>
+              <a:t>!</a:t>
+            </a:r>
+          </a:p>
+        </p:txBody>
+      </p:sp>
+      <p:sp>
+        <p:nvSpPr>
+          <p:cNvPr id="9" name="TextBox 8"/>
+          <p:cNvSpPr txBox="1"/>
+          <p:nvPr/>
+        </p:nvSpPr>
+        <p:spPr>
+          <a:xfrm>
+            <a:off x="8046720" y="2606040"/>
+            <a:ext cx="3291840" cy="365760"/>
+          </a:xfrm>
+          <a:prstGeom prst="rect">
+            <a:avLst/>
+          </a:prstGeom>
+          <a:noFill/>
+        </p:spPr>
+        <p:txBody>
+          <a:bodyPr wrap="square" anchor="t" lIns="0" rIns="0" tIns="0" bIns="0"/>
+          <a:lstStyle/>
+          <a:p>
+            <a:pPr algn="l"/>
+            <a:r>
+              <a:rPr sz="1300" b="1" i="0">
+                <a:solidFill>
+                  <a:srgbClr val="A9C8F0"/>
+                </a:solidFill>
+                <a:latin typeface="Calibri"/>
+              </a:rPr>
+              <a:t>KEY IDEA</a:t>
+            </a:r>
+          </a:p>
+        </p:txBody>
+      </p:sp>
+      <p:sp>
+        <p:nvSpPr>
+          <p:cNvPr id="10" name="TextBox 9"/>
+          <p:cNvSpPr txBox="1"/>
+          <p:nvPr/>
+        </p:nvSpPr>
+        <p:spPr>
+          <a:xfrm>
+            <a:off x="8046720" y="3017520"/>
+            <a:ext cx="3291840" cy="2926080"/>
+          </a:xfrm>
+          <a:prstGeom prst="rect">
+            <a:avLst/>
+          </a:prstGeom>
+          <a:noFill/>
+        </p:spPr>
+        <p:txBody>
+          <a:bodyPr wrap="square" anchor="t" lIns="0" rIns="0" tIns="0" bIns="0"/>
+          <a:lstStyle/>
+          <a:p>
+            <a:pPr algn="l"/>
+            <a:r>
+              <a:rPr sz="2200" b="0" i="0">
+                <a:solidFill>
+                  <a:srgbClr val="FFFFFF"/>
+                </a:solidFill>
+                <a:latin typeface="Cambria"/>
+              </a:rPr>
+              <a:t>An SOP means the job is done the same safe way whoever does it.</a:t>
+            </a:r>
+          </a:p>
+        </p:txBody>
+      </p:sp>
+    </p:spTree>
+  </p:cSld>
+  <p:clrMapOvr>
+    <a:masterClrMapping/>
+  </p:clrMapOvr>
+</p:sld>
+</file>
+
+<file path=ppt/slides/slide12.xml><?xml version="1.0" encoding="utf-8"?>
+<p:sld xmlns:a="http://schemas.openxmlformats.org/drawingml/2006/main" xmlns:p="http://schemas.openxmlformats.org/presentationml/2006/main" xmlns:r="http://schemas.openxmlformats.org/officeDocument/2006/relationships">
+  <p:cSld>
+    <p:bg>
+      <p:bgPr>
+        <a:solidFill>
+          <a:srgbClr val="FFFFFF"/>
+        </a:solidFill>
+        <a:effectLst/>
+      </p:bgPr>
+    </p:bg>
+    <p:spTree>
+      <p:nvGrpSpPr>
+        <p:cNvPr id="1" name=""/>
+        <p:cNvGrpSpPr/>
+        <p:nvPr/>
+      </p:nvGrpSpPr>
+      <p:grpSpPr/>
+      <p:sp>
+        <p:nvSpPr>
+          <p:cNvPr id="2" name="TextBox 1"/>
+          <p:cNvSpPr txBox="1"/>
+          <p:nvPr/>
+        </p:nvSpPr>
+        <p:spPr>
+          <a:xfrm>
+            <a:off x="548640" y="320040"/>
+            <a:ext cx="11094415" cy="274320"/>
+          </a:xfrm>
+          <a:prstGeom prst="rect">
+            <a:avLst/>
+          </a:prstGeom>
+          <a:noFill/>
+        </p:spPr>
+        <p:txBody>
+          <a:bodyPr wrap="square" anchor="t" lIns="0" rIns="0" tIns="0" bIns="0"/>
+          <a:lstStyle/>
+          <a:p>
+            <a:pPr algn="l"/>
+            <a:r>
+              <a:rPr sz="1100" b="1" i="0">
+                <a:solidFill>
+                  <a:srgbClr val="54595D"/>
+                </a:solidFill>
+                <a:latin typeface="Calibri"/>
+              </a:rPr>
+              <a:t>ENGINEERING CORE  ·  Core topic 11</a:t>
+            </a:r>
+          </a:p>
+        </p:txBody>
+      </p:sp>
+      <p:sp>
+        <p:nvSpPr>
+          <p:cNvPr id="3" name="TextBox 2"/>
+          <p:cNvSpPr txBox="1"/>
+          <p:nvPr/>
+        </p:nvSpPr>
+        <p:spPr>
+          <a:xfrm>
+            <a:off x="548640" y="566928"/>
+            <a:ext cx="11094415" cy="822960"/>
+          </a:xfrm>
+          <a:prstGeom prst="rect">
+            <a:avLst/>
+          </a:prstGeom>
+          <a:noFill/>
+        </p:spPr>
+        <p:txBody>
+          <a:bodyPr wrap="square" anchor="ctr" lIns="0" rIns="0" tIns="0" bIns="0"/>
+          <a:lstStyle/>
+          <a:p>
+            <a:pPr algn="l"/>
+            <a:r>
+              <a:rPr sz="3200" b="1" i="0">
+                <a:solidFill>
+                  <a:srgbClr val="03306E"/>
+                </a:solidFill>
+                <a:latin typeface="Cambria"/>
+              </a:rPr>
+              <a:t>Quick check: Standard operating procedures</a:t>
+            </a:r>
+          </a:p>
+        </p:txBody>
+      </p:sp>
+      <p:sp>
+        <p:nvSpPr>
+          <p:cNvPr id="4" name="TextBox 3"/>
+          <p:cNvSpPr txBox="1"/>
+          <p:nvPr/>
+        </p:nvSpPr>
+        <p:spPr>
+          <a:xfrm>
+            <a:off x="548640" y="6446520"/>
+            <a:ext cx="8229600" cy="274320"/>
+          </a:xfrm>
+          <a:prstGeom prst="rect">
+            <a:avLst/>
+          </a:prstGeom>
+          <a:noFill/>
+        </p:spPr>
+        <p:txBody>
+          <a:bodyPr wrap="square" anchor="t" lIns="0" rIns="0" tIns="0" bIns="0"/>
+          <a:lstStyle/>
+          <a:p>
+            <a:pPr algn="l"/>
+            <a:r>
+              <a:rPr sz="1000" b="0" i="0">
+                <a:solidFill>
+                  <a:srgbClr val="54595D"/>
+                </a:solidFill>
+                <a:latin typeface="Calibri"/>
+              </a:rPr>
+              <a:t>Design and Development for Engineering and Manufacturing T Level  ·  Quality Management and SOPs</a:t>
+            </a:r>
+          </a:p>
+        </p:txBody>
+      </p:sp>
+      <p:sp>
+        <p:nvSpPr>
+          <p:cNvPr id="5" name="TextBox 4"/>
+          <p:cNvSpPr txBox="1"/>
+          <p:nvPr/>
+        </p:nvSpPr>
+        <p:spPr>
+          <a:xfrm>
+            <a:off x="10728655" y="6446520"/>
+            <a:ext cx="914400" cy="274320"/>
+          </a:xfrm>
+          <a:prstGeom prst="rect">
+            <a:avLst/>
+          </a:prstGeom>
+          <a:noFill/>
+        </p:spPr>
+        <p:txBody>
+          <a:bodyPr wrap="square" anchor="t" lIns="0" rIns="0" tIns="0" bIns="0"/>
+          <a:lstStyle/>
+          <a:p>
+            <a:pPr algn="r"/>
+            <a:r>
+              <a:rPr sz="1000" b="0" i="0">
+                <a:solidFill>
+                  <a:srgbClr val="54595D"/>
+                </a:solidFill>
+                <a:latin typeface="Calibri"/>
+              </a:rPr>
+              <a:t>12</a:t>
+            </a:r>
+          </a:p>
+        </p:txBody>
+      </p:sp>
+      <p:sp>
+        <p:nvSpPr>
+          <p:cNvPr id="6" name="Oval 5"/>
+          <p:cNvSpPr/>
+          <p:nvPr/>
+        </p:nvSpPr>
+        <p:spPr>
+          <a:xfrm>
+            <a:off x="548640" y="1691640"/>
+            <a:ext cx="502920" cy="502920"/>
+          </a:xfrm>
+          <a:prstGeom prst="ellipse">
+            <a:avLst/>
+          </a:prstGeom>
+          <a:solidFill>
+            <a:srgbClr val="F2B705"/>
+          </a:solidFill>
+          <a:ln>
+            <a:noFill/>
+          </a:ln>
+          <a:effectLst/>
+        </p:spPr>
+        <p:style>
+          <a:lnRef idx="1">
+            <a:schemeClr val="accent1"/>
+          </a:lnRef>
+          <a:fillRef idx="3">
+            <a:schemeClr val="accent1"/>
+          </a:fillRef>
+          <a:effectRef idx="2">
+            <a:schemeClr val="accent1"/>
+          </a:effectRef>
+          <a:fontRef idx="minor">
+            <a:schemeClr val="lt1"/>
+          </a:fontRef>
+        </p:style>
+        <p:txBody>
+          <a:bodyPr rtlCol="0" anchor="ctr" lIns="0" rIns="0" tIns="0" bIns="0"/>
+          <a:lstStyle/>
+          <a:p>
+            <a:pPr algn="ctr"/>
+            <a:r>
+              <a:rPr sz="1600" b="1">
+                <a:solidFill>
+                  <a:srgbClr val="202122"/>
+                </a:solidFill>
+                <a:latin typeface="Calibri"/>
+              </a:rPr>
+              <a:t>1</a:t>
+            </a:r>
+          </a:p>
+        </p:txBody>
+      </p:sp>
+      <p:sp>
+        <p:nvSpPr>
+          <p:cNvPr id="7" name="TextBox 6"/>
+          <p:cNvSpPr txBox="1"/>
+          <p:nvPr/>
+        </p:nvSpPr>
+        <p:spPr>
+          <a:xfrm>
+            <a:off x="1371600" y="1645920"/>
+            <a:ext cx="10271455" cy="1188720"/>
+          </a:xfrm>
+          <a:prstGeom prst="rect">
+            <a:avLst/>
+          </a:prstGeom>
+          <a:noFill/>
+        </p:spPr>
+        <p:txBody>
+          <a:bodyPr wrap="square" anchor="t" lIns="0" rIns="0" tIns="0" bIns="0"/>
+          <a:lstStyle/>
+          <a:p>
+            <a:pPr algn="l"/>
+            <a:r>
+              <a:rPr sz="2400" b="0" i="0">
+                <a:solidFill>
+                  <a:srgbClr val="202122"/>
+                </a:solidFill>
+                <a:latin typeface="Calibri"/>
+              </a:rPr>
+              <a:t>What is an SOP?</a:t>
+            </a:r>
+          </a:p>
+        </p:txBody>
+      </p:sp>
+      <p:sp>
+        <p:nvSpPr>
+          <p:cNvPr id="8" name="Oval 7"/>
+          <p:cNvSpPr/>
+          <p:nvPr/>
+        </p:nvSpPr>
+        <p:spPr>
+          <a:xfrm>
+            <a:off x="548640" y="3108960"/>
+            <a:ext cx="502920" cy="502920"/>
+          </a:xfrm>
+          <a:prstGeom prst="ellipse">
+            <a:avLst/>
+          </a:prstGeom>
+          <a:solidFill>
+            <a:srgbClr val="F2B705"/>
+          </a:solidFill>
+          <a:ln>
+            <a:noFill/>
+          </a:ln>
+          <a:effectLst/>
+        </p:spPr>
+        <p:style>
+          <a:lnRef idx="1">
+            <a:schemeClr val="accent1"/>
+          </a:lnRef>
+          <a:fillRef idx="3">
+            <a:schemeClr val="accent1"/>
+          </a:fillRef>
+          <a:effectRef idx="2">
+            <a:schemeClr val="accent1"/>
+          </a:effectRef>
+          <a:fontRef idx="minor">
+            <a:schemeClr val="lt1"/>
+          </a:fontRef>
+        </p:style>
+        <p:txBody>
+          <a:bodyPr rtlCol="0" anchor="ctr" lIns="0" rIns="0" tIns="0" bIns="0"/>
+          <a:lstStyle/>
+          <a:p>
+            <a:pPr algn="ctr"/>
+            <a:r>
+              <a:rPr sz="1600" b="1">
+                <a:solidFill>
+                  <a:srgbClr val="202122"/>
+                </a:solidFill>
+                <a:latin typeface="Calibri"/>
+              </a:rPr>
+              <a:t>2</a:t>
+            </a:r>
+          </a:p>
+        </p:txBody>
+      </p:sp>
+      <p:sp>
+        <p:nvSpPr>
+          <p:cNvPr id="9" name="TextBox 8"/>
+          <p:cNvSpPr txBox="1"/>
+          <p:nvPr/>
+        </p:nvSpPr>
+        <p:spPr>
+          <a:xfrm>
+            <a:off x="1371600" y="3063240"/>
+            <a:ext cx="10271455" cy="1188720"/>
+          </a:xfrm>
+          <a:prstGeom prst="rect">
+            <a:avLst/>
+          </a:prstGeom>
+          <a:noFill/>
+        </p:spPr>
+        <p:txBody>
+          <a:bodyPr wrap="square" anchor="t" lIns="0" rIns="0" tIns="0" bIns="0"/>
+          <a:lstStyle/>
+          <a:p>
+            <a:pPr algn="l"/>
+            <a:r>
+              <a:rPr sz="2400" b="0" i="0">
+                <a:solidFill>
+                  <a:srgbClr val="202122"/>
+                </a:solidFill>
+                <a:latin typeface="Calibri"/>
+              </a:rPr>
+              <a:t>Give two purposes of SOPs.</a:t>
+            </a:r>
+          </a:p>
+        </p:txBody>
+      </p:sp>
+      <p:sp>
+        <p:nvSpPr>
+          <p:cNvPr id="10" name="Oval 9"/>
+          <p:cNvSpPr/>
+          <p:nvPr/>
+        </p:nvSpPr>
+        <p:spPr>
+          <a:xfrm>
+            <a:off x="548640" y="4526280"/>
+            <a:ext cx="502920" cy="502920"/>
+          </a:xfrm>
+          <a:prstGeom prst="ellipse">
+            <a:avLst/>
+          </a:prstGeom>
+          <a:solidFill>
+            <a:srgbClr val="F2B705"/>
+          </a:solidFill>
+          <a:ln>
+            <a:noFill/>
+          </a:ln>
+          <a:effectLst/>
+        </p:spPr>
+        <p:style>
+          <a:lnRef idx="1">
+            <a:schemeClr val="accent1"/>
+          </a:lnRef>
+          <a:fillRef idx="3">
+            <a:schemeClr val="accent1"/>
+          </a:fillRef>
+          <a:effectRef idx="2">
+            <a:schemeClr val="accent1"/>
+          </a:effectRef>
+          <a:fontRef idx="minor">
+            <a:schemeClr val="lt1"/>
+          </a:fontRef>
+        </p:style>
+        <p:txBody>
+          <a:bodyPr rtlCol="0" anchor="ctr" lIns="0" rIns="0" tIns="0" bIns="0"/>
+          <a:lstStyle/>
+          <a:p>
+            <a:pPr algn="ctr"/>
+            <a:r>
+              <a:rPr sz="1600" b="1">
+                <a:solidFill>
+                  <a:srgbClr val="202122"/>
+                </a:solidFill>
+                <a:latin typeface="Calibri"/>
+              </a:rPr>
+              <a:t>3</a:t>
+            </a:r>
+          </a:p>
+        </p:txBody>
+      </p:sp>
+      <p:sp>
+        <p:nvSpPr>
+          <p:cNvPr id="11" name="TextBox 10"/>
+          <p:cNvSpPr txBox="1"/>
+          <p:nvPr/>
+        </p:nvSpPr>
+        <p:spPr>
+          <a:xfrm>
+            <a:off x="1371600" y="4480560"/>
+            <a:ext cx="10271455" cy="1188720"/>
+          </a:xfrm>
+          <a:prstGeom prst="rect">
+            <a:avLst/>
+          </a:prstGeom>
+          <a:noFill/>
+        </p:spPr>
+        <p:txBody>
+          <a:bodyPr wrap="square" anchor="t" lIns="0" rIns="0" tIns="0" bIns="0"/>
+          <a:lstStyle/>
+          <a:p>
+            <a:pPr algn="l"/>
+            <a:r>
+              <a:rPr sz="2400" b="0" i="0">
+                <a:solidFill>
+                  <a:srgbClr val="202122"/>
+                </a:solidFill>
+                <a:latin typeface="Calibri"/>
+              </a:rPr>
+              <a:t>Why include a revision history?</a:t>
+            </a:r>
+          </a:p>
+        </p:txBody>
+      </p:sp>
+      <p:sp>
+        <p:nvSpPr>
+          <p:cNvPr id="12" name="TextBox 11"/>
+          <p:cNvSpPr txBox="1"/>
+          <p:nvPr/>
+        </p:nvSpPr>
+        <p:spPr>
+          <a:xfrm>
+            <a:off x="548640" y="5852160"/>
+            <a:ext cx="11094415" cy="365760"/>
+          </a:xfrm>
+          <a:prstGeom prst="rect">
+            <a:avLst/>
+          </a:prstGeom>
+          <a:noFill/>
+        </p:spPr>
+        <p:txBody>
+          <a:bodyPr wrap="square" anchor="t" lIns="0" rIns="0" tIns="0" bIns="0"/>
+          <a:lstStyle/>
+          <a:p>
+            <a:pPr algn="l"/>
+            <a:r>
+              <a:rPr sz="1300" b="0" i="1">
+                <a:solidFill>
+                  <a:srgbClr val="54595D"/>
+                </a:solidFill>
+                <a:latin typeface="Calibri"/>
+              </a:rPr>
+              <a:t>Answer on mini whiteboards or in your book. Answers are in the speaker notes.</a:t>
+            </a:r>
+          </a:p>
+        </p:txBody>
+      </p:sp>
+    </p:spTree>
+  </p:cSld>
+  <p:clrMapOvr>
+    <a:masterClrMapping/>
+  </p:clrMapOvr>
+</p:sld>
+</file>
+
+<file path=ppt/slides/slide13.xml><?xml version="1.0" encoding="utf-8"?>
+<p:sld xmlns:a="http://schemas.openxmlformats.org/drawingml/2006/main" xmlns:p="http://schemas.openxmlformats.org/presentationml/2006/main" xmlns:r="http://schemas.openxmlformats.org/officeDocument/2006/relationships">
+  <p:cSld>
+    <p:bg>
+      <p:bgPr>
+        <a:solidFill>
+          <a:srgbClr val="FFFFFF"/>
+        </a:solidFill>
+        <a:effectLst/>
+      </p:bgPr>
+    </p:bg>
+    <p:spTree>
+      <p:nvGrpSpPr>
+        <p:cNvPr id="1" name=""/>
+        <p:cNvGrpSpPr/>
+        <p:nvPr/>
+      </p:nvGrpSpPr>
+      <p:grpSpPr/>
+      <p:sp>
+        <p:nvSpPr>
+          <p:cNvPr id="2" name="TextBox 1"/>
+          <p:cNvSpPr txBox="1"/>
+          <p:nvPr/>
+        </p:nvSpPr>
+        <p:spPr>
+          <a:xfrm>
+            <a:off x="548640" y="320040"/>
+            <a:ext cx="11094415" cy="274320"/>
+          </a:xfrm>
+          <a:prstGeom prst="rect">
+            <a:avLst/>
+          </a:prstGeom>
+          <a:noFill/>
+        </p:spPr>
+        <p:txBody>
+          <a:bodyPr wrap="square" anchor="t" lIns="0" rIns="0" tIns="0" bIns="0"/>
+          <a:lstStyle/>
+          <a:p>
+            <a:pPr algn="l"/>
+            <a:r>
+              <a:rPr sz="1100" b="1" i="0">
+                <a:solidFill>
+                  <a:srgbClr val="54595D"/>
+                </a:solidFill>
+                <a:latin typeface="Calibri"/>
+              </a:rPr>
+              <a:t>ENGINEERING CORE  ·  Core topic 11</a:t>
+            </a:r>
+          </a:p>
+        </p:txBody>
+      </p:sp>
+      <p:sp>
+        <p:nvSpPr>
+          <p:cNvPr id="3" name="TextBox 2"/>
+          <p:cNvSpPr txBox="1"/>
+          <p:nvPr/>
+        </p:nvSpPr>
+        <p:spPr>
+          <a:xfrm>
+            <a:off x="548640" y="566928"/>
+            <a:ext cx="11094415" cy="822960"/>
+          </a:xfrm>
+          <a:prstGeom prst="rect">
+            <a:avLst/>
+          </a:prstGeom>
+          <a:noFill/>
+        </p:spPr>
+        <p:txBody>
+          <a:bodyPr wrap="square" anchor="ctr" lIns="0" rIns="0" tIns="0" bIns="0"/>
+          <a:lstStyle/>
+          <a:p>
+            <a:pPr algn="l"/>
+            <a:r>
+              <a:rPr sz="3200" b="1" i="0">
+                <a:solidFill>
+                  <a:srgbClr val="03306E"/>
+                </a:solidFill>
+                <a:latin typeface="Cambria"/>
+              </a:rPr>
+              <a:t>Check your understanding</a:t>
+            </a:r>
+          </a:p>
+        </p:txBody>
+      </p:sp>
+      <p:sp>
+        <p:nvSpPr>
+          <p:cNvPr id="4" name="TextBox 3"/>
+          <p:cNvSpPr txBox="1"/>
+          <p:nvPr/>
+        </p:nvSpPr>
+        <p:spPr>
+          <a:xfrm>
+            <a:off x="548640" y="6446520"/>
+            <a:ext cx="8229600" cy="274320"/>
+          </a:xfrm>
+          <a:prstGeom prst="rect">
+            <a:avLst/>
+          </a:prstGeom>
+          <a:noFill/>
+        </p:spPr>
+        <p:txBody>
+          <a:bodyPr wrap="square" anchor="t" lIns="0" rIns="0" tIns="0" bIns="0"/>
+          <a:lstStyle/>
+          <a:p>
+            <a:pPr algn="l"/>
+            <a:r>
+              <a:rPr sz="1000" b="0" i="0">
+                <a:solidFill>
+                  <a:srgbClr val="54595D"/>
+                </a:solidFill>
+                <a:latin typeface="Calibri"/>
+              </a:rPr>
+              <a:t>Design and Development for Engineering and Manufacturing T Level  ·  Quality Management and SOPs</a:t>
+            </a:r>
+          </a:p>
+        </p:txBody>
+      </p:sp>
+      <p:sp>
+        <p:nvSpPr>
+          <p:cNvPr id="5" name="TextBox 4"/>
+          <p:cNvSpPr txBox="1"/>
+          <p:nvPr/>
+        </p:nvSpPr>
+        <p:spPr>
+          <a:xfrm>
+            <a:off x="10728655" y="6446520"/>
+            <a:ext cx="914400" cy="274320"/>
+          </a:xfrm>
+          <a:prstGeom prst="rect">
+            <a:avLst/>
+          </a:prstGeom>
+          <a:noFill/>
+        </p:spPr>
+        <p:txBody>
+          <a:bodyPr wrap="square" anchor="t" lIns="0" rIns="0" tIns="0" bIns="0"/>
+          <a:lstStyle/>
+          <a:p>
+            <a:pPr algn="r"/>
+            <a:r>
+              <a:rPr sz="1000" b="0" i="0">
+                <a:solidFill>
+                  <a:srgbClr val="54595D"/>
+                </a:solidFill>
+                <a:latin typeface="Calibri"/>
+              </a:rPr>
+              <a:t>13</a:t>
+            </a:r>
+          </a:p>
+        </p:txBody>
+      </p:sp>
+      <p:sp>
+        <p:nvSpPr>
+          <p:cNvPr id="6" name="Oval 5"/>
+          <p:cNvSpPr/>
+          <p:nvPr/>
+        </p:nvSpPr>
+        <p:spPr>
+          <a:xfrm>
+            <a:off x="548640" y="1618488"/>
+            <a:ext cx="411480" cy="411480"/>
+          </a:xfrm>
+          <a:prstGeom prst="ellipse">
+            <a:avLst/>
+          </a:prstGeom>
+          <a:solidFill>
+            <a:srgbClr val="F2B705"/>
+          </a:solidFill>
+          <a:ln>
+            <a:noFill/>
+          </a:ln>
+          <a:effectLst/>
+        </p:spPr>
+        <p:style>
+          <a:lnRef idx="1">
+            <a:schemeClr val="accent1"/>
+          </a:lnRef>
+          <a:fillRef idx="3">
+            <a:schemeClr val="accent1"/>
+          </a:fillRef>
+          <a:effectRef idx="2">
+            <a:schemeClr val="accent1"/>
+          </a:effectRef>
+          <a:fontRef idx="minor">
+            <a:schemeClr val="lt1"/>
+          </a:fontRef>
+        </p:style>
+        <p:txBody>
+          <a:bodyPr rtlCol="0" anchor="ctr" lIns="0" rIns="0" tIns="0" bIns="0"/>
+          <a:lstStyle/>
+          <a:p>
+            <a:pPr algn="ctr"/>
+            <a:r>
+              <a:rPr sz="1400" b="1">
+                <a:solidFill>
+                  <a:srgbClr val="202122"/>
+                </a:solidFill>
+                <a:latin typeface="Calibri"/>
+              </a:rPr>
+              <a:t>1</a:t>
+            </a:r>
+          </a:p>
+        </p:txBody>
+      </p:sp>
+      <p:sp>
+        <p:nvSpPr>
+          <p:cNvPr id="7" name="TextBox 6"/>
+          <p:cNvSpPr txBox="1"/>
+          <p:nvPr/>
+        </p:nvSpPr>
+        <p:spPr>
+          <a:xfrm>
+            <a:off x="1234440" y="1600200"/>
+            <a:ext cx="10408615" cy="1030986"/>
+          </a:xfrm>
+          <a:prstGeom prst="rect">
+            <a:avLst/>
+          </a:prstGeom>
+          <a:noFill/>
+        </p:spPr>
+        <p:txBody>
+          <a:bodyPr wrap="square" anchor="t" lIns="0" rIns="0" tIns="0" bIns="0"/>
+          <a:lstStyle/>
+          <a:p>
+            <a:pPr algn="l"/>
+            <a:r>
+              <a:rPr sz="2200" b="0" i="0">
+                <a:solidFill>
+                  <a:srgbClr val="202122"/>
+                </a:solidFill>
+                <a:latin typeface="Calibri"/>
+              </a:rPr>
+              <a:t>Is inspection quality assurance or quality control?</a:t>
+            </a:r>
+          </a:p>
+        </p:txBody>
+      </p:sp>
+      <p:sp>
+        <p:nvSpPr>
+          <p:cNvPr id="8" name="Oval 7"/>
+          <p:cNvSpPr/>
+          <p:nvPr/>
+        </p:nvSpPr>
+        <p:spPr>
+          <a:xfrm>
+            <a:off x="548640" y="2814066"/>
+            <a:ext cx="411480" cy="411480"/>
+          </a:xfrm>
+          <a:prstGeom prst="ellipse">
+            <a:avLst/>
+          </a:prstGeom>
+          <a:solidFill>
+            <a:srgbClr val="F2B705"/>
+          </a:solidFill>
+          <a:ln>
+            <a:noFill/>
+          </a:ln>
+          <a:effectLst/>
+        </p:spPr>
+        <p:style>
+          <a:lnRef idx="1">
+            <a:schemeClr val="accent1"/>
+          </a:lnRef>
+          <a:fillRef idx="3">
+            <a:schemeClr val="accent1"/>
+          </a:fillRef>
+          <a:effectRef idx="2">
+            <a:schemeClr val="accent1"/>
+          </a:effectRef>
+          <a:fontRef idx="minor">
+            <a:schemeClr val="lt1"/>
+          </a:fontRef>
+        </p:style>
+        <p:txBody>
+          <a:bodyPr rtlCol="0" anchor="ctr" lIns="0" rIns="0" tIns="0" bIns="0"/>
+          <a:lstStyle/>
+          <a:p>
+            <a:pPr algn="ctr"/>
+            <a:r>
+              <a:rPr sz="1400" b="1">
+                <a:solidFill>
+                  <a:srgbClr val="202122"/>
+                </a:solidFill>
+                <a:latin typeface="Calibri"/>
+              </a:rPr>
+              <a:t>2</a:t>
+            </a:r>
+          </a:p>
+        </p:txBody>
+      </p:sp>
+      <p:sp>
+        <p:nvSpPr>
+          <p:cNvPr id="9" name="TextBox 8"/>
+          <p:cNvSpPr txBox="1"/>
+          <p:nvPr/>
+        </p:nvSpPr>
+        <p:spPr>
+          <a:xfrm>
+            <a:off x="1234440" y="2795778"/>
+            <a:ext cx="10408615" cy="1030986"/>
+          </a:xfrm>
+          <a:prstGeom prst="rect">
+            <a:avLst/>
+          </a:prstGeom>
+          <a:noFill/>
+        </p:spPr>
+        <p:txBody>
+          <a:bodyPr wrap="square" anchor="t" lIns="0" rIns="0" tIns="0" bIns="0"/>
+          <a:lstStyle/>
+          <a:p>
+            <a:pPr algn="l"/>
+            <a:r>
+              <a:rPr sz="2200" b="0" i="0">
+                <a:solidFill>
+                  <a:srgbClr val="202122"/>
+                </a:solidFill>
+                <a:latin typeface="Calibri"/>
+              </a:rPr>
+              <a:t>When is SPC better than 100% inspection?</a:t>
+            </a:r>
+          </a:p>
+        </p:txBody>
+      </p:sp>
+      <p:sp>
+        <p:nvSpPr>
+          <p:cNvPr id="10" name="Oval 9"/>
+          <p:cNvSpPr/>
+          <p:nvPr/>
+        </p:nvSpPr>
+        <p:spPr>
+          <a:xfrm>
+            <a:off x="548640" y="4009644"/>
+            <a:ext cx="411480" cy="411480"/>
+          </a:xfrm>
+          <a:prstGeom prst="ellipse">
+            <a:avLst/>
+          </a:prstGeom>
+          <a:solidFill>
+            <a:srgbClr val="F2B705"/>
+          </a:solidFill>
+          <a:ln>
+            <a:noFill/>
+          </a:ln>
+          <a:effectLst/>
+        </p:spPr>
+        <p:style>
+          <a:lnRef idx="1">
+            <a:schemeClr val="accent1"/>
+          </a:lnRef>
+          <a:fillRef idx="3">
+            <a:schemeClr val="accent1"/>
+          </a:fillRef>
+          <a:effectRef idx="2">
+            <a:schemeClr val="accent1"/>
+          </a:effectRef>
+          <a:fontRef idx="minor">
+            <a:schemeClr val="lt1"/>
+          </a:fontRef>
+        </p:style>
+        <p:txBody>
+          <a:bodyPr rtlCol="0" anchor="ctr" lIns="0" rIns="0" tIns="0" bIns="0"/>
+          <a:lstStyle/>
+          <a:p>
+            <a:pPr algn="ctr"/>
+            <a:r>
+              <a:rPr sz="1400" b="1">
+                <a:solidFill>
+                  <a:srgbClr val="202122"/>
+                </a:solidFill>
+                <a:latin typeface="Calibri"/>
+              </a:rPr>
+              <a:t>3</a:t>
+            </a:r>
+          </a:p>
+        </p:txBody>
+      </p:sp>
+      <p:sp>
+        <p:nvSpPr>
+          <p:cNvPr id="11" name="TextBox 10"/>
+          <p:cNvSpPr txBox="1"/>
+          <p:nvPr/>
+        </p:nvSpPr>
+        <p:spPr>
+          <a:xfrm>
+            <a:off x="1234440" y="3991356"/>
+            <a:ext cx="10408615" cy="1030986"/>
+          </a:xfrm>
+          <a:prstGeom prst="rect">
+            <a:avLst/>
+          </a:prstGeom>
+          <a:noFill/>
+        </p:spPr>
+        <p:txBody>
+          <a:bodyPr wrap="square" anchor="t" lIns="0" rIns="0" tIns="0" bIns="0"/>
+          <a:lstStyle/>
+          <a:p>
+            <a:pPr algn="l"/>
+            <a:r>
+              <a:rPr sz="2200" b="0" i="0">
+                <a:solidFill>
+                  <a:srgbClr val="202122"/>
+                </a:solidFill>
+                <a:latin typeface="Calibri"/>
+              </a:rPr>
+              <a:t>What does a Pareto chart show?</a:t>
+            </a:r>
+          </a:p>
+        </p:txBody>
+      </p:sp>
+      <p:sp>
+        <p:nvSpPr>
+          <p:cNvPr id="12" name="Oval 11"/>
+          <p:cNvSpPr/>
+          <p:nvPr/>
+        </p:nvSpPr>
+        <p:spPr>
+          <a:xfrm>
+            <a:off x="548640" y="5205221"/>
+            <a:ext cx="411480" cy="411480"/>
+          </a:xfrm>
+          <a:prstGeom prst="ellipse">
+            <a:avLst/>
+          </a:prstGeom>
+          <a:solidFill>
+            <a:srgbClr val="F2B705"/>
+          </a:solidFill>
+          <a:ln>
+            <a:noFill/>
+          </a:ln>
+          <a:effectLst/>
+        </p:spPr>
+        <p:style>
+          <a:lnRef idx="1">
+            <a:schemeClr val="accent1"/>
+          </a:lnRef>
+          <a:fillRef idx="3">
+            <a:schemeClr val="accent1"/>
+          </a:fillRef>
+          <a:effectRef idx="2">
+            <a:schemeClr val="accent1"/>
+          </a:effectRef>
+          <a:fontRef idx="minor">
+            <a:schemeClr val="lt1"/>
+          </a:fontRef>
+        </p:style>
+        <p:txBody>
+          <a:bodyPr rtlCol="0" anchor="ctr" lIns="0" rIns="0" tIns="0" bIns="0"/>
+          <a:lstStyle/>
+          <a:p>
+            <a:pPr algn="ctr"/>
+            <a:r>
+              <a:rPr sz="1400" b="1">
+                <a:solidFill>
+                  <a:srgbClr val="202122"/>
+                </a:solidFill>
+                <a:latin typeface="Calibri"/>
+              </a:rPr>
+              <a:t>4</a:t>
+            </a:r>
+          </a:p>
+        </p:txBody>
+      </p:sp>
+      <p:sp>
+        <p:nvSpPr>
+          <p:cNvPr id="13" name="TextBox 12"/>
+          <p:cNvSpPr txBox="1"/>
+          <p:nvPr/>
+        </p:nvSpPr>
+        <p:spPr>
+          <a:xfrm>
+            <a:off x="1234440" y="5186933"/>
+            <a:ext cx="10408615" cy="1030986"/>
+          </a:xfrm>
+          <a:prstGeom prst="rect">
+            <a:avLst/>
+          </a:prstGeom>
+          <a:noFill/>
+        </p:spPr>
+        <p:txBody>
+          <a:bodyPr wrap="square" anchor="t" lIns="0" rIns="0" tIns="0" bIns="0"/>
+          <a:lstStyle/>
+          <a:p>
+            <a:pPr algn="l"/>
+            <a:r>
+              <a:rPr sz="2200" b="0" i="0">
+                <a:solidFill>
+                  <a:srgbClr val="202122"/>
+                </a:solidFill>
+                <a:latin typeface="Calibri"/>
+              </a:rPr>
+              <a:t>Give two purposes of an SOP.</a:t>
+            </a:r>
+          </a:p>
+        </p:txBody>
+      </p:sp>
+    </p:spTree>
+  </p:cSld>
+  <p:clrMapOvr>
+    <a:masterClrMapping/>
+  </p:clrMapOvr>
+</p:sld>
+</file>
+
+<file path=ppt/slides/slide14.xml><?xml version="1.0" encoding="utf-8"?>
+<p:sld xmlns:a="http://schemas.openxmlformats.org/drawingml/2006/main" xmlns:p="http://schemas.openxmlformats.org/presentationml/2006/main" xmlns:r="http://schemas.openxmlformats.org/officeDocument/2006/relationships">
+  <p:cSld>
+    <p:bg>
+      <p:bgPr>
+        <a:solidFill>
+          <a:srgbClr val="FFFFFF"/>
+        </a:solidFill>
+        <a:effectLst/>
+      </p:bgPr>
+    </p:bg>
+    <p:spTree>
+      <p:nvGrpSpPr>
+        <p:cNvPr id="1" name=""/>
+        <p:cNvGrpSpPr/>
+        <p:nvPr/>
+      </p:nvGrpSpPr>
+      <p:grpSpPr/>
+      <p:sp>
+        <p:nvSpPr>
+          <p:cNvPr id="2" name="TextBox 1"/>
+          <p:cNvSpPr txBox="1"/>
+          <p:nvPr/>
+        </p:nvSpPr>
+        <p:spPr>
+          <a:xfrm>
+            <a:off x="548640" y="320040"/>
+            <a:ext cx="11094415" cy="274320"/>
+          </a:xfrm>
+          <a:prstGeom prst="rect">
+            <a:avLst/>
+          </a:prstGeom>
+          <a:noFill/>
+        </p:spPr>
+        <p:txBody>
+          <a:bodyPr wrap="square" anchor="t" lIns="0" rIns="0" tIns="0" bIns="0"/>
+          <a:lstStyle/>
+          <a:p>
+            <a:pPr algn="l"/>
+            <a:r>
+              <a:rPr sz="1100" b="1" i="0">
+                <a:solidFill>
+                  <a:srgbClr val="54595D"/>
+                </a:solidFill>
+                <a:latin typeface="Calibri"/>
+              </a:rPr>
+              <a:t>ENGINEERING CORE  ·  Core topic 11</a:t>
+            </a:r>
+          </a:p>
+        </p:txBody>
+      </p:sp>
+      <p:sp>
+        <p:nvSpPr>
+          <p:cNvPr id="3" name="TextBox 2"/>
+          <p:cNvSpPr txBox="1"/>
+          <p:nvPr/>
+        </p:nvSpPr>
+        <p:spPr>
+          <a:xfrm>
+            <a:off x="548640" y="566928"/>
+            <a:ext cx="11094415" cy="822960"/>
+          </a:xfrm>
+          <a:prstGeom prst="rect">
+            <a:avLst/>
+          </a:prstGeom>
+          <a:noFill/>
+        </p:spPr>
+        <p:txBody>
+          <a:bodyPr wrap="square" anchor="ctr" lIns="0" rIns="0" tIns="0" bIns="0"/>
+          <a:lstStyle/>
+          <a:p>
+            <a:pPr algn="l"/>
+            <a:r>
+              <a:rPr sz="3200" b="1" i="0">
+                <a:solidFill>
+                  <a:srgbClr val="03306E"/>
+                </a:solidFill>
+                <a:latin typeface="Cambria"/>
+              </a:rPr>
+              <a:t>Answers</a:t>
+            </a:r>
+          </a:p>
+        </p:txBody>
+      </p:sp>
+      <p:sp>
+        <p:nvSpPr>
+          <p:cNvPr id="4" name="TextBox 3"/>
+          <p:cNvSpPr txBox="1"/>
+          <p:nvPr/>
+        </p:nvSpPr>
+        <p:spPr>
+          <a:xfrm>
+            <a:off x="548640" y="6446520"/>
+            <a:ext cx="8229600" cy="274320"/>
+          </a:xfrm>
+          <a:prstGeom prst="rect">
+            <a:avLst/>
+          </a:prstGeom>
+          <a:noFill/>
+        </p:spPr>
+        <p:txBody>
+          <a:bodyPr wrap="square" anchor="t" lIns="0" rIns="0" tIns="0" bIns="0"/>
+          <a:lstStyle/>
+          <a:p>
+            <a:pPr algn="l"/>
+            <a:r>
+              <a:rPr sz="1000" b="0" i="0">
+                <a:solidFill>
+                  <a:srgbClr val="54595D"/>
+                </a:solidFill>
+                <a:latin typeface="Calibri"/>
+              </a:rPr>
+              <a:t>Design and Development for Engineering and Manufacturing T Level  ·  Quality Management and SOPs</a:t>
+            </a:r>
+          </a:p>
+        </p:txBody>
+      </p:sp>
+      <p:sp>
+        <p:nvSpPr>
+          <p:cNvPr id="5" name="TextBox 4"/>
+          <p:cNvSpPr txBox="1"/>
+          <p:nvPr/>
+        </p:nvSpPr>
+        <p:spPr>
+          <a:xfrm>
+            <a:off x="10728655" y="6446520"/>
+            <a:ext cx="914400" cy="274320"/>
+          </a:xfrm>
+          <a:prstGeom prst="rect">
+            <a:avLst/>
+          </a:prstGeom>
+          <a:noFill/>
+        </p:spPr>
+        <p:txBody>
+          <a:bodyPr wrap="square" anchor="t" lIns="0" rIns="0" tIns="0" bIns="0"/>
+          <a:lstStyle/>
+          <a:p>
+            <a:pPr algn="r"/>
+            <a:r>
+              <a:rPr sz="1000" b="0" i="0">
+                <a:solidFill>
+                  <a:srgbClr val="54595D"/>
+                </a:solidFill>
+                <a:latin typeface="Calibri"/>
+              </a:rPr>
+              <a:t>14</a:t>
+            </a:r>
+          </a:p>
+        </p:txBody>
+      </p:sp>
+      <p:sp>
+        <p:nvSpPr>
+          <p:cNvPr id="6" name="Oval 5"/>
+          <p:cNvSpPr/>
+          <p:nvPr/>
+        </p:nvSpPr>
+        <p:spPr>
+          <a:xfrm>
+            <a:off x="548640" y="1618488"/>
+            <a:ext cx="411480" cy="411480"/>
+          </a:xfrm>
+          <a:prstGeom prst="ellipse">
+            <a:avLst/>
+          </a:prstGeom>
+          <a:solidFill>
+            <a:srgbClr val="F2B705"/>
+          </a:solidFill>
+          <a:ln>
+            <a:noFill/>
+          </a:ln>
+          <a:effectLst/>
+        </p:spPr>
+        <p:style>
+          <a:lnRef idx="1">
+            <a:schemeClr val="accent1"/>
+          </a:lnRef>
+          <a:fillRef idx="3">
+            <a:schemeClr val="accent1"/>
+          </a:fillRef>
+          <a:effectRef idx="2">
+            <a:schemeClr val="accent1"/>
+          </a:effectRef>
+          <a:fontRef idx="minor">
+            <a:schemeClr val="lt1"/>
+          </a:fontRef>
+        </p:style>
+        <p:txBody>
+          <a:bodyPr rtlCol="0" anchor="ctr" lIns="0" rIns="0" tIns="0" bIns="0"/>
+          <a:lstStyle/>
+          <a:p>
+            <a:pPr algn="ctr"/>
+            <a:r>
+              <a:rPr sz="1400" b="1">
+                <a:solidFill>
+                  <a:srgbClr val="202122"/>
+                </a:solidFill>
+                <a:latin typeface="Calibri"/>
+              </a:rPr>
+              <a:t>1</a:t>
+            </a:r>
+          </a:p>
+        </p:txBody>
+      </p:sp>
+      <p:sp>
+        <p:nvSpPr>
+          <p:cNvPr id="7" name="TextBox 6"/>
+          <p:cNvSpPr txBox="1"/>
+          <p:nvPr/>
+        </p:nvSpPr>
+        <p:spPr>
+          <a:xfrm>
+            <a:off x="1234440" y="1600200"/>
+            <a:ext cx="10408615" cy="1030986"/>
+          </a:xfrm>
+          <a:prstGeom prst="rect">
+            <a:avLst/>
+          </a:prstGeom>
+          <a:noFill/>
+        </p:spPr>
+        <p:txBody>
+          <a:bodyPr wrap="square" anchor="t" lIns="0" rIns="0" tIns="0" bIns="0"/>
+          <a:lstStyle/>
+          <a:p>
+            <a:pPr algn="l"/>
+            <a:r>
+              <a:rPr sz="1800" b="0" i="0">
+                <a:solidFill>
+                  <a:srgbClr val="54595D"/>
+                </a:solidFill>
+                <a:latin typeface="Calibri"/>
+              </a:rPr>
+              <a:t>Is inspection quality assurance or quality control?</a:t>
+            </a:r>
+          </a:p>
+          <a:p>
+            <a:r>
+              <a:rPr sz="1800" b="1">
+                <a:solidFill>
+                  <a:srgbClr val="03306E"/>
+                </a:solidFill>
+                <a:latin typeface="Calibri"/>
+              </a:rPr>
+              <a:t>Quality control.</a:t>
+            </a:r>
+          </a:p>
+        </p:txBody>
+      </p:sp>
+      <p:sp>
+        <p:nvSpPr>
+          <p:cNvPr id="8" name="Oval 7"/>
+          <p:cNvSpPr/>
+          <p:nvPr/>
+        </p:nvSpPr>
+        <p:spPr>
+          <a:xfrm>
+            <a:off x="548640" y="2814066"/>
+            <a:ext cx="411480" cy="411480"/>
+          </a:xfrm>
+          <a:prstGeom prst="ellipse">
+            <a:avLst/>
+          </a:prstGeom>
+          <a:solidFill>
+            <a:srgbClr val="F2B705"/>
+          </a:solidFill>
+          <a:ln>
+            <a:noFill/>
+          </a:ln>
+          <a:effectLst/>
+        </p:spPr>
+        <p:style>
+          <a:lnRef idx="1">
+            <a:schemeClr val="accent1"/>
+          </a:lnRef>
+          <a:fillRef idx="3">
+            <a:schemeClr val="accent1"/>
+          </a:fillRef>
+          <a:effectRef idx="2">
+            <a:schemeClr val="accent1"/>
+          </a:effectRef>
+          <a:fontRef idx="minor">
+            <a:schemeClr val="lt1"/>
+          </a:fontRef>
+        </p:style>
+        <p:txBody>
+          <a:bodyPr rtlCol="0" anchor="ctr" lIns="0" rIns="0" tIns="0" bIns="0"/>
+          <a:lstStyle/>
+          <a:p>
+            <a:pPr algn="ctr"/>
+            <a:r>
+              <a:rPr sz="1400" b="1">
+                <a:solidFill>
+                  <a:srgbClr val="202122"/>
+                </a:solidFill>
+                <a:latin typeface="Calibri"/>
+              </a:rPr>
+              <a:t>2</a:t>
+            </a:r>
+          </a:p>
+        </p:txBody>
+      </p:sp>
+      <p:sp>
+        <p:nvSpPr>
+          <p:cNvPr id="9" name="TextBox 8"/>
+          <p:cNvSpPr txBox="1"/>
+          <p:nvPr/>
+        </p:nvSpPr>
+        <p:spPr>
+          <a:xfrm>
+            <a:off x="1234440" y="2795778"/>
+            <a:ext cx="10408615" cy="1030986"/>
+          </a:xfrm>
+          <a:prstGeom prst="rect">
+            <a:avLst/>
+          </a:prstGeom>
+          <a:noFill/>
+        </p:spPr>
+        <p:txBody>
+          <a:bodyPr wrap="square" anchor="t" lIns="0" rIns="0" tIns="0" bIns="0"/>
+          <a:lstStyle/>
+          <a:p>
+            <a:pPr algn="l"/>
+            <a:r>
+              <a:rPr sz="1800" b="0" i="0">
+                <a:solidFill>
+                  <a:srgbClr val="54595D"/>
+                </a:solidFill>
+                <a:latin typeface="Calibri"/>
+              </a:rPr>
+              <a:t>When is SPC better than 100% inspection?</a:t>
+            </a:r>
+          </a:p>
+          <a:p>
+            <a:r>
+              <a:rPr sz="1800" b="1">
+                <a:solidFill>
+                  <a:srgbClr val="03306E"/>
+                </a:solidFill>
+                <a:latin typeface="Calibri"/>
+              </a:rPr>
+              <a:t>In high-volume production where checking every item is too slow or costly.</a:t>
+            </a:r>
+          </a:p>
+        </p:txBody>
+      </p:sp>
+      <p:sp>
+        <p:nvSpPr>
+          <p:cNvPr id="10" name="Oval 9"/>
+          <p:cNvSpPr/>
+          <p:nvPr/>
+        </p:nvSpPr>
+        <p:spPr>
+          <a:xfrm>
+            <a:off x="548640" y="4009644"/>
+            <a:ext cx="411480" cy="411480"/>
+          </a:xfrm>
+          <a:prstGeom prst="ellipse">
+            <a:avLst/>
+          </a:prstGeom>
+          <a:solidFill>
+            <a:srgbClr val="F2B705"/>
+          </a:solidFill>
+          <a:ln>
+            <a:noFill/>
+          </a:ln>
+          <a:effectLst/>
+        </p:spPr>
+        <p:style>
+          <a:lnRef idx="1">
+            <a:schemeClr val="accent1"/>
+          </a:lnRef>
+          <a:fillRef idx="3">
+            <a:schemeClr val="accent1"/>
+          </a:fillRef>
+          <a:effectRef idx="2">
+            <a:schemeClr val="accent1"/>
+          </a:effectRef>
+          <a:fontRef idx="minor">
+            <a:schemeClr val="lt1"/>
+          </a:fontRef>
+        </p:style>
+        <p:txBody>
+          <a:bodyPr rtlCol="0" anchor="ctr" lIns="0" rIns="0" tIns="0" bIns="0"/>
+          <a:lstStyle/>
+          <a:p>
+            <a:pPr algn="ctr"/>
+            <a:r>
+              <a:rPr sz="1400" b="1">
+                <a:solidFill>
+                  <a:srgbClr val="202122"/>
+                </a:solidFill>
+                <a:latin typeface="Calibri"/>
+              </a:rPr>
+              <a:t>3</a:t>
+            </a:r>
+          </a:p>
+        </p:txBody>
+      </p:sp>
+      <p:sp>
+        <p:nvSpPr>
+          <p:cNvPr id="11" name="TextBox 10"/>
+          <p:cNvSpPr txBox="1"/>
+          <p:nvPr/>
+        </p:nvSpPr>
+        <p:spPr>
+          <a:xfrm>
+            <a:off x="1234440" y="3991356"/>
+            <a:ext cx="10408615" cy="1030986"/>
+          </a:xfrm>
+          <a:prstGeom prst="rect">
+            <a:avLst/>
+          </a:prstGeom>
+          <a:noFill/>
+        </p:spPr>
+        <p:txBody>
+          <a:bodyPr wrap="square" anchor="t" lIns="0" rIns="0" tIns="0" bIns="0"/>
+          <a:lstStyle/>
+          <a:p>
+            <a:pPr algn="l"/>
+            <a:r>
+              <a:rPr sz="1800" b="0" i="0">
+                <a:solidFill>
+                  <a:srgbClr val="54595D"/>
+                </a:solidFill>
+                <a:latin typeface="Calibri"/>
+              </a:rPr>
+              <a:t>What does a Pareto chart show?</a:t>
+            </a:r>
+          </a:p>
+          <a:p>
+            <a:r>
+              <a:rPr sz="1800" b="1">
+                <a:solidFill>
+                  <a:srgbClr val="03306E"/>
+                </a:solidFill>
+                <a:latin typeface="Calibri"/>
+              </a:rPr>
+              <a:t>Which few causes create most of the problems.</a:t>
+            </a:r>
+          </a:p>
+        </p:txBody>
+      </p:sp>
+      <p:sp>
+        <p:nvSpPr>
+          <p:cNvPr id="12" name="Oval 11"/>
+          <p:cNvSpPr/>
+          <p:nvPr/>
+        </p:nvSpPr>
+        <p:spPr>
+          <a:xfrm>
+            <a:off x="548640" y="5205221"/>
+            <a:ext cx="411480" cy="411480"/>
+          </a:xfrm>
+          <a:prstGeom prst="ellipse">
+            <a:avLst/>
+          </a:prstGeom>
+          <a:solidFill>
+            <a:srgbClr val="F2B705"/>
+          </a:solidFill>
+          <a:ln>
+            <a:noFill/>
+          </a:ln>
+          <a:effectLst/>
+        </p:spPr>
+        <p:style>
+          <a:lnRef idx="1">
+            <a:schemeClr val="accent1"/>
+          </a:lnRef>
+          <a:fillRef idx="3">
+            <a:schemeClr val="accent1"/>
+          </a:fillRef>
+          <a:effectRef idx="2">
+            <a:schemeClr val="accent1"/>
+          </a:effectRef>
+          <a:fontRef idx="minor">
+            <a:schemeClr val="lt1"/>
+          </a:fontRef>
+        </p:style>
+        <p:txBody>
+          <a:bodyPr rtlCol="0" anchor="ctr" lIns="0" rIns="0" tIns="0" bIns="0"/>
+          <a:lstStyle/>
+          <a:p>
+            <a:pPr algn="ctr"/>
+            <a:r>
+              <a:rPr sz="1400" b="1">
+                <a:solidFill>
+                  <a:srgbClr val="202122"/>
+                </a:solidFill>
+                <a:latin typeface="Calibri"/>
+              </a:rPr>
+              <a:t>4</a:t>
+            </a:r>
+          </a:p>
+        </p:txBody>
+      </p:sp>
+      <p:sp>
+        <p:nvSpPr>
+          <p:cNvPr id="13" name="TextBox 12"/>
+          <p:cNvSpPr txBox="1"/>
+          <p:nvPr/>
+        </p:nvSpPr>
+        <p:spPr>
+          <a:xfrm>
+            <a:off x="1234440" y="5186933"/>
+            <a:ext cx="10408615" cy="1030986"/>
+          </a:xfrm>
+          <a:prstGeom prst="rect">
+            <a:avLst/>
+          </a:prstGeom>
+          <a:noFill/>
+        </p:spPr>
+        <p:txBody>
+          <a:bodyPr wrap="square" anchor="t" lIns="0" rIns="0" tIns="0" bIns="0"/>
+          <a:lstStyle/>
+          <a:p>
+            <a:pPr algn="l"/>
+            <a:r>
+              <a:rPr sz="1800" b="0" i="0">
+                <a:solidFill>
+                  <a:srgbClr val="54595D"/>
+                </a:solidFill>
+                <a:latin typeface="Calibri"/>
+              </a:rPr>
+              <a:t>Give two purposes of an SOP.</a:t>
+            </a:r>
+          </a:p>
+          <a:p>
+            <a:r>
+              <a:rPr sz="1800" b="1">
+                <a:solidFill>
+                  <a:srgbClr val="03306E"/>
+                </a:solidFill>
+                <a:latin typeface="Calibri"/>
+              </a:rPr>
+              <a:t>Any two of: standardising work, customer satisfaction, safety, training.</a:t>
+            </a:r>
+          </a:p>
+        </p:txBody>
+      </p:sp>
+    </p:spTree>
+  </p:cSld>
+  <p:clrMapOvr>
+    <a:masterClrMapping/>
+  </p:clrMapOvr>
+</p:sld>
+</file>
+
+<file path=ppt/slides/slide15.xml><?xml version="1.0" encoding="utf-8"?>
+<p:sld xmlns:a="http://schemas.openxmlformats.org/drawingml/2006/main" xmlns:p="http://schemas.openxmlformats.org/presentationml/2006/main" xmlns:r="http://schemas.openxmlformats.org/officeDocument/2006/relationships">
+  <p:cSld>
+    <p:bg>
+      <p:bgPr>
+        <a:solidFill>
+          <a:srgbClr val="FFFFFF"/>
+        </a:solidFill>
+        <a:effectLst/>
+      </p:bgPr>
+    </p:bg>
+    <p:spTree>
+      <p:nvGrpSpPr>
+        <p:cNvPr id="1" name=""/>
+        <p:cNvGrpSpPr/>
+        <p:nvPr/>
+      </p:nvGrpSpPr>
+      <p:grpSpPr/>
+      <p:sp>
+        <p:nvSpPr>
+          <p:cNvPr id="2" name="TextBox 1"/>
+          <p:cNvSpPr txBox="1"/>
+          <p:nvPr/>
+        </p:nvSpPr>
+        <p:spPr>
+          <a:xfrm>
+            <a:off x="548640" y="320040"/>
+            <a:ext cx="11094415" cy="274320"/>
+          </a:xfrm>
+          <a:prstGeom prst="rect">
+            <a:avLst/>
+          </a:prstGeom>
+          <a:noFill/>
+        </p:spPr>
+        <p:txBody>
+          <a:bodyPr wrap="square" anchor="t" lIns="0" rIns="0" tIns="0" bIns="0"/>
+          <a:lstStyle/>
+          <a:p>
+            <a:pPr algn="l"/>
+            <a:r>
+              <a:rPr sz="1100" b="1" i="0">
+                <a:solidFill>
+                  <a:srgbClr val="54595D"/>
+                </a:solidFill>
+                <a:latin typeface="Calibri"/>
+              </a:rPr>
+              <a:t>ENGINEERING CORE  ·  Core topic 11</a:t>
+            </a:r>
+          </a:p>
+        </p:txBody>
+      </p:sp>
+      <p:sp>
+        <p:nvSpPr>
+          <p:cNvPr id="3" name="TextBox 2"/>
+          <p:cNvSpPr txBox="1"/>
+          <p:nvPr/>
+        </p:nvSpPr>
+        <p:spPr>
+          <a:xfrm>
+            <a:off x="548640" y="566928"/>
+            <a:ext cx="11094415" cy="822960"/>
+          </a:xfrm>
+          <a:prstGeom prst="rect">
+            <a:avLst/>
+          </a:prstGeom>
+          <a:noFill/>
+        </p:spPr>
+        <p:txBody>
+          <a:bodyPr wrap="square" anchor="ctr" lIns="0" rIns="0" tIns="0" bIns="0"/>
+          <a:lstStyle/>
+          <a:p>
+            <a:pPr algn="l"/>
+            <a:r>
+              <a:rPr sz="3200" b="1" i="0">
+                <a:solidFill>
+                  <a:srgbClr val="03306E"/>
+                </a:solidFill>
+                <a:latin typeface="Cambria"/>
+              </a:rPr>
+              <a:t>Activity: Write an SOP</a:t>
+            </a:r>
+          </a:p>
+        </p:txBody>
+      </p:sp>
+      <p:sp>
+        <p:nvSpPr>
+          <p:cNvPr id="4" name="TextBox 3"/>
+          <p:cNvSpPr txBox="1"/>
+          <p:nvPr/>
+        </p:nvSpPr>
+        <p:spPr>
+          <a:xfrm>
+            <a:off x="548640" y="6446520"/>
+            <a:ext cx="8229600" cy="274320"/>
+          </a:xfrm>
+          <a:prstGeom prst="rect">
+            <a:avLst/>
+          </a:prstGeom>
+          <a:noFill/>
+        </p:spPr>
+        <p:txBody>
+          <a:bodyPr wrap="square" anchor="t" lIns="0" rIns="0" tIns="0" bIns="0"/>
+          <a:lstStyle/>
+          <a:p>
+            <a:pPr algn="l"/>
+            <a:r>
+              <a:rPr sz="1000" b="0" i="0">
+                <a:solidFill>
+                  <a:srgbClr val="54595D"/>
+                </a:solidFill>
+                <a:latin typeface="Calibri"/>
+              </a:rPr>
+              <a:t>Design and Development for Engineering and Manufacturing T Level  ·  Quality Management and SOPs</a:t>
+            </a:r>
+          </a:p>
+        </p:txBody>
+      </p:sp>
+      <p:sp>
+        <p:nvSpPr>
+          <p:cNvPr id="5" name="TextBox 4"/>
+          <p:cNvSpPr txBox="1"/>
+          <p:nvPr/>
+        </p:nvSpPr>
+        <p:spPr>
+          <a:xfrm>
+            <a:off x="10728655" y="6446520"/>
+            <a:ext cx="914400" cy="274320"/>
+          </a:xfrm>
+          <a:prstGeom prst="rect">
+            <a:avLst/>
+          </a:prstGeom>
+          <a:noFill/>
+        </p:spPr>
+        <p:txBody>
+          <a:bodyPr wrap="square" anchor="t" lIns="0" rIns="0" tIns="0" bIns="0"/>
+          <a:lstStyle/>
+          <a:p>
+            <a:pPr algn="r"/>
+            <a:r>
+              <a:rPr sz="1000" b="0" i="0">
+                <a:solidFill>
+                  <a:srgbClr val="54595D"/>
+                </a:solidFill>
+                <a:latin typeface="Calibri"/>
+              </a:rPr>
+              <a:t>15</a:t>
+            </a:r>
+          </a:p>
+        </p:txBody>
+      </p:sp>
+      <p:sp>
+        <p:nvSpPr>
+          <p:cNvPr id="6" name="Rounded Rectangle 5"/>
+          <p:cNvSpPr/>
+          <p:nvPr/>
+        </p:nvSpPr>
+        <p:spPr>
+          <a:xfrm>
+            <a:off x="548640" y="1508760"/>
+            <a:ext cx="2011680" cy="457200"/>
+          </a:xfrm>
+          <a:prstGeom prst="roundRect">
+            <a:avLst>
+              <a:gd name="adj" fmla="val 50000"/>
+            </a:avLst>
+          </a:prstGeom>
+          <a:solidFill>
+            <a:srgbClr val="F2B705"/>
+          </a:solidFill>
+          <a:ln>
+            <a:noFill/>
+          </a:ln>
+          <a:effectLst/>
+        </p:spPr>
+        <p:style>
+          <a:lnRef idx="1">
+            <a:schemeClr val="accent1"/>
+          </a:lnRef>
+          <a:fillRef idx="3">
+            <a:schemeClr val="accent1"/>
+          </a:fillRef>
+          <a:effectRef idx="2">
+            <a:schemeClr val="accent1"/>
+          </a:effectRef>
+          <a:fontRef idx="minor">
+            <a:schemeClr val="lt1"/>
+          </a:fontRef>
+        </p:style>
+        <p:txBody>
+          <a:bodyPr rtlCol="0" anchor="ctr"/>
+          <a:lstStyle/>
+          <a:p/>
+        </p:txBody>
+      </p:sp>
+      <p:sp>
+        <p:nvSpPr>
+          <p:cNvPr id="7" name="TextBox 6"/>
+          <p:cNvSpPr txBox="1"/>
+          <p:nvPr/>
+        </p:nvSpPr>
+        <p:spPr>
+          <a:xfrm>
+            <a:off x="548640" y="1508760"/>
+            <a:ext cx="2011680" cy="457200"/>
+          </a:xfrm>
+          <a:prstGeom prst="rect">
+            <a:avLst/>
+          </a:prstGeom>
+          <a:noFill/>
+        </p:spPr>
+        <p:txBody>
+          <a:bodyPr wrap="square" anchor="ctr" lIns="0" rIns="0" tIns="0" bIns="0"/>
+          <a:lstStyle/>
+          <a:p>
+            <a:pPr algn="ctr"/>
+            <a:r>
+              <a:rPr sz="1400" b="1" i="0">
+                <a:solidFill>
+                  <a:srgbClr val="202122"/>
+                </a:solidFill>
+                <a:latin typeface="Calibri"/>
+              </a:rPr>
+              <a:t>25 minutes</a:t>
+            </a:r>
+          </a:p>
+        </p:txBody>
+      </p:sp>
+      <p:sp>
+        <p:nvSpPr>
+          <p:cNvPr id="8" name="TextBox 7"/>
+          <p:cNvSpPr txBox="1"/>
+          <p:nvPr/>
+        </p:nvSpPr>
+        <p:spPr>
+          <a:xfrm>
+            <a:off x="2743200" y="1508760"/>
+            <a:ext cx="4754880" cy="457200"/>
+          </a:xfrm>
+          <a:prstGeom prst="rect">
+            <a:avLst/>
+          </a:prstGeom>
+          <a:noFill/>
+        </p:spPr>
+        <p:txBody>
+          <a:bodyPr wrap="square" anchor="ctr" lIns="0" rIns="0" tIns="0" bIns="0"/>
+          <a:lstStyle/>
+          <a:p>
+            <a:pPr algn="l"/>
+            <a:r>
+              <a:rPr sz="1400" b="0" i="1">
+                <a:solidFill>
+                  <a:srgbClr val="54595D"/>
+                </a:solidFill>
+                <a:latin typeface="Calibri"/>
+              </a:rPr>
+              <a:t>Pairs</a:t>
+            </a:r>
+          </a:p>
+        </p:txBody>
+      </p:sp>
+      <p:sp>
+        <p:nvSpPr>
+          <p:cNvPr id="9" name="Oval 8"/>
+          <p:cNvSpPr/>
+          <p:nvPr/>
+        </p:nvSpPr>
+        <p:spPr>
+          <a:xfrm>
+            <a:off x="548640" y="2482596"/>
+            <a:ext cx="384048" cy="384048"/>
+          </a:xfrm>
+          <a:prstGeom prst="ellipse">
+            <a:avLst/>
+          </a:prstGeom>
+          <a:solidFill>
+            <a:srgbClr val="0645AD"/>
+          </a:solidFill>
+          <a:ln>
+            <a:noFill/>
+          </a:ln>
+          <a:effectLst/>
+        </p:spPr>
+        <p:style>
+          <a:lnRef idx="1">
+            <a:schemeClr val="accent1"/>
+          </a:lnRef>
+          <a:fillRef idx="3">
+            <a:schemeClr val="accent1"/>
+          </a:fillRef>
+          <a:effectRef idx="2">
+            <a:schemeClr val="accent1"/>
+          </a:effectRef>
+          <a:fontRef idx="minor">
+            <a:schemeClr val="lt1"/>
+          </a:fontRef>
+        </p:style>
+        <p:txBody>
+          <a:bodyPr rtlCol="0" anchor="ctr" lIns="0" rIns="0" tIns="0" bIns="0"/>
+          <a:lstStyle/>
+          <a:p>
+            <a:pPr algn="ctr"/>
+            <a:r>
+              <a:rPr sz="1300" b="1">
+                <a:solidFill>
+                  <a:srgbClr val="FFFFFF"/>
+                </a:solidFill>
+                <a:latin typeface="Calibri"/>
+              </a:rPr>
+              <a:t>1</a:t>
+            </a:r>
+          </a:p>
+        </p:txBody>
+      </p:sp>
+      <p:sp>
+        <p:nvSpPr>
+          <p:cNvPr id="10" name="TextBox 9"/>
+          <p:cNvSpPr txBox="1"/>
+          <p:nvPr/>
+        </p:nvSpPr>
+        <p:spPr>
+          <a:xfrm>
+            <a:off x="1143000" y="2240280"/>
+            <a:ext cx="5943600" cy="868680"/>
+          </a:xfrm>
+          <a:prstGeom prst="rect">
+            <a:avLst/>
+          </a:prstGeom>
+          <a:noFill/>
+        </p:spPr>
+        <p:txBody>
+          <a:bodyPr wrap="square" anchor="ctr" lIns="0" rIns="0" tIns="0" bIns="0"/>
+          <a:lstStyle/>
+          <a:p>
+            <a:pPr algn="l"/>
+            <a:r>
+              <a:rPr sz="1700" b="0" i="0">
+                <a:solidFill>
+                  <a:srgbClr val="202122"/>
+                </a:solidFill>
+                <a:latin typeface="Calibri"/>
+              </a:rPr>
+              <a:t>Choose a workshop task, e.g. setting up a pillar drill.</a:t>
+            </a:r>
+          </a:p>
+        </p:txBody>
+      </p:sp>
+      <p:sp>
+        <p:nvSpPr>
+          <p:cNvPr id="11" name="Oval 10"/>
+          <p:cNvSpPr/>
+          <p:nvPr/>
+        </p:nvSpPr>
+        <p:spPr>
+          <a:xfrm>
+            <a:off x="548640" y="3461004"/>
+            <a:ext cx="384048" cy="384048"/>
+          </a:xfrm>
+          <a:prstGeom prst="ellipse">
+            <a:avLst/>
+          </a:prstGeom>
+          <a:solidFill>
+            <a:srgbClr val="0645AD"/>
+          </a:solidFill>
+          <a:ln>
+            <a:noFill/>
+          </a:ln>
+          <a:effectLst/>
+        </p:spPr>
+        <p:style>
+          <a:lnRef idx="1">
+            <a:schemeClr val="accent1"/>
+          </a:lnRef>
+          <a:fillRef idx="3">
+            <a:schemeClr val="accent1"/>
+          </a:fillRef>
+          <a:effectRef idx="2">
+            <a:schemeClr val="accent1"/>
+          </a:effectRef>
+          <a:fontRef idx="minor">
+            <a:schemeClr val="lt1"/>
+          </a:fontRef>
+        </p:style>
+        <p:txBody>
+          <a:bodyPr rtlCol="0" anchor="ctr" lIns="0" rIns="0" tIns="0" bIns="0"/>
+          <a:lstStyle/>
+          <a:p>
+            <a:pPr algn="ctr"/>
+            <a:r>
+              <a:rPr sz="1300" b="1">
+                <a:solidFill>
+                  <a:srgbClr val="FFFFFF"/>
+                </a:solidFill>
+                <a:latin typeface="Calibri"/>
+              </a:rPr>
+              <a:t>2</a:t>
+            </a:r>
+          </a:p>
+        </p:txBody>
+      </p:sp>
+      <p:sp>
+        <p:nvSpPr>
+          <p:cNvPr id="12" name="TextBox 11"/>
+          <p:cNvSpPr txBox="1"/>
+          <p:nvPr/>
+        </p:nvSpPr>
+        <p:spPr>
+          <a:xfrm>
+            <a:off x="1143000" y="3218688"/>
+            <a:ext cx="5943600" cy="868680"/>
+          </a:xfrm>
+          <a:prstGeom prst="rect">
+            <a:avLst/>
+          </a:prstGeom>
+          <a:noFill/>
+        </p:spPr>
+        <p:txBody>
+          <a:bodyPr wrap="square" anchor="ctr" lIns="0" rIns="0" tIns="0" bIns="0"/>
+          <a:lstStyle/>
+          <a:p>
+            <a:pPr algn="l"/>
+            <a:r>
+              <a:rPr sz="1700" b="0" i="0">
+                <a:solidFill>
+                  <a:srgbClr val="202122"/>
+                </a:solidFill>
+                <a:latin typeface="Calibri"/>
+              </a:rPr>
+              <a:t>Write an SOP using the typical format.</a:t>
+            </a:r>
+          </a:p>
+        </p:txBody>
+      </p:sp>
+      <p:sp>
+        <p:nvSpPr>
+          <p:cNvPr id="13" name="Oval 12"/>
+          <p:cNvSpPr/>
+          <p:nvPr/>
+        </p:nvSpPr>
+        <p:spPr>
+          <a:xfrm>
+            <a:off x="548640" y="4439412"/>
+            <a:ext cx="384048" cy="384048"/>
+          </a:xfrm>
+          <a:prstGeom prst="ellipse">
+            <a:avLst/>
+          </a:prstGeom>
+          <a:solidFill>
+            <a:srgbClr val="0645AD"/>
+          </a:solidFill>
+          <a:ln>
+            <a:noFill/>
+          </a:ln>
+          <a:effectLst/>
+        </p:spPr>
+        <p:style>
+          <a:lnRef idx="1">
+            <a:schemeClr val="accent1"/>
+          </a:lnRef>
+          <a:fillRef idx="3">
+            <a:schemeClr val="accent1"/>
+          </a:fillRef>
+          <a:effectRef idx="2">
+            <a:schemeClr val="accent1"/>
+          </a:effectRef>
+          <a:fontRef idx="minor">
+            <a:schemeClr val="lt1"/>
+          </a:fontRef>
+        </p:style>
+        <p:txBody>
+          <a:bodyPr rtlCol="0" anchor="ctr" lIns="0" rIns="0" tIns="0" bIns="0"/>
+          <a:lstStyle/>
+          <a:p>
+            <a:pPr algn="ctr"/>
+            <a:r>
+              <a:rPr sz="1300" b="1">
+                <a:solidFill>
+                  <a:srgbClr val="FFFFFF"/>
+                </a:solidFill>
+                <a:latin typeface="Calibri"/>
+              </a:rPr>
+              <a:t>3</a:t>
+            </a:r>
+          </a:p>
+        </p:txBody>
+      </p:sp>
+      <p:sp>
+        <p:nvSpPr>
+          <p:cNvPr id="14" name="TextBox 13"/>
+          <p:cNvSpPr txBox="1"/>
+          <p:nvPr/>
+        </p:nvSpPr>
+        <p:spPr>
+          <a:xfrm>
+            <a:off x="1143000" y="4197096"/>
+            <a:ext cx="5943600" cy="868680"/>
+          </a:xfrm>
+          <a:prstGeom prst="rect">
+            <a:avLst/>
+          </a:prstGeom>
+          <a:noFill/>
+        </p:spPr>
+        <p:txBody>
+          <a:bodyPr wrap="square" anchor="ctr" lIns="0" rIns="0" tIns="0" bIns="0"/>
+          <a:lstStyle/>
+          <a:p>
+            <a:pPr algn="l"/>
+            <a:r>
+              <a:rPr sz="1700" b="0" i="0">
+                <a:solidFill>
+                  <a:srgbClr val="202122"/>
+                </a:solidFill>
+                <a:latin typeface="Calibri"/>
+              </a:rPr>
+              <a:t>Swap with another pair and follow it exactly.</a:t>
+            </a:r>
+          </a:p>
+        </p:txBody>
+      </p:sp>
+      <p:sp>
+        <p:nvSpPr>
+          <p:cNvPr id="15" name="Oval 14"/>
+          <p:cNvSpPr/>
+          <p:nvPr/>
+        </p:nvSpPr>
+        <p:spPr>
+          <a:xfrm>
+            <a:off x="548640" y="5417820"/>
+            <a:ext cx="384048" cy="384048"/>
+          </a:xfrm>
+          <a:prstGeom prst="ellipse">
+            <a:avLst/>
+          </a:prstGeom>
+          <a:solidFill>
+            <a:srgbClr val="0645AD"/>
+          </a:solidFill>
+          <a:ln>
+            <a:noFill/>
+          </a:ln>
+          <a:effectLst/>
+        </p:spPr>
+        <p:style>
+          <a:lnRef idx="1">
+            <a:schemeClr val="accent1"/>
+          </a:lnRef>
+          <a:fillRef idx="3">
+            <a:schemeClr val="accent1"/>
+          </a:fillRef>
+          <a:effectRef idx="2">
+            <a:schemeClr val="accent1"/>
+          </a:effectRef>
+          <a:fontRef idx="minor">
+            <a:schemeClr val="lt1"/>
+          </a:fontRef>
+        </p:style>
+        <p:txBody>
+          <a:bodyPr rtlCol="0" anchor="ctr" lIns="0" rIns="0" tIns="0" bIns="0"/>
+          <a:lstStyle/>
+          <a:p>
+            <a:pPr algn="ctr"/>
+            <a:r>
+              <a:rPr sz="1300" b="1">
+                <a:solidFill>
+                  <a:srgbClr val="FFFFFF"/>
+                </a:solidFill>
+                <a:latin typeface="Calibri"/>
+              </a:rPr>
+              <a:t>4</a:t>
+            </a:r>
+          </a:p>
+        </p:txBody>
+      </p:sp>
+      <p:sp>
+        <p:nvSpPr>
+          <p:cNvPr id="16" name="TextBox 15"/>
+          <p:cNvSpPr txBox="1"/>
+          <p:nvPr/>
+        </p:nvSpPr>
+        <p:spPr>
+          <a:xfrm>
+            <a:off x="1143000" y="5175504"/>
+            <a:ext cx="5943600" cy="868680"/>
+          </a:xfrm>
+          <a:prstGeom prst="rect">
+            <a:avLst/>
+          </a:prstGeom>
+          <a:noFill/>
+        </p:spPr>
+        <p:txBody>
+          <a:bodyPr wrap="square" anchor="ctr" lIns="0" rIns="0" tIns="0" bIns="0"/>
+          <a:lstStyle/>
+          <a:p>
+            <a:pPr algn="l"/>
+            <a:r>
+              <a:rPr sz="1700" b="0" i="0">
+                <a:solidFill>
+                  <a:srgbClr val="202122"/>
+                </a:solidFill>
+                <a:latin typeface="Calibri"/>
+              </a:rPr>
+              <a:t>Improve anything that was unclear.</a:t>
+            </a:r>
+          </a:p>
+        </p:txBody>
+      </p:sp>
+      <p:sp>
+        <p:nvSpPr>
+          <p:cNvPr id="17" name="Rounded Rectangle 16"/>
+          <p:cNvSpPr/>
+          <p:nvPr/>
+        </p:nvSpPr>
+        <p:spPr>
+          <a:xfrm>
+            <a:off x="7772400" y="1508760"/>
+            <a:ext cx="3867912" cy="4572000"/>
+          </a:xfrm>
+          <a:prstGeom prst="roundRect">
+            <a:avLst>
+              <a:gd name="adj" fmla="val 8000"/>
+            </a:avLst>
+          </a:prstGeom>
+          <a:solidFill>
+            <a:srgbClr val="EAF3FF"/>
+          </a:solidFill>
+          <a:ln>
+            <a:noFill/>
+          </a:ln>
+          <a:effectLst/>
+        </p:spPr>
+        <p:style>
+          <a:lnRef idx="1">
+            <a:schemeClr val="accent1"/>
+          </a:lnRef>
+          <a:fillRef idx="3">
+            <a:schemeClr val="accent1"/>
+          </a:fillRef>
+          <a:effectRef idx="2">
+            <a:schemeClr val="accent1"/>
+          </a:effectRef>
+          <a:fontRef idx="minor">
+            <a:schemeClr val="lt1"/>
+          </a:fontRef>
+        </p:style>
+        <p:txBody>
+          <a:bodyPr rtlCol="0" anchor="ctr"/>
+          <a:lstStyle/>
+          <a:p/>
+        </p:txBody>
+      </p:sp>
+      <p:sp>
+        <p:nvSpPr>
+          <p:cNvPr id="18" name="TextBox 17"/>
+          <p:cNvSpPr txBox="1"/>
+          <p:nvPr/>
+        </p:nvSpPr>
+        <p:spPr>
+          <a:xfrm>
+            <a:off x="8046720" y="1737360"/>
+            <a:ext cx="3291840" cy="365760"/>
+          </a:xfrm>
+          <a:prstGeom prst="rect">
+            <a:avLst/>
+          </a:prstGeom>
+          <a:noFill/>
+        </p:spPr>
+        <p:txBody>
+          <a:bodyPr wrap="square" anchor="t" lIns="0" rIns="0" tIns="0" bIns="0"/>
+          <a:lstStyle/>
+          <a:p>
+            <a:pPr algn="l"/>
+            <a:r>
+              <a:rPr sz="1300" b="1" i="0">
+                <a:solidFill>
+                  <a:srgbClr val="0645AD"/>
+                </a:solidFill>
+                <a:latin typeface="Calibri"/>
+              </a:rPr>
+              <a:t>SUCCESS CRITERIA</a:t>
+            </a:r>
+          </a:p>
+        </p:txBody>
+      </p:sp>
+      <p:sp>
+        <p:nvSpPr>
+          <p:cNvPr id="19" name="TextBox 18"/>
+          <p:cNvSpPr txBox="1"/>
+          <p:nvPr/>
+        </p:nvSpPr>
+        <p:spPr>
+          <a:xfrm>
+            <a:off x="8046720" y="2240280"/>
+            <a:ext cx="3337560" cy="3657600"/>
+          </a:xfrm>
+          <a:prstGeom prst="rect">
+            <a:avLst/>
+          </a:prstGeom>
+          <a:noFill/>
+        </p:spPr>
+        <p:txBody>
+          <a:bodyPr wrap="square" lIns="0" rIns="0" tIns="0" bIns="0">
+            <a:spAutoFit/>
+          </a:bodyPr>
+          <a:lstStyle/>
+          <a:p>
+            <a:pPr marL="274320" indent="-274320">
+              <a:spcAft>
+                <a:spcPts val="810"/>
+              </a:spcAft>
+              <a:buClr>
+                <a:srgbClr val="0645AD"/>
+              </a:buClr>
+              <a:buFont typeface="Arial"/>
+              <a:buChar char="•"/>
+            </a:pPr>
+            <a:r>
+              <a:rPr sz="1800" b="0">
+                <a:solidFill>
+                  <a:srgbClr val="202122"/>
+                </a:solidFill>
+                <a:latin typeface="Calibri"/>
+              </a:rPr>
+              <a:t>Safety steps included</a:t>
+            </a:r>
+          </a:p>
+          <a:p>
+            <a:pPr marL="274320" indent="-274320">
+              <a:spcAft>
+                <a:spcPts val="810"/>
+              </a:spcAft>
+              <a:buClr>
+                <a:srgbClr val="0645AD"/>
+              </a:buClr>
+              <a:buFont typeface="Arial"/>
+              <a:buChar char="•"/>
+            </a:pPr>
+            <a:r>
+              <a:rPr sz="1800" b="0">
+                <a:solidFill>
+                  <a:srgbClr val="202122"/>
+                </a:solidFill>
+                <a:latin typeface="Calibri"/>
+              </a:rPr>
+              <a:t>Another pair could follow it</a:t>
+            </a:r>
+          </a:p>
+          <a:p>
+            <a:pPr marL="274320" indent="-274320">
+              <a:spcAft>
+                <a:spcPts val="810"/>
+              </a:spcAft>
+              <a:buClr>
+                <a:srgbClr val="0645AD"/>
+              </a:buClr>
+              <a:buFont typeface="Arial"/>
+              <a:buChar char="•"/>
+            </a:pPr>
+            <a:r>
+              <a:rPr sz="1800" b="0">
+                <a:solidFill>
+                  <a:srgbClr val="202122"/>
+                </a:solidFill>
+                <a:latin typeface="Calibri"/>
+              </a:rPr>
+              <a:t>Revision history updated</a:t>
+            </a:r>
+          </a:p>
+        </p:txBody>
+      </p:sp>
+    </p:spTree>
+  </p:cSld>
+  <p:clrMapOvr>
+    <a:masterClrMapping/>
+  </p:clrMapOvr>
+</p:sld>
+</file>
+
+<file path=ppt/slides/slide16.xml><?xml version="1.0" encoding="utf-8"?>
+<p:sld xmlns:a="http://schemas.openxmlformats.org/drawingml/2006/main" xmlns:p="http://schemas.openxmlformats.org/presentationml/2006/main" xmlns:r="http://schemas.openxmlformats.org/officeDocument/2006/relationships">
+  <p:cSld>
+    <p:bg>
+      <p:bgPr>
+        <a:solidFill>
           <a:srgbClr val="03306E"/>
         </a:solidFill>
         <a:effectLst/>
@@ -5783,18 +9163,89 @@
       </p:sp>
       <p:sp>
         <p:nvSpPr>
-          <p:cNvPr id="6" name="Rounded Rectangle 5"/>
+          <p:cNvPr id="6" name="TextBox 5"/>
+          <p:cNvSpPr txBox="1"/>
+          <p:nvPr/>
+        </p:nvSpPr>
+        <p:spPr>
+          <a:xfrm>
+            <a:off x="548640" y="1554480"/>
+            <a:ext cx="6720840" cy="4617720"/>
+          </a:xfrm>
+          <a:prstGeom prst="rect">
+            <a:avLst/>
+          </a:prstGeom>
+          <a:noFill/>
+        </p:spPr>
+        <p:txBody>
+          <a:bodyPr wrap="square" lIns="0" rIns="0" tIns="0" bIns="0">
+            <a:spAutoFit/>
+          </a:bodyPr>
+          <a:lstStyle/>
+          <a:p>
+            <a:pPr>
+              <a:spcAft>
+                <a:spcPts val="1320"/>
+              </a:spcAft>
+            </a:pPr>
+            <a:r>
+              <a:rPr sz="2200" b="0">
+                <a:solidFill>
+                  <a:srgbClr val="202122"/>
+                </a:solidFill>
+                <a:latin typeface="Calibri"/>
+              </a:rPr>
+              <a:t>Quality assurance (QA) prevents defects by building quality into the process: a quality culture, 'right first time', traceability, document and version control, and standards such as ISO 9001.</a:t>
+            </a:r>
+          </a:p>
+          <a:p>
+            <a:pPr>
+              <a:spcAft>
+                <a:spcPts val="1320"/>
+              </a:spcAft>
+            </a:pPr>
+            <a:r>
+              <a:rPr sz="2200" b="0">
+                <a:solidFill>
+                  <a:srgbClr val="202122"/>
+                </a:solidFill>
+                <a:latin typeface="Calibri"/>
+              </a:rPr>
+              <a:t>Quality control (QC) finds defects by inspecting and testing products against the specification.</a:t>
+            </a:r>
+          </a:p>
+          <a:p>
+            <a:pPr>
+              <a:spcAft>
+                <a:spcPts val="1320"/>
+              </a:spcAft>
+            </a:pPr>
+            <a:r>
+              <a:rPr sz="2200" b="0">
+                <a:solidFill>
+                  <a:srgbClr val="202122"/>
+                </a:solidFill>
+                <a:latin typeface="Calibri"/>
+              </a:rPr>
+              <a:t>Statistical process control (SPC) samples production and plots measurements on charts, spotting drift before parts go out of tolerance. It's faster and cheaper than inspecting every item in high volumes. Process capability shows whether a process can consistently meet its tolerance.</a:t>
+            </a:r>
+          </a:p>
+        </p:txBody>
+      </p:sp>
+      <p:sp>
+        <p:nvSpPr>
+          <p:cNvPr id="7" name="Rounded Rectangle 6"/>
           <p:cNvSpPr/>
           <p:nvPr/>
         </p:nvSpPr>
         <p:spPr>
           <a:xfrm>
-            <a:off x="548640" y="1600200"/>
-            <a:ext cx="5364327" cy="640080"/>
+            <a:off x="7772400" y="1554480"/>
+            <a:ext cx="3867912" cy="4526280"/>
           </a:xfrm>
           <a:prstGeom prst="roundRect">
             <a:avLst>
-              <a:gd name="adj" fmla="val 15000"/>
+              <a:gd name="adj" fmla="val 8000"/>
             </a:avLst>
           </a:prstGeom>
           <a:solidFill>
@@ -5827,55 +9278,20 @@
       </p:sp>
       <p:sp>
         <p:nvSpPr>
-          <p:cNvPr id="7" name="TextBox 6"/>
-          <p:cNvSpPr txBox="1"/>
-          <p:nvPr/>
-        </p:nvSpPr>
-        <p:spPr>
-          <a:xfrm>
-            <a:off x="777240" y="1600200"/>
-            <a:ext cx="4907127" cy="640080"/>
-          </a:xfrm>
-          <a:prstGeom prst="rect">
-            <a:avLst/>
-          </a:prstGeom>
-          <a:noFill/>
-        </p:spPr>
-        <p:txBody>
-          <a:bodyPr wrap="square" anchor="ctr" lIns="0" rIns="0" tIns="0" bIns="0"/>
-          <a:lstStyle/>
-          <a:p>
-            <a:pPr algn="l"/>
-            <a:r>
-              <a:rPr sz="2000" b="1" i="0">
-                <a:solidFill>
-                  <a:srgbClr val="FFFFFF"/>
-                </a:solidFill>
-                <a:latin typeface="Calibri"/>
-              </a:rPr>
-              <a:t>Quality assurance</a:t>
-            </a:r>
-          </a:p>
-        </p:txBody>
-      </p:sp>
-      <p:sp>
-        <p:nvSpPr>
-          <p:cNvPr id="8" name="Rounded Rectangle 7"/>
+          <p:cNvPr id="8" name="Oval 7"/>
           <p:cNvSpPr/>
           <p:nvPr/>
         </p:nvSpPr>
         <p:spPr>
           <a:xfrm>
-            <a:off x="548640" y="2377440"/>
-            <a:ext cx="5364327" cy="3794760"/>
-          </a:xfrm>
-          <a:prstGeom prst="roundRect">
-            <a:avLst>
-              <a:gd name="adj" fmla="val 4000"/>
-            </a:avLst>
+            <a:off x="8046720" y="1828800"/>
+            <a:ext cx="548640" cy="548640"/>
+          </a:xfrm>
+          <a:prstGeom prst="ellipse">
+            <a:avLst/>
           </a:prstGeom>
           <a:solidFill>
-            <a:srgbClr val="EAF3FF"/>
+            <a:srgbClr val="F2B705"/>
           </a:solidFill>
           <a:ln>
             <a:noFill/>
@@ -5897,9 +9313,20 @@
           </a:fontRef>
         </p:style>
         <p:txBody>
-          <a:bodyPr rtlCol="0" anchor="ctr"/>
-          <a:lstStyle/>
-          <a:p/>
+          <a:bodyPr rtlCol="0" anchor="ctr" lIns="0" rIns="0" tIns="0" bIns="0"/>
+          <a:lstStyle/>
+          <a:p>
+            <a:pPr algn="ctr"/>
+            <a:r>
+              <a:rPr sz="1300" b="1">
+                <a:solidFill>
+                  <a:srgbClr val="202122"/>
+                </a:solidFill>
+                <a:latin typeface="Calibri"/>
+              </a:rPr>
+              <a:t>e.g.</a:t>
+            </a:r>
+          </a:p>
         </p:txBody>
       </p:sp>
       <p:sp>
@@ -5910,329 +9337,60 @@
         </p:nvSpPr>
         <p:spPr>
           <a:xfrm>
-            <a:off x="822959" y="2606040"/>
-            <a:ext cx="4815687" cy="3337560"/>
-          </a:xfrm>
-          <a:prstGeom prst="rect">
-            <a:avLst/>
-          </a:prstGeom>
-          <a:noFill/>
-        </p:spPr>
-        <p:txBody>
-          <a:bodyPr wrap="square" lIns="0" rIns="0" tIns="0" bIns="0">
-            <a:spAutoFit/>
-          </a:bodyPr>
-          <a:lstStyle/>
-          <a:p>
-            <a:pPr marL="274320" indent="-274320">
-              <a:spcAft>
-                <a:spcPts val="990"/>
-              </a:spcAft>
-              <a:buClr>
-                <a:srgbClr val="0645AD"/>
-              </a:buClr>
-              <a:buFont typeface="Arial"/>
-              <a:buChar char="•"/>
-            </a:pPr>
-            <a:r>
-              <a:rPr sz="2200" b="0">
-                <a:solidFill>
-                  <a:srgbClr val="202122"/>
-                </a:solidFill>
-                <a:latin typeface="Calibri"/>
-              </a:rPr>
-              <a:t>Prevents defects through good processes</a:t>
-            </a:r>
-          </a:p>
-          <a:p>
-            <a:pPr marL="274320" indent="-274320">
-              <a:spcAft>
-                <a:spcPts val="990"/>
-              </a:spcAft>
-              <a:buClr>
-                <a:srgbClr val="0645AD"/>
-              </a:buClr>
-              <a:buFont typeface="Arial"/>
-              <a:buChar char="•"/>
-            </a:pPr>
-            <a:r>
-              <a:rPr sz="2200" b="0">
-                <a:solidFill>
-                  <a:srgbClr val="202122"/>
-                </a:solidFill>
-                <a:latin typeface="Calibri"/>
-              </a:rPr>
-              <a:t>A culture of quality; right first time</a:t>
-            </a:r>
-          </a:p>
-          <a:p>
-            <a:pPr marL="274320" indent="-274320">
-              <a:spcAft>
-                <a:spcPts val="990"/>
-              </a:spcAft>
-              <a:buClr>
-                <a:srgbClr val="0645AD"/>
-              </a:buClr>
-              <a:buFont typeface="Arial"/>
-              <a:buChar char="•"/>
-            </a:pPr>
-            <a:r>
-              <a:rPr sz="2200" b="0">
-                <a:solidFill>
-                  <a:srgbClr val="202122"/>
-                </a:solidFill>
-                <a:latin typeface="Calibri"/>
-              </a:rPr>
-              <a:t>Document and version control; traceability</a:t>
-            </a:r>
-          </a:p>
-          <a:p>
-            <a:pPr marL="274320" indent="-274320">
-              <a:spcAft>
-                <a:spcPts val="990"/>
-              </a:spcAft>
-              <a:buClr>
-                <a:srgbClr val="0645AD"/>
-              </a:buClr>
-              <a:buFont typeface="Arial"/>
-              <a:buChar char="•"/>
-            </a:pPr>
-            <a:r>
-              <a:rPr sz="2200" b="0">
-                <a:solidFill>
-                  <a:srgbClr val="202122"/>
-                </a:solidFill>
-                <a:latin typeface="Calibri"/>
-              </a:rPr>
-              <a:t>ISO 9001 quality management</a:t>
-            </a:r>
-          </a:p>
-        </p:txBody>
-      </p:sp>
-      <p:sp>
-        <p:nvSpPr>
-          <p:cNvPr id="10" name="Rounded Rectangle 9"/>
-          <p:cNvSpPr/>
-          <p:nvPr/>
-        </p:nvSpPr>
-        <p:spPr>
-          <a:xfrm>
-            <a:off x="6278727" y="1600200"/>
-            <a:ext cx="5364327" cy="640080"/>
-          </a:xfrm>
-          <a:prstGeom prst="roundRect">
-            <a:avLst>
-              <a:gd name="adj" fmla="val 15000"/>
-            </a:avLst>
-          </a:prstGeom>
-          <a:solidFill>
-            <a:srgbClr val="0645AD"/>
-          </a:solidFill>
-          <a:ln>
-            <a:noFill/>
-          </a:ln>
-          <a:effectLst/>
-        </p:spPr>
-        <p:style>
-          <a:lnRef idx="1">
-            <a:schemeClr val="accent1"/>
-          </a:lnRef>
-          <a:fillRef idx="3">
-            <a:schemeClr val="accent1"/>
-          </a:fillRef>
-          <a:effectRef idx="2">
-            <a:schemeClr val="accent1"/>
-          </a:effectRef>
-          <a:fontRef idx="minor">
-            <a:schemeClr val="lt1"/>
-          </a:fontRef>
-        </p:style>
-        <p:txBody>
-          <a:bodyPr rtlCol="0" anchor="ctr"/>
-          <a:lstStyle/>
-          <a:p/>
-        </p:txBody>
-      </p:sp>
-      <p:sp>
-        <p:nvSpPr>
-          <p:cNvPr id="11" name="TextBox 10"/>
-          <p:cNvSpPr txBox="1"/>
-          <p:nvPr/>
-        </p:nvSpPr>
-        <p:spPr>
-          <a:xfrm>
-            <a:off x="6507327" y="1600200"/>
-            <a:ext cx="4907127" cy="640080"/>
-          </a:xfrm>
-          <a:prstGeom prst="rect">
-            <a:avLst/>
-          </a:prstGeom>
-          <a:noFill/>
-        </p:spPr>
-        <p:txBody>
-          <a:bodyPr wrap="square" anchor="ctr" lIns="0" rIns="0" tIns="0" bIns="0"/>
+            <a:off x="8046720" y="2560320"/>
+            <a:ext cx="3291840" cy="365760"/>
+          </a:xfrm>
+          <a:prstGeom prst="rect">
+            <a:avLst/>
+          </a:prstGeom>
+          <a:noFill/>
+        </p:spPr>
+        <p:txBody>
+          <a:bodyPr wrap="square" anchor="t" lIns="0" rIns="0" tIns="0" bIns="0"/>
           <a:lstStyle/>
           <a:p>
             <a:pPr algn="l"/>
             <a:r>
-              <a:rPr sz="2000" b="1" i="0">
+              <a:rPr sz="1300" b="1" i="0">
+                <a:solidFill>
+                  <a:srgbClr val="A9C8F0"/>
+                </a:solidFill>
+                <a:latin typeface="Calibri"/>
+              </a:rPr>
+              <a:t>EXAMPLE</a:t>
+            </a:r>
+          </a:p>
+        </p:txBody>
+      </p:sp>
+      <p:sp>
+        <p:nvSpPr>
+          <p:cNvPr id="10" name="TextBox 9"/>
+          <p:cNvSpPr txBox="1"/>
+          <p:nvPr/>
+        </p:nvSpPr>
+        <p:spPr>
+          <a:xfrm>
+            <a:off x="8046720" y="2971800"/>
+            <a:ext cx="3291840" cy="2971800"/>
+          </a:xfrm>
+          <a:prstGeom prst="rect">
+            <a:avLst/>
+          </a:prstGeom>
+          <a:noFill/>
+        </p:spPr>
+        <p:txBody>
+          <a:bodyPr wrap="square" anchor="t" lIns="0" rIns="0" tIns="0" bIns="0"/>
+          <a:lstStyle/>
+          <a:p>
+            <a:pPr algn="l"/>
+            <a:r>
+              <a:rPr sz="1900" b="0" i="0">
                 <a:solidFill>
                   <a:srgbClr val="FFFFFF"/>
                 </a:solidFill>
-                <a:latin typeface="Calibri"/>
-              </a:rPr>
-              <a:t>Quality control</a:t>
-            </a:r>
-          </a:p>
-        </p:txBody>
-      </p:sp>
-      <p:sp>
-        <p:nvSpPr>
-          <p:cNvPr id="12" name="Rounded Rectangle 11"/>
-          <p:cNvSpPr/>
-          <p:nvPr/>
-        </p:nvSpPr>
-        <p:spPr>
-          <a:xfrm>
-            <a:off x="6278727" y="2377440"/>
-            <a:ext cx="5364327" cy="3794760"/>
-          </a:xfrm>
-          <a:prstGeom prst="roundRect">
-            <a:avLst>
-              <a:gd name="adj" fmla="val 4000"/>
-            </a:avLst>
-          </a:prstGeom>
-          <a:solidFill>
-            <a:srgbClr val="EAF3FF"/>
-          </a:solidFill>
-          <a:ln>
-            <a:noFill/>
-          </a:ln>
-          <a:effectLst/>
-        </p:spPr>
-        <p:style>
-          <a:lnRef idx="1">
-            <a:schemeClr val="accent1"/>
-          </a:lnRef>
-          <a:fillRef idx="3">
-            <a:schemeClr val="accent1"/>
-          </a:fillRef>
-          <a:effectRef idx="2">
-            <a:schemeClr val="accent1"/>
-          </a:effectRef>
-          <a:fontRef idx="minor">
-            <a:schemeClr val="lt1"/>
-          </a:fontRef>
-        </p:style>
-        <p:txBody>
-          <a:bodyPr rtlCol="0" anchor="ctr"/>
-          <a:lstStyle/>
-          <a:p/>
-        </p:txBody>
-      </p:sp>
-      <p:sp>
-        <p:nvSpPr>
-          <p:cNvPr id="13" name="TextBox 12"/>
-          <p:cNvSpPr txBox="1"/>
-          <p:nvPr/>
-        </p:nvSpPr>
-        <p:spPr>
-          <a:xfrm>
-            <a:off x="6553047" y="2606040"/>
-            <a:ext cx="4815687" cy="3337560"/>
-          </a:xfrm>
-          <a:prstGeom prst="rect">
-            <a:avLst/>
-          </a:prstGeom>
-          <a:noFill/>
-        </p:spPr>
-        <p:txBody>
-          <a:bodyPr wrap="square" lIns="0" rIns="0" tIns="0" bIns="0">
-            <a:spAutoFit/>
-          </a:bodyPr>
-          <a:lstStyle/>
-          <a:p>
-            <a:pPr marL="274320" indent="-274320">
-              <a:spcAft>
-                <a:spcPts val="990"/>
-              </a:spcAft>
-              <a:buClr>
-                <a:srgbClr val="0645AD"/>
-              </a:buClr>
-              <a:buFont typeface="Arial"/>
-              <a:buChar char="•"/>
-            </a:pPr>
-            <a:r>
-              <a:rPr sz="2200" b="0">
-                <a:solidFill>
-                  <a:srgbClr val="202122"/>
-                </a:solidFill>
-                <a:latin typeface="Calibri"/>
-              </a:rPr>
-              <a:t>Finds defects by inspection and testing</a:t>
-            </a:r>
-          </a:p>
-          <a:p>
-            <a:pPr marL="274320" indent="-274320">
-              <a:spcAft>
-                <a:spcPts val="990"/>
-              </a:spcAft>
-              <a:buClr>
-                <a:srgbClr val="0645AD"/>
-              </a:buClr>
-              <a:buFont typeface="Arial"/>
-              <a:buChar char="•"/>
-            </a:pPr>
-            <a:r>
-              <a:rPr sz="2200" b="0">
-                <a:solidFill>
-                  <a:srgbClr val="202122"/>
-                </a:solidFill>
-                <a:latin typeface="Calibri"/>
-              </a:rPr>
-              <a:t>Checks products against specification</a:t>
-            </a:r>
-          </a:p>
-          <a:p>
-            <a:pPr marL="274320" indent="-274320">
-              <a:spcAft>
-                <a:spcPts val="990"/>
-              </a:spcAft>
-              <a:buClr>
-                <a:srgbClr val="0645AD"/>
-              </a:buClr>
-              <a:buFont typeface="Arial"/>
-              <a:buChar char="•"/>
-            </a:pPr>
-            <a:r>
-              <a:rPr sz="2200" b="0">
-                <a:solidFill>
-                  <a:srgbClr val="202122"/>
-                </a:solidFill>
-                <a:latin typeface="Calibri"/>
-              </a:rPr>
-              <a:t>Statistical process control (SPC) samples production</a:t>
-            </a:r>
-          </a:p>
-          <a:p>
-            <a:pPr marL="274320" indent="-274320">
-              <a:spcAft>
-                <a:spcPts val="990"/>
-              </a:spcAft>
-              <a:buClr>
-                <a:srgbClr val="0645AD"/>
-              </a:buClr>
-              <a:buFont typeface="Arial"/>
-              <a:buChar char="•"/>
-            </a:pPr>
-            <a:r>
-              <a:rPr sz="2200" b="0">
-                <a:solidFill>
-                  <a:srgbClr val="202122"/>
-                </a:solidFill>
-                <a:latin typeface="Calibri"/>
-              </a:rPr>
-              <a:t>Process capability shows if a process can meet tolerances</a:t>
+                <a:latin typeface="Cambria"/>
+              </a:rPr>
+              <a:t>An SPC chart shows shaft diameters creeping upwards as a tool wears. The tool is changed before any shaft goes out of tolerance.</a:t>
             </a:r>
           </a:p>
         </p:txBody>
@@ -6324,7 +9482,7 @@
                 </a:solidFill>
                 <a:latin typeface="Cambria"/>
               </a:rPr>
-              <a:t>Improving quality</a:t>
+              <a:t>Quality assurance and quality control</a:t>
             </a:r>
           </a:p>
         </p:txBody>
@@ -6404,11 +9562,88 @@
         <p:spPr>
           <a:xfrm>
             <a:off x="548640" y="1600200"/>
-            <a:ext cx="3515258" cy="2148840"/>
+            <a:ext cx="5364327" cy="640080"/>
           </a:xfrm>
           <a:prstGeom prst="roundRect">
             <a:avLst>
-              <a:gd name="adj" fmla="val 6000"/>
+              <a:gd name="adj" fmla="val 15000"/>
+            </a:avLst>
+          </a:prstGeom>
+          <a:solidFill>
+            <a:srgbClr val="03306E"/>
+          </a:solidFill>
+          <a:ln>
+            <a:noFill/>
+          </a:ln>
+          <a:effectLst/>
+        </p:spPr>
+        <p:style>
+          <a:lnRef idx="1">
+            <a:schemeClr val="accent1"/>
+          </a:lnRef>
+          <a:fillRef idx="3">
+            <a:schemeClr val="accent1"/>
+          </a:fillRef>
+          <a:effectRef idx="2">
+            <a:schemeClr val="accent1"/>
+          </a:effectRef>
+          <a:fontRef idx="minor">
+            <a:schemeClr val="lt1"/>
+          </a:fontRef>
+        </p:style>
+        <p:txBody>
+          <a:bodyPr rtlCol="0" anchor="ctr"/>
+          <a:lstStyle/>
+          <a:p/>
+        </p:txBody>
+      </p:sp>
+      <p:sp>
+        <p:nvSpPr>
+          <p:cNvPr id="7" name="TextBox 6"/>
+          <p:cNvSpPr txBox="1"/>
+          <p:nvPr/>
+        </p:nvSpPr>
+        <p:spPr>
+          <a:xfrm>
+            <a:off x="777240" y="1600200"/>
+            <a:ext cx="4907127" cy="640080"/>
+          </a:xfrm>
+          <a:prstGeom prst="rect">
+            <a:avLst/>
+          </a:prstGeom>
+          <a:noFill/>
+        </p:spPr>
+        <p:txBody>
+          <a:bodyPr wrap="square" anchor="ctr" lIns="0" rIns="0" tIns="0" bIns="0"/>
+          <a:lstStyle/>
+          <a:p>
+            <a:pPr algn="l"/>
+            <a:r>
+              <a:rPr sz="2000" b="1" i="0">
+                <a:solidFill>
+                  <a:srgbClr val="FFFFFF"/>
+                </a:solidFill>
+                <a:latin typeface="Calibri"/>
+              </a:rPr>
+              <a:t>Quality assurance</a:t>
+            </a:r>
+          </a:p>
+        </p:txBody>
+      </p:sp>
+      <p:sp>
+        <p:nvSpPr>
+          <p:cNvPr id="8" name="Rounded Rectangle 7"/>
+          <p:cNvSpPr/>
+          <p:nvPr/>
+        </p:nvSpPr>
+        <p:spPr>
+          <a:xfrm>
+            <a:off x="548640" y="2377440"/>
+            <a:ext cx="5364327" cy="3794760"/>
+          </a:xfrm>
+          <a:prstGeom prst="roundRect">
+            <a:avLst>
+              <a:gd name="adj" fmla="val 4000"/>
             </a:avLst>
           </a:prstGeom>
           <a:solidFill>
@@ -6441,20 +9676,129 @@
       </p:sp>
       <p:sp>
         <p:nvSpPr>
-          <p:cNvPr id="7" name="Oval 6"/>
+          <p:cNvPr id="9" name="TextBox 8"/>
+          <p:cNvSpPr txBox="1"/>
+          <p:nvPr/>
+        </p:nvSpPr>
+        <p:spPr>
+          <a:xfrm>
+            <a:off x="822959" y="2606040"/>
+            <a:ext cx="4815687" cy="3337560"/>
+          </a:xfrm>
+          <a:prstGeom prst="rect">
+            <a:avLst/>
+          </a:prstGeom>
+          <a:noFill/>
+        </p:spPr>
+        <p:txBody>
+          <a:bodyPr wrap="square" lIns="0" rIns="0" tIns="0" bIns="0">
+            <a:spAutoFit/>
+          </a:bodyPr>
+          <a:lstStyle/>
+          <a:p>
+            <a:pPr marL="274320" indent="-274320">
+              <a:spcAft>
+                <a:spcPts val="990"/>
+              </a:spcAft>
+              <a:buClr>
+                <a:srgbClr val="0645AD"/>
+              </a:buClr>
+              <a:buFont typeface="Arial"/>
+              <a:buChar char="•"/>
+            </a:pPr>
+            <a:r>
+              <a:rPr sz="2200" b="0">
+                <a:solidFill>
+                  <a:srgbClr val="202122"/>
+                </a:solidFill>
+                <a:latin typeface="Calibri"/>
+              </a:rPr>
+              <a:t>Prevents defects through good processes</a:t>
+            </a:r>
+          </a:p>
+          <a:p>
+            <a:pPr marL="274320" indent="-274320">
+              <a:spcAft>
+                <a:spcPts val="990"/>
+              </a:spcAft>
+              <a:buClr>
+                <a:srgbClr val="0645AD"/>
+              </a:buClr>
+              <a:buFont typeface="Arial"/>
+              <a:buChar char="•"/>
+            </a:pPr>
+            <a:r>
+              <a:rPr sz="2200" b="0">
+                <a:solidFill>
+                  <a:srgbClr val="202122"/>
+                </a:solidFill>
+                <a:latin typeface="Calibri"/>
+              </a:rPr>
+              <a:t>A culture of quality; right first time</a:t>
+            </a:r>
+          </a:p>
+          <a:p>
+            <a:pPr marL="274320" indent="-274320">
+              <a:spcAft>
+                <a:spcPts val="990"/>
+              </a:spcAft>
+              <a:buClr>
+                <a:srgbClr val="0645AD"/>
+              </a:buClr>
+              <a:buFont typeface="Arial"/>
+              <a:buChar char="•"/>
+            </a:pPr>
+            <a:r>
+              <a:rPr sz="2200" b="0">
+                <a:solidFill>
+                  <a:srgbClr val="202122"/>
+                </a:solidFill>
+                <a:latin typeface="Calibri"/>
+              </a:rPr>
+              <a:t>Document and version control; traceability</a:t>
+            </a:r>
+          </a:p>
+          <a:p>
+            <a:pPr marL="274320" indent="-274320">
+              <a:spcAft>
+                <a:spcPts val="990"/>
+              </a:spcAft>
+              <a:buClr>
+                <a:srgbClr val="0645AD"/>
+              </a:buClr>
+              <a:buFont typeface="Arial"/>
+              <a:buChar char="•"/>
+            </a:pPr>
+            <a:r>
+              <a:rPr sz="2200" b="0">
+                <a:solidFill>
+                  <a:srgbClr val="202122"/>
+                </a:solidFill>
+                <a:latin typeface="Calibri"/>
+              </a:rPr>
+              <a:t>ISO 9001 quality management</a:t>
+            </a:r>
+          </a:p>
+        </p:txBody>
+      </p:sp>
+      <p:sp>
+        <p:nvSpPr>
+          <p:cNvPr id="10" name="Rounded Rectangle 9"/>
           <p:cNvSpPr/>
           <p:nvPr/>
         </p:nvSpPr>
         <p:spPr>
           <a:xfrm>
-            <a:off x="777240" y="1828800"/>
-            <a:ext cx="457200" cy="457200"/>
-          </a:xfrm>
-          <a:prstGeom prst="ellipse">
-            <a:avLst/>
+            <a:off x="6278727" y="1600200"/>
+            <a:ext cx="5364327" cy="640080"/>
+          </a:xfrm>
+          <a:prstGeom prst="roundRect">
+            <a:avLst>
+              <a:gd name="adj" fmla="val 15000"/>
+            </a:avLst>
           </a:prstGeom>
           <a:solidFill>
-            <a:srgbClr val="F2B705"/>
+            <a:srgbClr val="0645AD"/>
           </a:solidFill>
           <a:ln>
             <a:noFill/>
@@ -6476,32 +9820,21 @@
           </a:fontRef>
         </p:style>
         <p:txBody>
-          <a:bodyPr rtlCol="0" anchor="ctr" lIns="0" rIns="0" tIns="0" bIns="0"/>
-          <a:lstStyle/>
-          <a:p>
-            <a:pPr algn="ctr"/>
-            <a:r>
-              <a:rPr sz="1500" b="1">
-                <a:solidFill>
-                  <a:srgbClr val="202122"/>
-                </a:solidFill>
-                <a:latin typeface="Calibri"/>
-              </a:rPr>
-              <a:t>1</a:t>
-            </a:r>
-          </a:p>
-        </p:txBody>
-      </p:sp>
-      <p:sp>
-        <p:nvSpPr>
-          <p:cNvPr id="8" name="TextBox 7"/>
-          <p:cNvSpPr txBox="1"/>
-          <p:nvPr/>
-        </p:nvSpPr>
-        <p:spPr>
-          <a:xfrm>
-            <a:off x="1371600" y="1801368"/>
-            <a:ext cx="2509418" cy="512064"/>
+          <a:bodyPr rtlCol="0" anchor="ctr"/>
+          <a:lstStyle/>
+          <a:p/>
+        </p:txBody>
+      </p:sp>
+      <p:sp>
+        <p:nvSpPr>
+          <p:cNvPr id="11" name="TextBox 10"/>
+          <p:cNvSpPr txBox="1"/>
+          <p:nvPr/>
+        </p:nvSpPr>
+        <p:spPr>
+          <a:xfrm>
+            <a:off x="6507327" y="1600200"/>
+            <a:ext cx="4907127" cy="640080"/>
           </a:xfrm>
           <a:prstGeom prst="rect">
             <a:avLst/>
@@ -6514,64 +9847,31 @@
           <a:p>
             <a:pPr algn="l"/>
             <a:r>
-              <a:rPr sz="1900" b="1" i="0">
-                <a:solidFill>
-                  <a:srgbClr val="03306E"/>
-                </a:solidFill>
-                <a:latin typeface="Calibri"/>
-              </a:rPr>
-              <a:t>Six sigma</a:t>
-            </a:r>
-          </a:p>
-        </p:txBody>
-      </p:sp>
-      <p:sp>
-        <p:nvSpPr>
-          <p:cNvPr id="9" name="TextBox 8"/>
-          <p:cNvSpPr txBox="1"/>
-          <p:nvPr/>
-        </p:nvSpPr>
-        <p:spPr>
-          <a:xfrm>
-            <a:off x="777240" y="2468880"/>
-            <a:ext cx="3058058" cy="1143000"/>
-          </a:xfrm>
-          <a:prstGeom prst="rect">
-            <a:avLst/>
-          </a:prstGeom>
-          <a:noFill/>
-        </p:spPr>
-        <p:txBody>
-          <a:bodyPr wrap="square" anchor="t" lIns="0" rIns="0" tIns="0" bIns="0"/>
-          <a:lstStyle/>
-          <a:p>
-            <a:pPr algn="l"/>
-            <a:r>
-              <a:rPr sz="2000" b="0" i="0">
-                <a:solidFill>
-                  <a:srgbClr val="202122"/>
-                </a:solidFill>
-                <a:latin typeface="Calibri"/>
-              </a:rPr>
-              <a:t>Data-driven reduction of variation, for high-volume manufacture.</a:t>
-            </a:r>
-          </a:p>
-        </p:txBody>
-      </p:sp>
-      <p:sp>
-        <p:nvSpPr>
-          <p:cNvPr id="10" name="Rounded Rectangle 9"/>
+              <a:rPr sz="2000" b="1" i="0">
+                <a:solidFill>
+                  <a:srgbClr val="FFFFFF"/>
+                </a:solidFill>
+                <a:latin typeface="Calibri"/>
+              </a:rPr>
+              <a:t>Quality control</a:t>
+            </a:r>
+          </a:p>
+        </p:txBody>
+      </p:sp>
+      <p:sp>
+        <p:nvSpPr>
+          <p:cNvPr id="12" name="Rounded Rectangle 11"/>
           <p:cNvSpPr/>
           <p:nvPr/>
         </p:nvSpPr>
         <p:spPr>
           <a:xfrm>
-            <a:off x="4338218" y="1600200"/>
-            <a:ext cx="3515258" cy="2148840"/>
+            <a:off x="6278727" y="2377440"/>
+            <a:ext cx="5364327" cy="3794760"/>
           </a:xfrm>
           <a:prstGeom prst="roundRect">
             <a:avLst>
-              <a:gd name="adj" fmla="val 6000"/>
+              <a:gd name="adj" fmla="val 4000"/>
             </a:avLst>
           </a:prstGeom>
           <a:solidFill>
@@ -6604,771 +9904,107 @@
       </p:sp>
       <p:sp>
         <p:nvSpPr>
-          <p:cNvPr id="11" name="Oval 10"/>
-          <p:cNvSpPr/>
-          <p:nvPr/>
-        </p:nvSpPr>
-        <p:spPr>
-          <a:xfrm>
-            <a:off x="4566818" y="1828800"/>
-            <a:ext cx="457200" cy="457200"/>
-          </a:xfrm>
-          <a:prstGeom prst="ellipse">
-            <a:avLst/>
-          </a:prstGeom>
-          <a:solidFill>
-            <a:srgbClr val="F2B705"/>
-          </a:solidFill>
-          <a:ln>
-            <a:noFill/>
-          </a:ln>
-          <a:effectLst/>
-        </p:spPr>
-        <p:style>
-          <a:lnRef idx="1">
-            <a:schemeClr val="accent1"/>
-          </a:lnRef>
-          <a:fillRef idx="3">
-            <a:schemeClr val="accent1"/>
-          </a:fillRef>
-          <a:effectRef idx="2">
-            <a:schemeClr val="accent1"/>
-          </a:effectRef>
-          <a:fontRef idx="minor">
-            <a:schemeClr val="lt1"/>
-          </a:fontRef>
-        </p:style>
-        <p:txBody>
-          <a:bodyPr rtlCol="0" anchor="ctr" lIns="0" rIns="0" tIns="0" bIns="0"/>
-          <a:lstStyle/>
-          <a:p>
-            <a:pPr algn="ctr"/>
-            <a:r>
-              <a:rPr sz="1500" b="1">
+          <p:cNvPr id="13" name="TextBox 12"/>
+          <p:cNvSpPr txBox="1"/>
+          <p:nvPr/>
+        </p:nvSpPr>
+        <p:spPr>
+          <a:xfrm>
+            <a:off x="6553047" y="2606040"/>
+            <a:ext cx="4815687" cy="3337560"/>
+          </a:xfrm>
+          <a:prstGeom prst="rect">
+            <a:avLst/>
+          </a:prstGeom>
+          <a:noFill/>
+        </p:spPr>
+        <p:txBody>
+          <a:bodyPr wrap="square" lIns="0" rIns="0" tIns="0" bIns="0">
+            <a:spAutoFit/>
+          </a:bodyPr>
+          <a:lstStyle/>
+          <a:p>
+            <a:pPr marL="274320" indent="-274320">
+              <a:spcAft>
+                <a:spcPts val="990"/>
+              </a:spcAft>
+              <a:buClr>
+                <a:srgbClr val="0645AD"/>
+              </a:buClr>
+              <a:buFont typeface="Arial"/>
+              <a:buChar char="•"/>
+            </a:pPr>
+            <a:r>
+              <a:rPr sz="2200" b="0">
                 <a:solidFill>
                   <a:srgbClr val="202122"/>
                 </a:solidFill>
                 <a:latin typeface="Calibri"/>
               </a:rPr>
-              <a:t>2</a:t>
-            </a:r>
-          </a:p>
-        </p:txBody>
-      </p:sp>
-      <p:sp>
-        <p:nvSpPr>
-          <p:cNvPr id="12" name="TextBox 11"/>
-          <p:cNvSpPr txBox="1"/>
-          <p:nvPr/>
-        </p:nvSpPr>
-        <p:spPr>
-          <a:xfrm>
-            <a:off x="5161178" y="1801368"/>
-            <a:ext cx="2509418" cy="512064"/>
-          </a:xfrm>
-          <a:prstGeom prst="rect">
-            <a:avLst/>
-          </a:prstGeom>
-          <a:noFill/>
-        </p:spPr>
-        <p:txBody>
-          <a:bodyPr wrap="square" anchor="ctr" lIns="0" rIns="0" tIns="0" bIns="0"/>
-          <a:lstStyle/>
-          <a:p>
-            <a:pPr algn="l"/>
-            <a:r>
-              <a:rPr sz="1900" b="1" i="0">
-                <a:solidFill>
-                  <a:srgbClr val="03306E"/>
-                </a:solidFill>
-                <a:latin typeface="Calibri"/>
-              </a:rPr>
-              <a:t>TQM</a:t>
-            </a:r>
-          </a:p>
-        </p:txBody>
-      </p:sp>
-      <p:sp>
-        <p:nvSpPr>
-          <p:cNvPr id="13" name="TextBox 12"/>
-          <p:cNvSpPr txBox="1"/>
-          <p:nvPr/>
-        </p:nvSpPr>
-        <p:spPr>
-          <a:xfrm>
-            <a:off x="4566818" y="2468880"/>
-            <a:ext cx="3058058" cy="1143000"/>
-          </a:xfrm>
-          <a:prstGeom prst="rect">
-            <a:avLst/>
-          </a:prstGeom>
-          <a:noFill/>
-        </p:spPr>
-        <p:txBody>
-          <a:bodyPr wrap="square" anchor="t" lIns="0" rIns="0" tIns="0" bIns="0"/>
-          <a:lstStyle/>
-          <a:p>
-            <a:pPr algn="l"/>
-            <a:r>
-              <a:rPr sz="2000" b="0" i="0">
+              <a:t>Finds defects by inspection and testing</a:t>
+            </a:r>
+          </a:p>
+          <a:p>
+            <a:pPr marL="274320" indent="-274320">
+              <a:spcAft>
+                <a:spcPts val="990"/>
+              </a:spcAft>
+              <a:buClr>
+                <a:srgbClr val="0645AD"/>
+              </a:buClr>
+              <a:buFont typeface="Arial"/>
+              <a:buChar char="•"/>
+            </a:pPr>
+            <a:r>
+              <a:rPr sz="2200" b="0">
                 <a:solidFill>
                   <a:srgbClr val="202122"/>
                 </a:solidFill>
                 <a:latin typeface="Calibri"/>
               </a:rPr>
-              <a:t>Total quality management: everyone responsible for quality.</a:t>
-            </a:r>
-          </a:p>
-        </p:txBody>
-      </p:sp>
-      <p:sp>
-        <p:nvSpPr>
-          <p:cNvPr id="14" name="Rounded Rectangle 13"/>
-          <p:cNvSpPr/>
-          <p:nvPr/>
-        </p:nvSpPr>
-        <p:spPr>
-          <a:xfrm>
-            <a:off x="8127796" y="1600200"/>
-            <a:ext cx="3515258" cy="2148840"/>
-          </a:xfrm>
-          <a:prstGeom prst="roundRect">
-            <a:avLst>
-              <a:gd name="adj" fmla="val 6000"/>
-            </a:avLst>
-          </a:prstGeom>
-          <a:solidFill>
-            <a:srgbClr val="EAF3FF"/>
-          </a:solidFill>
-          <a:ln>
-            <a:noFill/>
-          </a:ln>
-          <a:effectLst/>
-        </p:spPr>
-        <p:style>
-          <a:lnRef idx="1">
-            <a:schemeClr val="accent1"/>
-          </a:lnRef>
-          <a:fillRef idx="3">
-            <a:schemeClr val="accent1"/>
-          </a:fillRef>
-          <a:effectRef idx="2">
-            <a:schemeClr val="accent1"/>
-          </a:effectRef>
-          <a:fontRef idx="minor">
-            <a:schemeClr val="lt1"/>
-          </a:fontRef>
-        </p:style>
-        <p:txBody>
-          <a:bodyPr rtlCol="0" anchor="ctr"/>
-          <a:lstStyle/>
-          <a:p/>
-        </p:txBody>
-      </p:sp>
-      <p:sp>
-        <p:nvSpPr>
-          <p:cNvPr id="15" name="Oval 14"/>
-          <p:cNvSpPr/>
-          <p:nvPr/>
-        </p:nvSpPr>
-        <p:spPr>
-          <a:xfrm>
-            <a:off x="8356396" y="1828800"/>
-            <a:ext cx="457200" cy="457200"/>
-          </a:xfrm>
-          <a:prstGeom prst="ellipse">
-            <a:avLst/>
-          </a:prstGeom>
-          <a:solidFill>
-            <a:srgbClr val="F2B705"/>
-          </a:solidFill>
-          <a:ln>
-            <a:noFill/>
-          </a:ln>
-          <a:effectLst/>
-        </p:spPr>
-        <p:style>
-          <a:lnRef idx="1">
-            <a:schemeClr val="accent1"/>
-          </a:lnRef>
-          <a:fillRef idx="3">
-            <a:schemeClr val="accent1"/>
-          </a:fillRef>
-          <a:effectRef idx="2">
-            <a:schemeClr val="accent1"/>
-          </a:effectRef>
-          <a:fontRef idx="minor">
-            <a:schemeClr val="lt1"/>
-          </a:fontRef>
-        </p:style>
-        <p:txBody>
-          <a:bodyPr rtlCol="0" anchor="ctr" lIns="0" rIns="0" tIns="0" bIns="0"/>
-          <a:lstStyle/>
-          <a:p>
-            <a:pPr algn="ctr"/>
-            <a:r>
-              <a:rPr sz="1500" b="1">
+              <a:t>Checks products against specification</a:t>
+            </a:r>
+          </a:p>
+          <a:p>
+            <a:pPr marL="274320" indent="-274320">
+              <a:spcAft>
+                <a:spcPts val="990"/>
+              </a:spcAft>
+              <a:buClr>
+                <a:srgbClr val="0645AD"/>
+              </a:buClr>
+              <a:buFont typeface="Arial"/>
+              <a:buChar char="•"/>
+            </a:pPr>
+            <a:r>
+              <a:rPr sz="2200" b="0">
                 <a:solidFill>
                   <a:srgbClr val="202122"/>
                 </a:solidFill>
                 <a:latin typeface="Calibri"/>
               </a:rPr>
-              <a:t>3</a:t>
-            </a:r>
-          </a:p>
-        </p:txBody>
-      </p:sp>
-      <p:sp>
-        <p:nvSpPr>
-          <p:cNvPr id="16" name="TextBox 15"/>
-          <p:cNvSpPr txBox="1"/>
-          <p:nvPr/>
-        </p:nvSpPr>
-        <p:spPr>
-          <a:xfrm>
-            <a:off x="8950756" y="1801368"/>
-            <a:ext cx="2509418" cy="512064"/>
-          </a:xfrm>
-          <a:prstGeom prst="rect">
-            <a:avLst/>
-          </a:prstGeom>
-          <a:noFill/>
-        </p:spPr>
-        <p:txBody>
-          <a:bodyPr wrap="square" anchor="ctr" lIns="0" rIns="0" tIns="0" bIns="0"/>
-          <a:lstStyle/>
-          <a:p>
-            <a:pPr algn="l"/>
-            <a:r>
-              <a:rPr sz="1900" b="1" i="0">
-                <a:solidFill>
-                  <a:srgbClr val="03306E"/>
-                </a:solidFill>
-                <a:latin typeface="Calibri"/>
-              </a:rPr>
-              <a:t>FMEA</a:t>
-            </a:r>
-          </a:p>
-        </p:txBody>
-      </p:sp>
-      <p:sp>
-        <p:nvSpPr>
-          <p:cNvPr id="17" name="TextBox 16"/>
-          <p:cNvSpPr txBox="1"/>
-          <p:nvPr/>
-        </p:nvSpPr>
-        <p:spPr>
-          <a:xfrm>
-            <a:off x="8356396" y="2468880"/>
-            <a:ext cx="3058058" cy="1143000"/>
-          </a:xfrm>
-          <a:prstGeom prst="rect">
-            <a:avLst/>
-          </a:prstGeom>
-          <a:noFill/>
-        </p:spPr>
-        <p:txBody>
-          <a:bodyPr wrap="square" anchor="t" lIns="0" rIns="0" tIns="0" bIns="0"/>
-          <a:lstStyle/>
-          <a:p>
-            <a:pPr algn="l"/>
-            <a:r>
-              <a:rPr sz="2000" b="0" i="0">
+              <a:t>Statistical process control (SPC) samples production</a:t>
+            </a:r>
+          </a:p>
+          <a:p>
+            <a:pPr marL="274320" indent="-274320">
+              <a:spcAft>
+                <a:spcPts val="990"/>
+              </a:spcAft>
+              <a:buClr>
+                <a:srgbClr val="0645AD"/>
+              </a:buClr>
+              <a:buFont typeface="Arial"/>
+              <a:buChar char="•"/>
+            </a:pPr>
+            <a:r>
+              <a:rPr sz="2200" b="0">
                 <a:solidFill>
                   <a:srgbClr val="202122"/>
                 </a:solidFill>
                 <a:latin typeface="Calibri"/>
               </a:rPr>
-              <a:t>List failure modes and their effects before they happen.</a:t>
-            </a:r>
-          </a:p>
-        </p:txBody>
-      </p:sp>
-      <p:sp>
-        <p:nvSpPr>
-          <p:cNvPr id="18" name="Rounded Rectangle 17"/>
-          <p:cNvSpPr/>
-          <p:nvPr/>
-        </p:nvSpPr>
-        <p:spPr>
-          <a:xfrm>
-            <a:off x="548640" y="4023360"/>
-            <a:ext cx="3515258" cy="2148840"/>
-          </a:xfrm>
-          <a:prstGeom prst="roundRect">
-            <a:avLst>
-              <a:gd name="adj" fmla="val 6000"/>
-            </a:avLst>
-          </a:prstGeom>
-          <a:solidFill>
-            <a:srgbClr val="EAF3FF"/>
-          </a:solidFill>
-          <a:ln>
-            <a:noFill/>
-          </a:ln>
-          <a:effectLst/>
-        </p:spPr>
-        <p:style>
-          <a:lnRef idx="1">
-            <a:schemeClr val="accent1"/>
-          </a:lnRef>
-          <a:fillRef idx="3">
-            <a:schemeClr val="accent1"/>
-          </a:fillRef>
-          <a:effectRef idx="2">
-            <a:schemeClr val="accent1"/>
-          </a:effectRef>
-          <a:fontRef idx="minor">
-            <a:schemeClr val="lt1"/>
-          </a:fontRef>
-        </p:style>
-        <p:txBody>
-          <a:bodyPr rtlCol="0" anchor="ctr"/>
-          <a:lstStyle/>
-          <a:p/>
-        </p:txBody>
-      </p:sp>
-      <p:sp>
-        <p:nvSpPr>
-          <p:cNvPr id="19" name="Oval 18"/>
-          <p:cNvSpPr/>
-          <p:nvPr/>
-        </p:nvSpPr>
-        <p:spPr>
-          <a:xfrm>
-            <a:off x="777240" y="4251960"/>
-            <a:ext cx="457200" cy="457200"/>
-          </a:xfrm>
-          <a:prstGeom prst="ellipse">
-            <a:avLst/>
-          </a:prstGeom>
-          <a:solidFill>
-            <a:srgbClr val="F2B705"/>
-          </a:solidFill>
-          <a:ln>
-            <a:noFill/>
-          </a:ln>
-          <a:effectLst/>
-        </p:spPr>
-        <p:style>
-          <a:lnRef idx="1">
-            <a:schemeClr val="accent1"/>
-          </a:lnRef>
-          <a:fillRef idx="3">
-            <a:schemeClr val="accent1"/>
-          </a:fillRef>
-          <a:effectRef idx="2">
-            <a:schemeClr val="accent1"/>
-          </a:effectRef>
-          <a:fontRef idx="minor">
-            <a:schemeClr val="lt1"/>
-          </a:fontRef>
-        </p:style>
-        <p:txBody>
-          <a:bodyPr rtlCol="0" anchor="ctr" lIns="0" rIns="0" tIns="0" bIns="0"/>
-          <a:lstStyle/>
-          <a:p>
-            <a:pPr algn="ctr"/>
-            <a:r>
-              <a:rPr sz="1500" b="1">
-                <a:solidFill>
-                  <a:srgbClr val="202122"/>
-                </a:solidFill>
-                <a:latin typeface="Calibri"/>
-              </a:rPr>
-              <a:t>4</a:t>
-            </a:r>
-          </a:p>
-        </p:txBody>
-      </p:sp>
-      <p:sp>
-        <p:nvSpPr>
-          <p:cNvPr id="20" name="TextBox 19"/>
-          <p:cNvSpPr txBox="1"/>
-          <p:nvPr/>
-        </p:nvSpPr>
-        <p:spPr>
-          <a:xfrm>
-            <a:off x="1371600" y="4224528"/>
-            <a:ext cx="2509418" cy="512064"/>
-          </a:xfrm>
-          <a:prstGeom prst="rect">
-            <a:avLst/>
-          </a:prstGeom>
-          <a:noFill/>
-        </p:spPr>
-        <p:txBody>
-          <a:bodyPr wrap="square" anchor="ctr" lIns="0" rIns="0" tIns="0" bIns="0"/>
-          <a:lstStyle/>
-          <a:p>
-            <a:pPr algn="l"/>
-            <a:r>
-              <a:rPr sz="1900" b="1" i="0">
-                <a:solidFill>
-                  <a:srgbClr val="03306E"/>
-                </a:solidFill>
-                <a:latin typeface="Calibri"/>
-              </a:rPr>
-              <a:t>Pareto analysis</a:t>
-            </a:r>
-          </a:p>
-        </p:txBody>
-      </p:sp>
-      <p:sp>
-        <p:nvSpPr>
-          <p:cNvPr id="21" name="TextBox 20"/>
-          <p:cNvSpPr txBox="1"/>
-          <p:nvPr/>
-        </p:nvSpPr>
-        <p:spPr>
-          <a:xfrm>
-            <a:off x="777240" y="4892040"/>
-            <a:ext cx="3058058" cy="1143000"/>
-          </a:xfrm>
-          <a:prstGeom prst="rect">
-            <a:avLst/>
-          </a:prstGeom>
-          <a:noFill/>
-        </p:spPr>
-        <p:txBody>
-          <a:bodyPr wrap="square" anchor="t" lIns="0" rIns="0" tIns="0" bIns="0"/>
-          <a:lstStyle/>
-          <a:p>
-            <a:pPr algn="l"/>
-            <a:r>
-              <a:rPr sz="2000" b="0" i="0">
-                <a:solidFill>
-                  <a:srgbClr val="202122"/>
-                </a:solidFill>
-                <a:latin typeface="Calibri"/>
-              </a:rPr>
-              <a:t>80% of problems often come from 20% of causes.</a:t>
-            </a:r>
-          </a:p>
-        </p:txBody>
-      </p:sp>
-      <p:sp>
-        <p:nvSpPr>
-          <p:cNvPr id="22" name="Rounded Rectangle 21"/>
-          <p:cNvSpPr/>
-          <p:nvPr/>
-        </p:nvSpPr>
-        <p:spPr>
-          <a:xfrm>
-            <a:off x="4338218" y="4023360"/>
-            <a:ext cx="3515258" cy="2148840"/>
-          </a:xfrm>
-          <a:prstGeom prst="roundRect">
-            <a:avLst>
-              <a:gd name="adj" fmla="val 6000"/>
-            </a:avLst>
-          </a:prstGeom>
-          <a:solidFill>
-            <a:srgbClr val="EAF3FF"/>
-          </a:solidFill>
-          <a:ln>
-            <a:noFill/>
-          </a:ln>
-          <a:effectLst/>
-        </p:spPr>
-        <p:style>
-          <a:lnRef idx="1">
-            <a:schemeClr val="accent1"/>
-          </a:lnRef>
-          <a:fillRef idx="3">
-            <a:schemeClr val="accent1"/>
-          </a:fillRef>
-          <a:effectRef idx="2">
-            <a:schemeClr val="accent1"/>
-          </a:effectRef>
-          <a:fontRef idx="minor">
-            <a:schemeClr val="lt1"/>
-          </a:fontRef>
-        </p:style>
-        <p:txBody>
-          <a:bodyPr rtlCol="0" anchor="ctr"/>
-          <a:lstStyle/>
-          <a:p/>
-        </p:txBody>
-      </p:sp>
-      <p:sp>
-        <p:nvSpPr>
-          <p:cNvPr id="23" name="Oval 22"/>
-          <p:cNvSpPr/>
-          <p:nvPr/>
-        </p:nvSpPr>
-        <p:spPr>
-          <a:xfrm>
-            <a:off x="4566818" y="4251960"/>
-            <a:ext cx="457200" cy="457200"/>
-          </a:xfrm>
-          <a:prstGeom prst="ellipse">
-            <a:avLst/>
-          </a:prstGeom>
-          <a:solidFill>
-            <a:srgbClr val="F2B705"/>
-          </a:solidFill>
-          <a:ln>
-            <a:noFill/>
-          </a:ln>
-          <a:effectLst/>
-        </p:spPr>
-        <p:style>
-          <a:lnRef idx="1">
-            <a:schemeClr val="accent1"/>
-          </a:lnRef>
-          <a:fillRef idx="3">
-            <a:schemeClr val="accent1"/>
-          </a:fillRef>
-          <a:effectRef idx="2">
-            <a:schemeClr val="accent1"/>
-          </a:effectRef>
-          <a:fontRef idx="minor">
-            <a:schemeClr val="lt1"/>
-          </a:fontRef>
-        </p:style>
-        <p:txBody>
-          <a:bodyPr rtlCol="0" anchor="ctr" lIns="0" rIns="0" tIns="0" bIns="0"/>
-          <a:lstStyle/>
-          <a:p>
-            <a:pPr algn="ctr"/>
-            <a:r>
-              <a:rPr sz="1500" b="1">
-                <a:solidFill>
-                  <a:srgbClr val="202122"/>
-                </a:solidFill>
-                <a:latin typeface="Calibri"/>
-              </a:rPr>
-              <a:t>5</a:t>
-            </a:r>
-          </a:p>
-        </p:txBody>
-      </p:sp>
-      <p:sp>
-        <p:nvSpPr>
-          <p:cNvPr id="24" name="TextBox 23"/>
-          <p:cNvSpPr txBox="1"/>
-          <p:nvPr/>
-        </p:nvSpPr>
-        <p:spPr>
-          <a:xfrm>
-            <a:off x="5161178" y="4224528"/>
-            <a:ext cx="2509418" cy="512064"/>
-          </a:xfrm>
-          <a:prstGeom prst="rect">
-            <a:avLst/>
-          </a:prstGeom>
-          <a:noFill/>
-        </p:spPr>
-        <p:txBody>
-          <a:bodyPr wrap="square" anchor="ctr" lIns="0" rIns="0" tIns="0" bIns="0"/>
-          <a:lstStyle/>
-          <a:p>
-            <a:pPr algn="l"/>
-            <a:r>
-              <a:rPr sz="1900" b="1" i="0">
-                <a:solidFill>
-                  <a:srgbClr val="03306E"/>
-                </a:solidFill>
-                <a:latin typeface="Calibri"/>
-              </a:rPr>
-              <a:t>Cause and effect</a:t>
-            </a:r>
-          </a:p>
-        </p:txBody>
-      </p:sp>
-      <p:sp>
-        <p:nvSpPr>
-          <p:cNvPr id="25" name="TextBox 24"/>
-          <p:cNvSpPr txBox="1"/>
-          <p:nvPr/>
-        </p:nvSpPr>
-        <p:spPr>
-          <a:xfrm>
-            <a:off x="4566818" y="4892040"/>
-            <a:ext cx="3058058" cy="1143000"/>
-          </a:xfrm>
-          <a:prstGeom prst="rect">
-            <a:avLst/>
-          </a:prstGeom>
-          <a:noFill/>
-        </p:spPr>
-        <p:txBody>
-          <a:bodyPr wrap="square" anchor="t" lIns="0" rIns="0" tIns="0" bIns="0"/>
-          <a:lstStyle/>
-          <a:p>
-            <a:pPr algn="l"/>
-            <a:r>
-              <a:rPr sz="2000" b="0" i="0">
-                <a:solidFill>
-                  <a:srgbClr val="202122"/>
-                </a:solidFill>
-                <a:latin typeface="Calibri"/>
-              </a:rPr>
-              <a:t>Fishbone diagrams find root causes.</a:t>
-            </a:r>
-          </a:p>
-        </p:txBody>
-      </p:sp>
-      <p:sp>
-        <p:nvSpPr>
-          <p:cNvPr id="26" name="Rounded Rectangle 25"/>
-          <p:cNvSpPr/>
-          <p:nvPr/>
-        </p:nvSpPr>
-        <p:spPr>
-          <a:xfrm>
-            <a:off x="8127796" y="4023360"/>
-            <a:ext cx="3515258" cy="2148840"/>
-          </a:xfrm>
-          <a:prstGeom prst="roundRect">
-            <a:avLst>
-              <a:gd name="adj" fmla="val 6000"/>
-            </a:avLst>
-          </a:prstGeom>
-          <a:solidFill>
-            <a:srgbClr val="EAF3FF"/>
-          </a:solidFill>
-          <a:ln>
-            <a:noFill/>
-          </a:ln>
-          <a:effectLst/>
-        </p:spPr>
-        <p:style>
-          <a:lnRef idx="1">
-            <a:schemeClr val="accent1"/>
-          </a:lnRef>
-          <a:fillRef idx="3">
-            <a:schemeClr val="accent1"/>
-          </a:fillRef>
-          <a:effectRef idx="2">
-            <a:schemeClr val="accent1"/>
-          </a:effectRef>
-          <a:fontRef idx="minor">
-            <a:schemeClr val="lt1"/>
-          </a:fontRef>
-        </p:style>
-        <p:txBody>
-          <a:bodyPr rtlCol="0" anchor="ctr"/>
-          <a:lstStyle/>
-          <a:p/>
-        </p:txBody>
-      </p:sp>
-      <p:sp>
-        <p:nvSpPr>
-          <p:cNvPr id="27" name="Oval 26"/>
-          <p:cNvSpPr/>
-          <p:nvPr/>
-        </p:nvSpPr>
-        <p:spPr>
-          <a:xfrm>
-            <a:off x="8356396" y="4251960"/>
-            <a:ext cx="457200" cy="457200"/>
-          </a:xfrm>
-          <a:prstGeom prst="ellipse">
-            <a:avLst/>
-          </a:prstGeom>
-          <a:solidFill>
-            <a:srgbClr val="F2B705"/>
-          </a:solidFill>
-          <a:ln>
-            <a:noFill/>
-          </a:ln>
-          <a:effectLst/>
-        </p:spPr>
-        <p:style>
-          <a:lnRef idx="1">
-            <a:schemeClr val="accent1"/>
-          </a:lnRef>
-          <a:fillRef idx="3">
-            <a:schemeClr val="accent1"/>
-          </a:fillRef>
-          <a:effectRef idx="2">
-            <a:schemeClr val="accent1"/>
-          </a:effectRef>
-          <a:fontRef idx="minor">
-            <a:schemeClr val="lt1"/>
-          </a:fontRef>
-        </p:style>
-        <p:txBody>
-          <a:bodyPr rtlCol="0" anchor="ctr" lIns="0" rIns="0" tIns="0" bIns="0"/>
-          <a:lstStyle/>
-          <a:p>
-            <a:pPr algn="ctr"/>
-            <a:r>
-              <a:rPr sz="1500" b="1">
-                <a:solidFill>
-                  <a:srgbClr val="202122"/>
-                </a:solidFill>
-                <a:latin typeface="Calibri"/>
-              </a:rPr>
-              <a:t>6</a:t>
-            </a:r>
-          </a:p>
-        </p:txBody>
-      </p:sp>
-      <p:sp>
-        <p:nvSpPr>
-          <p:cNvPr id="28" name="TextBox 27"/>
-          <p:cNvSpPr txBox="1"/>
-          <p:nvPr/>
-        </p:nvSpPr>
-        <p:spPr>
-          <a:xfrm>
-            <a:off x="8950756" y="4224528"/>
-            <a:ext cx="2509418" cy="512064"/>
-          </a:xfrm>
-          <a:prstGeom prst="rect">
-            <a:avLst/>
-          </a:prstGeom>
-          <a:noFill/>
-        </p:spPr>
-        <p:txBody>
-          <a:bodyPr wrap="square" anchor="ctr" lIns="0" rIns="0" tIns="0" bIns="0"/>
-          <a:lstStyle/>
-          <a:p>
-            <a:pPr algn="l"/>
-            <a:r>
-              <a:rPr sz="1900" b="1" i="0">
-                <a:solidFill>
-                  <a:srgbClr val="03306E"/>
-                </a:solidFill>
-                <a:latin typeface="Calibri"/>
-              </a:rPr>
-              <a:t>Quality circles</a:t>
-            </a:r>
-          </a:p>
-        </p:txBody>
-      </p:sp>
-      <p:sp>
-        <p:nvSpPr>
-          <p:cNvPr id="29" name="TextBox 28"/>
-          <p:cNvSpPr txBox="1"/>
-          <p:nvPr/>
-        </p:nvSpPr>
-        <p:spPr>
-          <a:xfrm>
-            <a:off x="8356396" y="4892040"/>
-            <a:ext cx="3058058" cy="1143000"/>
-          </a:xfrm>
-          <a:prstGeom prst="rect">
-            <a:avLst/>
-          </a:prstGeom>
-          <a:noFill/>
-        </p:spPr>
-        <p:txBody>
-          <a:bodyPr wrap="square" anchor="t" lIns="0" rIns="0" tIns="0" bIns="0"/>
-          <a:lstStyle/>
-          <a:p>
-            <a:pPr algn="l"/>
-            <a:r>
-              <a:rPr sz="2000" b="0" i="0">
-                <a:solidFill>
-                  <a:srgbClr val="202122"/>
-                </a:solidFill>
-                <a:latin typeface="Calibri"/>
-              </a:rPr>
-              <a:t>Small teams of workers solving quality problems.</a:t>
+              <a:t>Process capability shows if a process can meet tolerances</a:t>
             </a:r>
           </a:p>
         </p:txBody>
@@ -7460,7 +10096,7 @@
                 </a:solidFill>
                 <a:latin typeface="Cambria"/>
               </a:rPr>
-              <a:t>Standard operating procedures</a:t>
+              <a:t>Quick check: Quality assurance and quality control</a:t>
             </a:r>
           </a:p>
         </p:txBody>
@@ -7533,192 +10169,14 @@
       </p:sp>
       <p:sp>
         <p:nvSpPr>
-          <p:cNvPr id="6" name="TextBox 5"/>
-          <p:cNvSpPr txBox="1"/>
-          <p:nvPr/>
-        </p:nvSpPr>
-        <p:spPr>
-          <a:xfrm>
-            <a:off x="548640" y="1600200"/>
-            <a:ext cx="6675120" cy="4572000"/>
-          </a:xfrm>
-          <a:prstGeom prst="rect">
-            <a:avLst/>
-          </a:prstGeom>
-          <a:noFill/>
-        </p:spPr>
-        <p:txBody>
-          <a:bodyPr wrap="square" lIns="0" rIns="0" tIns="0" bIns="0">
-            <a:spAutoFit/>
-          </a:bodyPr>
-          <a:lstStyle/>
-          <a:p>
-            <a:pPr marL="274320" indent="-274320">
-              <a:spcAft>
-                <a:spcPts val="1035"/>
-              </a:spcAft>
-              <a:buClr>
-                <a:srgbClr val="0645AD"/>
-              </a:buClr>
-              <a:buFont typeface="Arial"/>
-              <a:buChar char="•"/>
-            </a:pPr>
-            <a:r>
-              <a:rPr sz="2300" b="1">
-                <a:solidFill>
-                  <a:srgbClr val="202122"/>
-                </a:solidFill>
-                <a:latin typeface="Calibri"/>
-              </a:rPr>
-              <a:t>Types:</a:t>
-            </a:r>
-            <a:r>
-              <a:rPr sz="2300" b="0">
-                <a:solidFill>
-                  <a:srgbClr val="202122"/>
-                </a:solidFill>
-                <a:latin typeface="Calibri"/>
-              </a:rPr>
-              <a:t> manufacturing, quality and maintenance SOPs.</a:t>
-            </a:r>
-          </a:p>
-          <a:p>
-            <a:pPr marL="274320" indent="-274320">
-              <a:spcAft>
-                <a:spcPts val="1035"/>
-              </a:spcAft>
-              <a:buClr>
-                <a:srgbClr val="0645AD"/>
-              </a:buClr>
-              <a:buFont typeface="Arial"/>
-              <a:buChar char="•"/>
-            </a:pPr>
-            <a:r>
-              <a:rPr sz="2300" b="1">
-                <a:solidFill>
-                  <a:srgbClr val="202122"/>
-                </a:solidFill>
-                <a:latin typeface="Calibri"/>
-              </a:rPr>
-              <a:t>Purpose:</a:t>
-            </a:r>
-            <a:r>
-              <a:rPr sz="2300" b="0">
-                <a:solidFill>
-                  <a:srgbClr val="202122"/>
-                </a:solidFill>
-                <a:latin typeface="Calibri"/>
-              </a:rPr>
-              <a:t> standardise activity, satisfy customers, keep people safe, support training.</a:t>
-            </a:r>
-          </a:p>
-          <a:p>
-            <a:pPr marL="274320" indent="-274320">
-              <a:spcAft>
-                <a:spcPts val="1035"/>
-              </a:spcAft>
-              <a:buClr>
-                <a:srgbClr val="0645AD"/>
-              </a:buClr>
-              <a:buFont typeface="Arial"/>
-              <a:buChar char="•"/>
-            </a:pPr>
-            <a:r>
-              <a:rPr sz="2300" b="1">
-                <a:solidFill>
-                  <a:srgbClr val="202122"/>
-                </a:solidFill>
-                <a:latin typeface="Calibri"/>
-              </a:rPr>
-              <a:t>Typical format:</a:t>
-            </a:r>
-            <a:r>
-              <a:rPr sz="2300" b="0">
-                <a:solidFill>
-                  <a:srgbClr val="202122"/>
-                </a:solidFill>
-                <a:latin typeface="Calibri"/>
-              </a:rPr>
-              <a:t> title, purpose, scope, responsibilities, equipment, step-by-step method, safety notes, revision history.</a:t>
-            </a:r>
-          </a:p>
-          <a:p>
-            <a:pPr marL="274320" indent="-274320">
-              <a:spcAft>
-                <a:spcPts val="1035"/>
-              </a:spcAft>
-              <a:buClr>
-                <a:srgbClr val="0645AD"/>
-              </a:buClr>
-              <a:buFont typeface="Arial"/>
-              <a:buChar char="•"/>
-            </a:pPr>
-            <a:r>
-              <a:rPr sz="2300" b="0">
-                <a:solidFill>
-                  <a:srgbClr val="202122"/>
-                </a:solidFill>
-                <a:latin typeface="Calibri"/>
-              </a:rPr>
-              <a:t>They are produced, implemented and evaluated, then updated under version control.</a:t>
-            </a:r>
-          </a:p>
-        </p:txBody>
-      </p:sp>
-      <p:sp>
-        <p:nvSpPr>
-          <p:cNvPr id="7" name="Rounded Rectangle 6"/>
+          <p:cNvPr id="6" name="Oval 5"/>
           <p:cNvSpPr/>
           <p:nvPr/>
         </p:nvSpPr>
         <p:spPr>
           <a:xfrm>
-            <a:off x="7772400" y="1600200"/>
-            <a:ext cx="3867912" cy="4434840"/>
-          </a:xfrm>
-          <a:prstGeom prst="roundRect">
-            <a:avLst>
-              <a:gd name="adj" fmla="val 8000"/>
-            </a:avLst>
-          </a:prstGeom>
-          <a:solidFill>
-            <a:srgbClr val="03306E"/>
-          </a:solidFill>
-          <a:ln>
-            <a:noFill/>
-          </a:ln>
-          <a:effectLst/>
-        </p:spPr>
-        <p:style>
-          <a:lnRef idx="1">
-            <a:schemeClr val="accent1"/>
-          </a:lnRef>
-          <a:fillRef idx="3">
-            <a:schemeClr val="accent1"/>
-          </a:fillRef>
-          <a:effectRef idx="2">
-            <a:schemeClr val="accent1"/>
-          </a:effectRef>
-          <a:fontRef idx="minor">
-            <a:schemeClr val="lt1"/>
-          </a:fontRef>
-        </p:style>
-        <p:txBody>
-          <a:bodyPr rtlCol="0" anchor="ctr"/>
-          <a:lstStyle/>
-          <a:p/>
-        </p:txBody>
-      </p:sp>
-      <p:sp>
-        <p:nvSpPr>
-          <p:cNvPr id="8" name="Oval 7"/>
-          <p:cNvSpPr/>
-          <p:nvPr/>
-        </p:nvSpPr>
-        <p:spPr>
-          <a:xfrm>
-            <a:off x="8046720" y="1874519"/>
-            <a:ext cx="548640" cy="548640"/>
+            <a:off x="548640" y="1691640"/>
+            <a:ext cx="502920" cy="502920"/>
           </a:xfrm>
           <a:prstGeom prst="ellipse">
             <a:avLst/>
@@ -7751,13 +10209,99 @@
           <a:p>
             <a:pPr algn="ctr"/>
             <a:r>
-              <a:rPr sz="2000" b="1">
+              <a:rPr sz="1600" b="1">
                 <a:solidFill>
                   <a:srgbClr val="202122"/>
                 </a:solidFill>
                 <a:latin typeface="Calibri"/>
               </a:rPr>
-              <a:t>!</a:t>
+              <a:t>1</a:t>
+            </a:r>
+          </a:p>
+        </p:txBody>
+      </p:sp>
+      <p:sp>
+        <p:nvSpPr>
+          <p:cNvPr id="7" name="TextBox 6"/>
+          <p:cNvSpPr txBox="1"/>
+          <p:nvPr/>
+        </p:nvSpPr>
+        <p:spPr>
+          <a:xfrm>
+            <a:off x="1371600" y="1645920"/>
+            <a:ext cx="10271455" cy="1188720"/>
+          </a:xfrm>
+          <a:prstGeom prst="rect">
+            <a:avLst/>
+          </a:prstGeom>
+          <a:noFill/>
+        </p:spPr>
+        <p:txBody>
+          <a:bodyPr wrap="square" anchor="t" lIns="0" rIns="0" tIns="0" bIns="0"/>
+          <a:lstStyle/>
+          <a:p>
+            <a:pPr algn="l"/>
+            <a:r>
+              <a:rPr sz="2400" b="0" i="0">
+                <a:solidFill>
+                  <a:srgbClr val="202122"/>
+                </a:solidFill>
+                <a:latin typeface="Calibri"/>
+              </a:rPr>
+              <a:t>Is inspection QA or QC?</a:t>
+            </a:r>
+          </a:p>
+        </p:txBody>
+      </p:sp>
+      <p:sp>
+        <p:nvSpPr>
+          <p:cNvPr id="8" name="Oval 7"/>
+          <p:cNvSpPr/>
+          <p:nvPr/>
+        </p:nvSpPr>
+        <p:spPr>
+          <a:xfrm>
+            <a:off x="548640" y="3108960"/>
+            <a:ext cx="502920" cy="502920"/>
+          </a:xfrm>
+          <a:prstGeom prst="ellipse">
+            <a:avLst/>
+          </a:prstGeom>
+          <a:solidFill>
+            <a:srgbClr val="F2B705"/>
+          </a:solidFill>
+          <a:ln>
+            <a:noFill/>
+          </a:ln>
+          <a:effectLst/>
+        </p:spPr>
+        <p:style>
+          <a:lnRef idx="1">
+            <a:schemeClr val="accent1"/>
+          </a:lnRef>
+          <a:fillRef idx="3">
+            <a:schemeClr val="accent1"/>
+          </a:fillRef>
+          <a:effectRef idx="2">
+            <a:schemeClr val="accent1"/>
+          </a:effectRef>
+          <a:fontRef idx="minor">
+            <a:schemeClr val="lt1"/>
+          </a:fontRef>
+        </p:style>
+        <p:txBody>
+          <a:bodyPr rtlCol="0" anchor="ctr" lIns="0" rIns="0" tIns="0" bIns="0"/>
+          <a:lstStyle/>
+          <a:p>
+            <a:pPr algn="ctr"/>
+            <a:r>
+              <a:rPr sz="1600" b="1">
+                <a:solidFill>
+                  <a:srgbClr val="202122"/>
+                </a:solidFill>
+                <a:latin typeface="Calibri"/>
+              </a:rPr>
+              <a:t>2</a:t>
             </a:r>
           </a:p>
         </p:txBody>
@@ -7770,8 +10314,8 @@
         </p:nvSpPr>
         <p:spPr>
           <a:xfrm>
-            <a:off x="8046720" y="2606040"/>
-            <a:ext cx="3291840" cy="365760"/>
+            <a:off x="1371600" y="3063240"/>
+            <a:ext cx="10271455" cy="1188720"/>
           </a:xfrm>
           <a:prstGeom prst="rect">
             <a:avLst/>
@@ -7784,27 +10328,80 @@
           <a:p>
             <a:pPr algn="l"/>
             <a:r>
-              <a:rPr sz="1300" b="1" i="0">
-                <a:solidFill>
-                  <a:srgbClr val="A9C8F0"/>
-                </a:solidFill>
-                <a:latin typeface="Calibri"/>
-              </a:rPr>
-              <a:t>KEY IDEA</a:t>
-            </a:r>
-          </a:p>
-        </p:txBody>
-      </p:sp>
-      <p:sp>
-        <p:nvSpPr>
-          <p:cNvPr id="10" name="TextBox 9"/>
-          <p:cNvSpPr txBox="1"/>
-          <p:nvPr/>
-        </p:nvSpPr>
-        <p:spPr>
-          <a:xfrm>
-            <a:off x="8046720" y="3017520"/>
-            <a:ext cx="3291840" cy="2926080"/>
+              <a:rPr sz="2400" b="0" i="0">
+                <a:solidFill>
+                  <a:srgbClr val="202122"/>
+                </a:solidFill>
+                <a:latin typeface="Calibri"/>
+              </a:rPr>
+              <a:t>What does SPC do?</a:t>
+            </a:r>
+          </a:p>
+        </p:txBody>
+      </p:sp>
+      <p:sp>
+        <p:nvSpPr>
+          <p:cNvPr id="10" name="Oval 9"/>
+          <p:cNvSpPr/>
+          <p:nvPr/>
+        </p:nvSpPr>
+        <p:spPr>
+          <a:xfrm>
+            <a:off x="548640" y="4526280"/>
+            <a:ext cx="502920" cy="502920"/>
+          </a:xfrm>
+          <a:prstGeom prst="ellipse">
+            <a:avLst/>
+          </a:prstGeom>
+          <a:solidFill>
+            <a:srgbClr val="F2B705"/>
+          </a:solidFill>
+          <a:ln>
+            <a:noFill/>
+          </a:ln>
+          <a:effectLst/>
+        </p:spPr>
+        <p:style>
+          <a:lnRef idx="1">
+            <a:schemeClr val="accent1"/>
+          </a:lnRef>
+          <a:fillRef idx="3">
+            <a:schemeClr val="accent1"/>
+          </a:fillRef>
+          <a:effectRef idx="2">
+            <a:schemeClr val="accent1"/>
+          </a:effectRef>
+          <a:fontRef idx="minor">
+            <a:schemeClr val="lt1"/>
+          </a:fontRef>
+        </p:style>
+        <p:txBody>
+          <a:bodyPr rtlCol="0" anchor="ctr" lIns="0" rIns="0" tIns="0" bIns="0"/>
+          <a:lstStyle/>
+          <a:p>
+            <a:pPr algn="ctr"/>
+            <a:r>
+              <a:rPr sz="1600" b="1">
+                <a:solidFill>
+                  <a:srgbClr val="202122"/>
+                </a:solidFill>
+                <a:latin typeface="Calibri"/>
+              </a:rPr>
+              <a:t>3</a:t>
+            </a:r>
+          </a:p>
+        </p:txBody>
+      </p:sp>
+      <p:sp>
+        <p:nvSpPr>
+          <p:cNvPr id="11" name="TextBox 10"/>
+          <p:cNvSpPr txBox="1"/>
+          <p:nvPr/>
+        </p:nvSpPr>
+        <p:spPr>
+          <a:xfrm>
+            <a:off x="1371600" y="4480560"/>
+            <a:ext cx="10271455" cy="1188720"/>
           </a:xfrm>
           <a:prstGeom prst="rect">
             <a:avLst/>
@@ -7817,13 +10414,46 @@
           <a:p>
             <a:pPr algn="l"/>
             <a:r>
-              <a:rPr sz="2200" b="0" i="0">
-                <a:solidFill>
-                  <a:srgbClr val="FFFFFF"/>
-                </a:solidFill>
-                <a:latin typeface="Cambria"/>
-              </a:rPr>
-              <a:t>An SOP means the job is done the same safe way whoever does it.</a:t>
+              <a:rPr sz="2400" b="0" i="0">
+                <a:solidFill>
+                  <a:srgbClr val="202122"/>
+                </a:solidFill>
+                <a:latin typeface="Calibri"/>
+              </a:rPr>
+              <a:t>What is 'right first time'?</a:t>
+            </a:r>
+          </a:p>
+        </p:txBody>
+      </p:sp>
+      <p:sp>
+        <p:nvSpPr>
+          <p:cNvPr id="12" name="TextBox 11"/>
+          <p:cNvSpPr txBox="1"/>
+          <p:nvPr/>
+        </p:nvSpPr>
+        <p:spPr>
+          <a:xfrm>
+            <a:off x="548640" y="5852160"/>
+            <a:ext cx="11094415" cy="365760"/>
+          </a:xfrm>
+          <a:prstGeom prst="rect">
+            <a:avLst/>
+          </a:prstGeom>
+          <a:noFill/>
+        </p:spPr>
+        <p:txBody>
+          <a:bodyPr wrap="square" anchor="t" lIns="0" rIns="0" tIns="0" bIns="0"/>
+          <a:lstStyle/>
+          <a:p>
+            <a:pPr algn="l"/>
+            <a:r>
+              <a:rPr sz="1300" b="0" i="1">
+                <a:solidFill>
+                  <a:srgbClr val="54595D"/>
+                </a:solidFill>
+                <a:latin typeface="Calibri"/>
+              </a:rPr>
+              <a:t>Answer on mini whiteboards or in your book. Answers are in the speaker notes.</a:t>
             </a:r>
           </a:p>
         </p:txBody>
@@ -7915,7 +10545,7 @@
                 </a:solidFill>
                 <a:latin typeface="Cambria"/>
               </a:rPr>
-              <a:t>Check your understanding</a:t>
+              <a:t>Improving quality</a:t>
             </a:r>
           </a:p>
         </p:txBody>
@@ -7988,14 +10618,113 @@
       </p:sp>
       <p:sp>
         <p:nvSpPr>
-          <p:cNvPr id="6" name="Oval 5"/>
+          <p:cNvPr id="6" name="TextBox 5"/>
+          <p:cNvSpPr txBox="1"/>
+          <p:nvPr/>
+        </p:nvSpPr>
+        <p:spPr>
+          <a:xfrm>
+            <a:off x="548640" y="1554480"/>
+            <a:ext cx="6720840" cy="4617720"/>
+          </a:xfrm>
+          <a:prstGeom prst="rect">
+            <a:avLst/>
+          </a:prstGeom>
+          <a:noFill/>
+        </p:spPr>
+        <p:txBody>
+          <a:bodyPr wrap="square" lIns="0" rIns="0" tIns="0" bIns="0">
+            <a:spAutoFit/>
+          </a:bodyPr>
+          <a:lstStyle/>
+          <a:p>
+            <a:pPr>
+              <a:spcAft>
+                <a:spcPts val="1320"/>
+              </a:spcAft>
+            </a:pPr>
+            <a:r>
+              <a:rPr sz="2200" b="0">
+                <a:solidFill>
+                  <a:srgbClr val="202122"/>
+                </a:solidFill>
+                <a:latin typeface="Calibri"/>
+              </a:rPr>
+              <a:t>Six sigma uses data to reduce variation, aiming for almost no defects in high-volume production. Total quality management (TQM) makes everyone responsible for quality.</a:t>
+            </a:r>
+          </a:p>
+          <a:p>
+            <a:pPr>
+              <a:spcAft>
+                <a:spcPts val="1320"/>
+              </a:spcAft>
+            </a:pPr>
+            <a:r>
+              <a:rPr sz="2200" b="0">
+                <a:solidFill>
+                  <a:srgbClr val="202122"/>
+                </a:solidFill>
+                <a:latin typeface="Calibri"/>
+              </a:rPr>
+              <a:t>FMEA (Failure Mode and Effects Analysis) lists how things could fail and how serious each would be, so the worst are designed out. Pareto analysis shows that most problems usually come from a few causes. Cause and effect (fishbone) diagrams trace problems to root causes. Quality circles are small teams of workers who meet to solve quality problems.</a:t>
+            </a:r>
+          </a:p>
+        </p:txBody>
+      </p:sp>
+      <p:sp>
+        <p:nvSpPr>
+          <p:cNvPr id="7" name="Rounded Rectangle 6"/>
           <p:cNvSpPr/>
           <p:nvPr/>
         </p:nvSpPr>
         <p:spPr>
           <a:xfrm>
-            <a:off x="548640" y="1618488"/>
-            <a:ext cx="411480" cy="411480"/>
+            <a:off x="7772400" y="1554480"/>
+            <a:ext cx="3867912" cy="4526280"/>
+          </a:xfrm>
+          <a:prstGeom prst="roundRect">
+            <a:avLst>
+              <a:gd name="adj" fmla="val 8000"/>
+            </a:avLst>
+          </a:prstGeom>
+          <a:solidFill>
+            <a:srgbClr val="03306E"/>
+          </a:solidFill>
+          <a:ln>
+            <a:noFill/>
+          </a:ln>
+          <a:effectLst/>
+        </p:spPr>
+        <p:style>
+          <a:lnRef idx="1">
+            <a:schemeClr val="accent1"/>
+          </a:lnRef>
+          <a:fillRef idx="3">
+            <a:schemeClr val="accent1"/>
+          </a:fillRef>
+          <a:effectRef idx="2">
+            <a:schemeClr val="accent1"/>
+          </a:effectRef>
+          <a:fontRef idx="minor">
+            <a:schemeClr val="lt1"/>
+          </a:fontRef>
+        </p:style>
+        <p:txBody>
+          <a:bodyPr rtlCol="0" anchor="ctr"/>
+          <a:lstStyle/>
+          <a:p/>
+        </p:txBody>
+      </p:sp>
+      <p:sp>
+        <p:nvSpPr>
+          <p:cNvPr id="8" name="Oval 7"/>
+          <p:cNvSpPr/>
+          <p:nvPr/>
+        </p:nvSpPr>
+        <p:spPr>
+          <a:xfrm>
+            <a:off x="8046720" y="1828800"/>
+            <a:ext cx="548640" cy="548640"/>
           </a:xfrm>
           <a:prstGeom prst="ellipse">
             <a:avLst/>
@@ -8028,27 +10757,27 @@
           <a:p>
             <a:pPr algn="ctr"/>
             <a:r>
-              <a:rPr sz="1400" b="1">
+              <a:rPr sz="1300" b="1">
                 <a:solidFill>
                   <a:srgbClr val="202122"/>
                 </a:solidFill>
                 <a:latin typeface="Calibri"/>
               </a:rPr>
-              <a:t>1</a:t>
-            </a:r>
-          </a:p>
-        </p:txBody>
-      </p:sp>
-      <p:sp>
-        <p:nvSpPr>
-          <p:cNvPr id="7" name="TextBox 6"/>
-          <p:cNvSpPr txBox="1"/>
-          <p:nvPr/>
-        </p:nvSpPr>
-        <p:spPr>
-          <a:xfrm>
-            <a:off x="1234440" y="1600200"/>
-            <a:ext cx="10408615" cy="1030986"/>
+              <a:t>e.g.</a:t>
+            </a:r>
+          </a:p>
+        </p:txBody>
+      </p:sp>
+      <p:sp>
+        <p:nvSpPr>
+          <p:cNvPr id="9" name="TextBox 8"/>
+          <p:cNvSpPr txBox="1"/>
+          <p:nvPr/>
+        </p:nvSpPr>
+        <p:spPr>
+          <a:xfrm>
+            <a:off x="8046720" y="2560320"/>
+            <a:ext cx="3291840" cy="365760"/>
           </a:xfrm>
           <a:prstGeom prst="rect">
             <a:avLst/>
@@ -8061,80 +10790,27 @@
           <a:p>
             <a:pPr algn="l"/>
             <a:r>
-              <a:rPr sz="2200" b="0" i="0">
-                <a:solidFill>
-                  <a:srgbClr val="202122"/>
-                </a:solidFill>
-                <a:latin typeface="Calibri"/>
-              </a:rPr>
-              <a:t>Is inspection quality assurance or quality control?</a:t>
-            </a:r>
-          </a:p>
-        </p:txBody>
-      </p:sp>
-      <p:sp>
-        <p:nvSpPr>
-          <p:cNvPr id="8" name="Oval 7"/>
-          <p:cNvSpPr/>
-          <p:nvPr/>
-        </p:nvSpPr>
-        <p:spPr>
-          <a:xfrm>
-            <a:off x="548640" y="2814066"/>
-            <a:ext cx="411480" cy="411480"/>
-          </a:xfrm>
-          <a:prstGeom prst="ellipse">
-            <a:avLst/>
-          </a:prstGeom>
-          <a:solidFill>
-            <a:srgbClr val="F2B705"/>
-          </a:solidFill>
-          <a:ln>
-            <a:noFill/>
-          </a:ln>
-          <a:effectLst/>
-        </p:spPr>
-        <p:style>
-          <a:lnRef idx="1">
-            <a:schemeClr val="accent1"/>
-          </a:lnRef>
-          <a:fillRef idx="3">
-            <a:schemeClr val="accent1"/>
-          </a:fillRef>
-          <a:effectRef idx="2">
-            <a:schemeClr val="accent1"/>
-          </a:effectRef>
-          <a:fontRef idx="minor">
-            <a:schemeClr val="lt1"/>
-          </a:fontRef>
-        </p:style>
-        <p:txBody>
-          <a:bodyPr rtlCol="0" anchor="ctr" lIns="0" rIns="0" tIns="0" bIns="0"/>
-          <a:lstStyle/>
-          <a:p>
-            <a:pPr algn="ctr"/>
-            <a:r>
-              <a:rPr sz="1400" b="1">
-                <a:solidFill>
-                  <a:srgbClr val="202122"/>
-                </a:solidFill>
-                <a:latin typeface="Calibri"/>
-              </a:rPr>
-              <a:t>2</a:t>
-            </a:r>
-          </a:p>
-        </p:txBody>
-      </p:sp>
-      <p:sp>
-        <p:nvSpPr>
-          <p:cNvPr id="9" name="TextBox 8"/>
-          <p:cNvSpPr txBox="1"/>
-          <p:nvPr/>
-        </p:nvSpPr>
-        <p:spPr>
-          <a:xfrm>
-            <a:off x="1234440" y="2795778"/>
-            <a:ext cx="10408615" cy="1030986"/>
+              <a:rPr sz="1300" b="1" i="0">
+                <a:solidFill>
+                  <a:srgbClr val="A9C8F0"/>
+                </a:solidFill>
+                <a:latin typeface="Calibri"/>
+              </a:rPr>
+              <a:t>EXAMPLE</a:t>
+            </a:r>
+          </a:p>
+        </p:txBody>
+      </p:sp>
+      <p:sp>
+        <p:nvSpPr>
+          <p:cNvPr id="10" name="TextBox 9"/>
+          <p:cNvSpPr txBox="1"/>
+          <p:nvPr/>
+        </p:nvSpPr>
+        <p:spPr>
+          <a:xfrm>
+            <a:off x="8046720" y="2971800"/>
+            <a:ext cx="3291840" cy="2971800"/>
           </a:xfrm>
           <a:prstGeom prst="rect">
             <a:avLst/>
@@ -8147,185 +10823,13 @@
           <a:p>
             <a:pPr algn="l"/>
             <a:r>
-              <a:rPr sz="2200" b="0" i="0">
-                <a:solidFill>
-                  <a:srgbClr val="202122"/>
-                </a:solidFill>
-                <a:latin typeface="Calibri"/>
-              </a:rPr>
-              <a:t>When is SPC better than 100% inspection?</a:t>
-            </a:r>
-          </a:p>
-        </p:txBody>
-      </p:sp>
-      <p:sp>
-        <p:nvSpPr>
-          <p:cNvPr id="10" name="Oval 9"/>
-          <p:cNvSpPr/>
-          <p:nvPr/>
-        </p:nvSpPr>
-        <p:spPr>
-          <a:xfrm>
-            <a:off x="548640" y="4009644"/>
-            <a:ext cx="411480" cy="411480"/>
-          </a:xfrm>
-          <a:prstGeom prst="ellipse">
-            <a:avLst/>
-          </a:prstGeom>
-          <a:solidFill>
-            <a:srgbClr val="F2B705"/>
-          </a:solidFill>
-          <a:ln>
-            <a:noFill/>
-          </a:ln>
-          <a:effectLst/>
-        </p:spPr>
-        <p:style>
-          <a:lnRef idx="1">
-            <a:schemeClr val="accent1"/>
-          </a:lnRef>
-          <a:fillRef idx="3">
-            <a:schemeClr val="accent1"/>
-          </a:fillRef>
-          <a:effectRef idx="2">
-            <a:schemeClr val="accent1"/>
-          </a:effectRef>
-          <a:fontRef idx="minor">
-            <a:schemeClr val="lt1"/>
-          </a:fontRef>
-        </p:style>
-        <p:txBody>
-          <a:bodyPr rtlCol="0" anchor="ctr" lIns="0" rIns="0" tIns="0" bIns="0"/>
-          <a:lstStyle/>
-          <a:p>
-            <a:pPr algn="ctr"/>
-            <a:r>
-              <a:rPr sz="1400" b="1">
-                <a:solidFill>
-                  <a:srgbClr val="202122"/>
-                </a:solidFill>
-                <a:latin typeface="Calibri"/>
-              </a:rPr>
-              <a:t>3</a:t>
-            </a:r>
-          </a:p>
-        </p:txBody>
-      </p:sp>
-      <p:sp>
-        <p:nvSpPr>
-          <p:cNvPr id="11" name="TextBox 10"/>
-          <p:cNvSpPr txBox="1"/>
-          <p:nvPr/>
-        </p:nvSpPr>
-        <p:spPr>
-          <a:xfrm>
-            <a:off x="1234440" y="3991356"/>
-            <a:ext cx="10408615" cy="1030986"/>
-          </a:xfrm>
-          <a:prstGeom prst="rect">
-            <a:avLst/>
-          </a:prstGeom>
-          <a:noFill/>
-        </p:spPr>
-        <p:txBody>
-          <a:bodyPr wrap="square" anchor="t" lIns="0" rIns="0" tIns="0" bIns="0"/>
-          <a:lstStyle/>
-          <a:p>
-            <a:pPr algn="l"/>
-            <a:r>
-              <a:rPr sz="2200" b="0" i="0">
-                <a:solidFill>
-                  <a:srgbClr val="202122"/>
-                </a:solidFill>
-                <a:latin typeface="Calibri"/>
-              </a:rPr>
-              <a:t>What does a Pareto chart show?</a:t>
-            </a:r>
-          </a:p>
-        </p:txBody>
-      </p:sp>
-      <p:sp>
-        <p:nvSpPr>
-          <p:cNvPr id="12" name="Oval 11"/>
-          <p:cNvSpPr/>
-          <p:nvPr/>
-        </p:nvSpPr>
-        <p:spPr>
-          <a:xfrm>
-            <a:off x="548640" y="5205221"/>
-            <a:ext cx="411480" cy="411480"/>
-          </a:xfrm>
-          <a:prstGeom prst="ellipse">
-            <a:avLst/>
-          </a:prstGeom>
-          <a:solidFill>
-            <a:srgbClr val="F2B705"/>
-          </a:solidFill>
-          <a:ln>
-            <a:noFill/>
-          </a:ln>
-          <a:effectLst/>
-        </p:spPr>
-        <p:style>
-          <a:lnRef idx="1">
-            <a:schemeClr val="accent1"/>
-          </a:lnRef>
-          <a:fillRef idx="3">
-            <a:schemeClr val="accent1"/>
-          </a:fillRef>
-          <a:effectRef idx="2">
-            <a:schemeClr val="accent1"/>
-          </a:effectRef>
-          <a:fontRef idx="minor">
-            <a:schemeClr val="lt1"/>
-          </a:fontRef>
-        </p:style>
-        <p:txBody>
-          <a:bodyPr rtlCol="0" anchor="ctr" lIns="0" rIns="0" tIns="0" bIns="0"/>
-          <a:lstStyle/>
-          <a:p>
-            <a:pPr algn="ctr"/>
-            <a:r>
-              <a:rPr sz="1400" b="1">
-                <a:solidFill>
-                  <a:srgbClr val="202122"/>
-                </a:solidFill>
-                <a:latin typeface="Calibri"/>
-              </a:rPr>
-              <a:t>4</a:t>
-            </a:r>
-          </a:p>
-        </p:txBody>
-      </p:sp>
-      <p:sp>
-        <p:nvSpPr>
-          <p:cNvPr id="13" name="TextBox 12"/>
-          <p:cNvSpPr txBox="1"/>
-          <p:nvPr/>
-        </p:nvSpPr>
-        <p:spPr>
-          <a:xfrm>
-            <a:off x="1234440" y="5186933"/>
-            <a:ext cx="10408615" cy="1030986"/>
-          </a:xfrm>
-          <a:prstGeom prst="rect">
-            <a:avLst/>
-          </a:prstGeom>
-          <a:noFill/>
-        </p:spPr>
-        <p:txBody>
-          <a:bodyPr wrap="square" anchor="t" lIns="0" rIns="0" tIns="0" bIns="0"/>
-          <a:lstStyle/>
-          <a:p>
-            <a:pPr algn="l"/>
-            <a:r>
-              <a:rPr sz="2200" b="0" i="0">
-                <a:solidFill>
-                  <a:srgbClr val="202122"/>
-                </a:solidFill>
-                <a:latin typeface="Calibri"/>
-              </a:rPr>
-              <a:t>Give two purposes of an SOP.</a:t>
+              <a:rPr sz="1900" b="0" i="0">
+                <a:solidFill>
+                  <a:srgbClr val="FFFFFF"/>
+                </a:solidFill>
+                <a:latin typeface="Cambria"/>
+              </a:rPr>
+              <a:t>A Pareto chart shows 80% of rejects come from two causes: loose fixings and scratches. Fixing those two solves most of the problem.</a:t>
             </a:r>
           </a:p>
         </p:txBody>
@@ -8417,7 +10921,7 @@
                 </a:solidFill>
                 <a:latin typeface="Cambria"/>
               </a:rPr>
-              <a:t>Answers</a:t>
+              <a:t>Improving quality</a:t>
             </a:r>
           </a:p>
         </p:txBody>
@@ -8490,14 +10994,58 @@
       </p:sp>
       <p:sp>
         <p:nvSpPr>
-          <p:cNvPr id="6" name="Oval 5"/>
+          <p:cNvPr id="6" name="Rounded Rectangle 5"/>
           <p:cNvSpPr/>
           <p:nvPr/>
         </p:nvSpPr>
         <p:spPr>
           <a:xfrm>
-            <a:off x="548640" y="1618488"/>
-            <a:ext cx="411480" cy="411480"/>
+            <a:off x="548640" y="1600200"/>
+            <a:ext cx="3515258" cy="2148840"/>
+          </a:xfrm>
+          <a:prstGeom prst="roundRect">
+            <a:avLst>
+              <a:gd name="adj" fmla="val 6000"/>
+            </a:avLst>
+          </a:prstGeom>
+          <a:solidFill>
+            <a:srgbClr val="EAF3FF"/>
+          </a:solidFill>
+          <a:ln>
+            <a:noFill/>
+          </a:ln>
+          <a:effectLst/>
+        </p:spPr>
+        <p:style>
+          <a:lnRef idx="1">
+            <a:schemeClr val="accent1"/>
+          </a:lnRef>
+          <a:fillRef idx="3">
+            <a:schemeClr val="accent1"/>
+          </a:fillRef>
+          <a:effectRef idx="2">
+            <a:schemeClr val="accent1"/>
+          </a:effectRef>
+          <a:fontRef idx="minor">
+            <a:schemeClr val="lt1"/>
+          </a:fontRef>
+        </p:style>
+        <p:txBody>
+          <a:bodyPr rtlCol="0" anchor="ctr"/>
+          <a:lstStyle/>
+          <a:p/>
+        </p:txBody>
+      </p:sp>
+      <p:sp>
+        <p:nvSpPr>
+          <p:cNvPr id="7" name="Oval 6"/>
+          <p:cNvSpPr/>
+          <p:nvPr/>
+        </p:nvSpPr>
+        <p:spPr>
+          <a:xfrm>
+            <a:off x="777240" y="1828800"/>
+            <a:ext cx="457200" cy="457200"/>
           </a:xfrm>
           <a:prstGeom prst="ellipse">
             <a:avLst/>
@@ -8530,7 +11078,7 @@
           <a:p>
             <a:pPr algn="ctr"/>
             <a:r>
-              <a:rPr sz="1400" b="1">
+              <a:rPr sz="1500" b="1">
                 <a:solidFill>
                   <a:srgbClr val="202122"/>
                 </a:solidFill>
@@ -8543,14 +11091,47 @@
       </p:sp>
       <p:sp>
         <p:nvSpPr>
-          <p:cNvPr id="7" name="TextBox 6"/>
-          <p:cNvSpPr txBox="1"/>
-          <p:nvPr/>
-        </p:nvSpPr>
-        <p:spPr>
-          <a:xfrm>
-            <a:off x="1234440" y="1600200"/>
-            <a:ext cx="10408615" cy="1030986"/>
+          <p:cNvPr id="8" name="TextBox 7"/>
+          <p:cNvSpPr txBox="1"/>
+          <p:nvPr/>
+        </p:nvSpPr>
+        <p:spPr>
+          <a:xfrm>
+            <a:off x="1371600" y="1801368"/>
+            <a:ext cx="2509418" cy="512064"/>
+          </a:xfrm>
+          <a:prstGeom prst="rect">
+            <a:avLst/>
+          </a:prstGeom>
+          <a:noFill/>
+        </p:spPr>
+        <p:txBody>
+          <a:bodyPr wrap="square" anchor="ctr" lIns="0" rIns="0" tIns="0" bIns="0"/>
+          <a:lstStyle/>
+          <a:p>
+            <a:pPr algn="l"/>
+            <a:r>
+              <a:rPr sz="1900" b="1" i="0">
+                <a:solidFill>
+                  <a:srgbClr val="03306E"/>
+                </a:solidFill>
+                <a:latin typeface="Calibri"/>
+              </a:rPr>
+              <a:t>Six sigma</a:t>
+            </a:r>
+          </a:p>
+        </p:txBody>
+      </p:sp>
+      <p:sp>
+        <p:nvSpPr>
+          <p:cNvPr id="9" name="TextBox 8"/>
+          <p:cNvSpPr txBox="1"/>
+          <p:nvPr/>
+        </p:nvSpPr>
+        <p:spPr>
+          <a:xfrm>
+            <a:off x="777240" y="2468880"/>
+            <a:ext cx="3058058" cy="1143000"/>
           </a:xfrm>
           <a:prstGeom prst="rect">
             <a:avLst/>
@@ -8563,38 +11144,71 @@
           <a:p>
             <a:pPr algn="l"/>
             <a:r>
-              <a:rPr sz="1800" b="0" i="0">
-                <a:solidFill>
-                  <a:srgbClr val="54595D"/>
-                </a:solidFill>
-                <a:latin typeface="Calibri"/>
-              </a:rPr>
-              <a:t>Is inspection quality assurance or quality control?</a:t>
-            </a:r>
-          </a:p>
-          <a:p>
-            <a:r>
-              <a:rPr sz="1800" b="1">
-                <a:solidFill>
-                  <a:srgbClr val="03306E"/>
-                </a:solidFill>
-                <a:latin typeface="Calibri"/>
-              </a:rPr>
-              <a:t>Quality control.</a:t>
-            </a:r>
-          </a:p>
-        </p:txBody>
-      </p:sp>
-      <p:sp>
-        <p:nvSpPr>
-          <p:cNvPr id="8" name="Oval 7"/>
+              <a:rPr sz="2000" b="0" i="0">
+                <a:solidFill>
+                  <a:srgbClr val="202122"/>
+                </a:solidFill>
+                <a:latin typeface="Calibri"/>
+              </a:rPr>
+              <a:t>Data-driven reduction of variation, for high-volume manufacture.</a:t>
+            </a:r>
+          </a:p>
+        </p:txBody>
+      </p:sp>
+      <p:sp>
+        <p:nvSpPr>
+          <p:cNvPr id="10" name="Rounded Rectangle 9"/>
           <p:cNvSpPr/>
           <p:nvPr/>
         </p:nvSpPr>
         <p:spPr>
           <a:xfrm>
-            <a:off x="548640" y="2814066"/>
-            <a:ext cx="411480" cy="411480"/>
+            <a:off x="4338218" y="1600200"/>
+            <a:ext cx="3515258" cy="2148840"/>
+          </a:xfrm>
+          <a:prstGeom prst="roundRect">
+            <a:avLst>
+              <a:gd name="adj" fmla="val 6000"/>
+            </a:avLst>
+          </a:prstGeom>
+          <a:solidFill>
+            <a:srgbClr val="EAF3FF"/>
+          </a:solidFill>
+          <a:ln>
+            <a:noFill/>
+          </a:ln>
+          <a:effectLst/>
+        </p:spPr>
+        <p:style>
+          <a:lnRef idx="1">
+            <a:schemeClr val="accent1"/>
+          </a:lnRef>
+          <a:fillRef idx="3">
+            <a:schemeClr val="accent1"/>
+          </a:fillRef>
+          <a:effectRef idx="2">
+            <a:schemeClr val="accent1"/>
+          </a:effectRef>
+          <a:fontRef idx="minor">
+            <a:schemeClr val="lt1"/>
+          </a:fontRef>
+        </p:style>
+        <p:txBody>
+          <a:bodyPr rtlCol="0" anchor="ctr"/>
+          <a:lstStyle/>
+          <a:p/>
+        </p:txBody>
+      </p:sp>
+      <p:sp>
+        <p:nvSpPr>
+          <p:cNvPr id="11" name="Oval 10"/>
+          <p:cNvSpPr/>
+          <p:nvPr/>
+        </p:nvSpPr>
+        <p:spPr>
+          <a:xfrm>
+            <a:off x="4566818" y="1828800"/>
+            <a:ext cx="457200" cy="457200"/>
           </a:xfrm>
           <a:prstGeom prst="ellipse">
             <a:avLst/>
@@ -8627,7 +11241,7 @@
           <a:p>
             <a:pPr algn="ctr"/>
             <a:r>
-              <a:rPr sz="1400" b="1">
+              <a:rPr sz="1500" b="1">
                 <a:solidFill>
                   <a:srgbClr val="202122"/>
                 </a:solidFill>
@@ -8640,14 +11254,47 @@
       </p:sp>
       <p:sp>
         <p:nvSpPr>
-          <p:cNvPr id="9" name="TextBox 8"/>
-          <p:cNvSpPr txBox="1"/>
-          <p:nvPr/>
-        </p:nvSpPr>
-        <p:spPr>
-          <a:xfrm>
-            <a:off x="1234440" y="2795778"/>
-            <a:ext cx="10408615" cy="1030986"/>
+          <p:cNvPr id="12" name="TextBox 11"/>
+          <p:cNvSpPr txBox="1"/>
+          <p:nvPr/>
+        </p:nvSpPr>
+        <p:spPr>
+          <a:xfrm>
+            <a:off x="5161178" y="1801368"/>
+            <a:ext cx="2509418" cy="512064"/>
+          </a:xfrm>
+          <a:prstGeom prst="rect">
+            <a:avLst/>
+          </a:prstGeom>
+          <a:noFill/>
+        </p:spPr>
+        <p:txBody>
+          <a:bodyPr wrap="square" anchor="ctr" lIns="0" rIns="0" tIns="0" bIns="0"/>
+          <a:lstStyle/>
+          <a:p>
+            <a:pPr algn="l"/>
+            <a:r>
+              <a:rPr sz="1900" b="1" i="0">
+                <a:solidFill>
+                  <a:srgbClr val="03306E"/>
+                </a:solidFill>
+                <a:latin typeface="Calibri"/>
+              </a:rPr>
+              <a:t>TQM</a:t>
+            </a:r>
+          </a:p>
+        </p:txBody>
+      </p:sp>
+      <p:sp>
+        <p:nvSpPr>
+          <p:cNvPr id="13" name="TextBox 12"/>
+          <p:cNvSpPr txBox="1"/>
+          <p:nvPr/>
+        </p:nvSpPr>
+        <p:spPr>
+          <a:xfrm>
+            <a:off x="4566818" y="2468880"/>
+            <a:ext cx="3058058" cy="1143000"/>
           </a:xfrm>
           <a:prstGeom prst="rect">
             <a:avLst/>
@@ -8660,38 +11307,71 @@
           <a:p>
             <a:pPr algn="l"/>
             <a:r>
-              <a:rPr sz="1800" b="0" i="0">
-                <a:solidFill>
-                  <a:srgbClr val="54595D"/>
-                </a:solidFill>
-                <a:latin typeface="Calibri"/>
-              </a:rPr>
-              <a:t>When is SPC better than 100% inspection?</a:t>
-            </a:r>
-          </a:p>
-          <a:p>
-            <a:r>
-              <a:rPr sz="1800" b="1">
-                <a:solidFill>
-                  <a:srgbClr val="03306E"/>
-                </a:solidFill>
-                <a:latin typeface="Calibri"/>
-              </a:rPr>
-              <a:t>In high-volume production where checking every item is too slow or costly.</a:t>
-            </a:r>
-          </a:p>
-        </p:txBody>
-      </p:sp>
-      <p:sp>
-        <p:nvSpPr>
-          <p:cNvPr id="10" name="Oval 9"/>
+              <a:rPr sz="2000" b="0" i="0">
+                <a:solidFill>
+                  <a:srgbClr val="202122"/>
+                </a:solidFill>
+                <a:latin typeface="Calibri"/>
+              </a:rPr>
+              <a:t>Total quality management: everyone responsible for quality.</a:t>
+            </a:r>
+          </a:p>
+        </p:txBody>
+      </p:sp>
+      <p:sp>
+        <p:nvSpPr>
+          <p:cNvPr id="14" name="Rounded Rectangle 13"/>
           <p:cNvSpPr/>
           <p:nvPr/>
         </p:nvSpPr>
         <p:spPr>
           <a:xfrm>
-            <a:off x="548640" y="4009644"/>
-            <a:ext cx="411480" cy="411480"/>
+            <a:off x="8127796" y="1600200"/>
+            <a:ext cx="3515258" cy="2148840"/>
+          </a:xfrm>
+          <a:prstGeom prst="roundRect">
+            <a:avLst>
+              <a:gd name="adj" fmla="val 6000"/>
+            </a:avLst>
+          </a:prstGeom>
+          <a:solidFill>
+            <a:srgbClr val="EAF3FF"/>
+          </a:solidFill>
+          <a:ln>
+            <a:noFill/>
+          </a:ln>
+          <a:effectLst/>
+        </p:spPr>
+        <p:style>
+          <a:lnRef idx="1">
+            <a:schemeClr val="accent1"/>
+          </a:lnRef>
+          <a:fillRef idx="3">
+            <a:schemeClr val="accent1"/>
+          </a:fillRef>
+          <a:effectRef idx="2">
+            <a:schemeClr val="accent1"/>
+          </a:effectRef>
+          <a:fontRef idx="minor">
+            <a:schemeClr val="lt1"/>
+          </a:fontRef>
+        </p:style>
+        <p:txBody>
+          <a:bodyPr rtlCol="0" anchor="ctr"/>
+          <a:lstStyle/>
+          <a:p/>
+        </p:txBody>
+      </p:sp>
+      <p:sp>
+        <p:nvSpPr>
+          <p:cNvPr id="15" name="Oval 14"/>
+          <p:cNvSpPr/>
+          <p:nvPr/>
+        </p:nvSpPr>
+        <p:spPr>
+          <a:xfrm>
+            <a:off x="8356396" y="1828800"/>
+            <a:ext cx="457200" cy="457200"/>
           </a:xfrm>
           <a:prstGeom prst="ellipse">
             <a:avLst/>
@@ -8724,7 +11404,7 @@
           <a:p>
             <a:pPr algn="ctr"/>
             <a:r>
-              <a:rPr sz="1400" b="1">
+              <a:rPr sz="1500" b="1">
                 <a:solidFill>
                   <a:srgbClr val="202122"/>
                 </a:solidFill>
@@ -8737,14 +11417,47 @@
       </p:sp>
       <p:sp>
         <p:nvSpPr>
-          <p:cNvPr id="11" name="TextBox 10"/>
-          <p:cNvSpPr txBox="1"/>
-          <p:nvPr/>
-        </p:nvSpPr>
-        <p:spPr>
-          <a:xfrm>
-            <a:off x="1234440" y="3991356"/>
-            <a:ext cx="10408615" cy="1030986"/>
+          <p:cNvPr id="16" name="TextBox 15"/>
+          <p:cNvSpPr txBox="1"/>
+          <p:nvPr/>
+        </p:nvSpPr>
+        <p:spPr>
+          <a:xfrm>
+            <a:off x="8950756" y="1801368"/>
+            <a:ext cx="2509418" cy="512064"/>
+          </a:xfrm>
+          <a:prstGeom prst="rect">
+            <a:avLst/>
+          </a:prstGeom>
+          <a:noFill/>
+        </p:spPr>
+        <p:txBody>
+          <a:bodyPr wrap="square" anchor="ctr" lIns="0" rIns="0" tIns="0" bIns="0"/>
+          <a:lstStyle/>
+          <a:p>
+            <a:pPr algn="l"/>
+            <a:r>
+              <a:rPr sz="1900" b="1" i="0">
+                <a:solidFill>
+                  <a:srgbClr val="03306E"/>
+                </a:solidFill>
+                <a:latin typeface="Calibri"/>
+              </a:rPr>
+              <a:t>FMEA</a:t>
+            </a:r>
+          </a:p>
+        </p:txBody>
+      </p:sp>
+      <p:sp>
+        <p:nvSpPr>
+          <p:cNvPr id="17" name="TextBox 16"/>
+          <p:cNvSpPr txBox="1"/>
+          <p:nvPr/>
+        </p:nvSpPr>
+        <p:spPr>
+          <a:xfrm>
+            <a:off x="8356396" y="2468880"/>
+            <a:ext cx="3058058" cy="1143000"/>
           </a:xfrm>
           <a:prstGeom prst="rect">
             <a:avLst/>
@@ -8757,38 +11470,71 @@
           <a:p>
             <a:pPr algn="l"/>
             <a:r>
-              <a:rPr sz="1800" b="0" i="0">
-                <a:solidFill>
-                  <a:srgbClr val="54595D"/>
-                </a:solidFill>
-                <a:latin typeface="Calibri"/>
-              </a:rPr>
-              <a:t>What does a Pareto chart show?</a:t>
-            </a:r>
-          </a:p>
-          <a:p>
-            <a:r>
-              <a:rPr sz="1800" b="1">
-                <a:solidFill>
-                  <a:srgbClr val="03306E"/>
-                </a:solidFill>
-                <a:latin typeface="Calibri"/>
-              </a:rPr>
-              <a:t>Which few causes create most of the problems.</a:t>
-            </a:r>
-          </a:p>
-        </p:txBody>
-      </p:sp>
-      <p:sp>
-        <p:nvSpPr>
-          <p:cNvPr id="12" name="Oval 11"/>
+              <a:rPr sz="2000" b="0" i="0">
+                <a:solidFill>
+                  <a:srgbClr val="202122"/>
+                </a:solidFill>
+                <a:latin typeface="Calibri"/>
+              </a:rPr>
+              <a:t>List failure modes and their effects before they happen.</a:t>
+            </a:r>
+          </a:p>
+        </p:txBody>
+      </p:sp>
+      <p:sp>
+        <p:nvSpPr>
+          <p:cNvPr id="18" name="Rounded Rectangle 17"/>
           <p:cNvSpPr/>
           <p:nvPr/>
         </p:nvSpPr>
         <p:spPr>
           <a:xfrm>
-            <a:off x="548640" y="5205221"/>
-            <a:ext cx="411480" cy="411480"/>
+            <a:off x="548640" y="4023360"/>
+            <a:ext cx="3515258" cy="2148840"/>
+          </a:xfrm>
+          <a:prstGeom prst="roundRect">
+            <a:avLst>
+              <a:gd name="adj" fmla="val 6000"/>
+            </a:avLst>
+          </a:prstGeom>
+          <a:solidFill>
+            <a:srgbClr val="EAF3FF"/>
+          </a:solidFill>
+          <a:ln>
+            <a:noFill/>
+          </a:ln>
+          <a:effectLst/>
+        </p:spPr>
+        <p:style>
+          <a:lnRef idx="1">
+            <a:schemeClr val="accent1"/>
+          </a:lnRef>
+          <a:fillRef idx="3">
+            <a:schemeClr val="accent1"/>
+          </a:fillRef>
+          <a:effectRef idx="2">
+            <a:schemeClr val="accent1"/>
+          </a:effectRef>
+          <a:fontRef idx="minor">
+            <a:schemeClr val="lt1"/>
+          </a:fontRef>
+        </p:style>
+        <p:txBody>
+          <a:bodyPr rtlCol="0" anchor="ctr"/>
+          <a:lstStyle/>
+          <a:p/>
+        </p:txBody>
+      </p:sp>
+      <p:sp>
+        <p:nvSpPr>
+          <p:cNvPr id="19" name="Oval 18"/>
+          <p:cNvSpPr/>
+          <p:nvPr/>
+        </p:nvSpPr>
+        <p:spPr>
+          <a:xfrm>
+            <a:off x="777240" y="4251960"/>
+            <a:ext cx="457200" cy="457200"/>
           </a:xfrm>
           <a:prstGeom prst="ellipse">
             <a:avLst/>
@@ -8821,7 +11567,7 @@
           <a:p>
             <a:pPr algn="ctr"/>
             <a:r>
-              <a:rPr sz="1400" b="1">
+              <a:rPr sz="1500" b="1">
                 <a:solidFill>
                   <a:srgbClr val="202122"/>
                 </a:solidFill>
@@ -8834,14 +11580,47 @@
       </p:sp>
       <p:sp>
         <p:nvSpPr>
-          <p:cNvPr id="13" name="TextBox 12"/>
-          <p:cNvSpPr txBox="1"/>
-          <p:nvPr/>
-        </p:nvSpPr>
-        <p:spPr>
-          <a:xfrm>
-            <a:off x="1234440" y="5186933"/>
-            <a:ext cx="10408615" cy="1030986"/>
+          <p:cNvPr id="20" name="TextBox 19"/>
+          <p:cNvSpPr txBox="1"/>
+          <p:nvPr/>
+        </p:nvSpPr>
+        <p:spPr>
+          <a:xfrm>
+            <a:off x="1371600" y="4224528"/>
+            <a:ext cx="2509418" cy="512064"/>
+          </a:xfrm>
+          <a:prstGeom prst="rect">
+            <a:avLst/>
+          </a:prstGeom>
+          <a:noFill/>
+        </p:spPr>
+        <p:txBody>
+          <a:bodyPr wrap="square" anchor="ctr" lIns="0" rIns="0" tIns="0" bIns="0"/>
+          <a:lstStyle/>
+          <a:p>
+            <a:pPr algn="l"/>
+            <a:r>
+              <a:rPr sz="1900" b="1" i="0">
+                <a:solidFill>
+                  <a:srgbClr val="03306E"/>
+                </a:solidFill>
+                <a:latin typeface="Calibri"/>
+              </a:rPr>
+              <a:t>Pareto analysis</a:t>
+            </a:r>
+          </a:p>
+        </p:txBody>
+      </p:sp>
+      <p:sp>
+        <p:nvSpPr>
+          <p:cNvPr id="21" name="TextBox 20"/>
+          <p:cNvSpPr txBox="1"/>
+          <p:nvPr/>
+        </p:nvSpPr>
+        <p:spPr>
+          <a:xfrm>
+            <a:off x="777240" y="4892040"/>
+            <a:ext cx="3058058" cy="1143000"/>
           </a:xfrm>
           <a:prstGeom prst="rect">
             <a:avLst/>
@@ -8854,24 +11633,339 @@
           <a:p>
             <a:pPr algn="l"/>
             <a:r>
-              <a:rPr sz="1800" b="0" i="0">
-                <a:solidFill>
-                  <a:srgbClr val="54595D"/>
-                </a:solidFill>
-                <a:latin typeface="Calibri"/>
-              </a:rPr>
-              <a:t>Give two purposes of an SOP.</a:t>
-            </a:r>
-          </a:p>
-          <a:p>
-            <a:r>
-              <a:rPr sz="1800" b="1">
+              <a:rPr sz="2000" b="0" i="0">
+                <a:solidFill>
+                  <a:srgbClr val="202122"/>
+                </a:solidFill>
+                <a:latin typeface="Calibri"/>
+              </a:rPr>
+              <a:t>80% of problems often come from 20% of causes.</a:t>
+            </a:r>
+          </a:p>
+        </p:txBody>
+      </p:sp>
+      <p:sp>
+        <p:nvSpPr>
+          <p:cNvPr id="22" name="Rounded Rectangle 21"/>
+          <p:cNvSpPr/>
+          <p:nvPr/>
+        </p:nvSpPr>
+        <p:spPr>
+          <a:xfrm>
+            <a:off x="4338218" y="4023360"/>
+            <a:ext cx="3515258" cy="2148840"/>
+          </a:xfrm>
+          <a:prstGeom prst="roundRect">
+            <a:avLst>
+              <a:gd name="adj" fmla="val 6000"/>
+            </a:avLst>
+          </a:prstGeom>
+          <a:solidFill>
+            <a:srgbClr val="EAF3FF"/>
+          </a:solidFill>
+          <a:ln>
+            <a:noFill/>
+          </a:ln>
+          <a:effectLst/>
+        </p:spPr>
+        <p:style>
+          <a:lnRef idx="1">
+            <a:schemeClr val="accent1"/>
+          </a:lnRef>
+          <a:fillRef idx="3">
+            <a:schemeClr val="accent1"/>
+          </a:fillRef>
+          <a:effectRef idx="2">
+            <a:schemeClr val="accent1"/>
+          </a:effectRef>
+          <a:fontRef idx="minor">
+            <a:schemeClr val="lt1"/>
+          </a:fontRef>
+        </p:style>
+        <p:txBody>
+          <a:bodyPr rtlCol="0" anchor="ctr"/>
+          <a:lstStyle/>
+          <a:p/>
+        </p:txBody>
+      </p:sp>
+      <p:sp>
+        <p:nvSpPr>
+          <p:cNvPr id="23" name="Oval 22"/>
+          <p:cNvSpPr/>
+          <p:nvPr/>
+        </p:nvSpPr>
+        <p:spPr>
+          <a:xfrm>
+            <a:off x="4566818" y="4251960"/>
+            <a:ext cx="457200" cy="457200"/>
+          </a:xfrm>
+          <a:prstGeom prst="ellipse">
+            <a:avLst/>
+          </a:prstGeom>
+          <a:solidFill>
+            <a:srgbClr val="F2B705"/>
+          </a:solidFill>
+          <a:ln>
+            <a:noFill/>
+          </a:ln>
+          <a:effectLst/>
+        </p:spPr>
+        <p:style>
+          <a:lnRef idx="1">
+            <a:schemeClr val="accent1"/>
+          </a:lnRef>
+          <a:fillRef idx="3">
+            <a:schemeClr val="accent1"/>
+          </a:fillRef>
+          <a:effectRef idx="2">
+            <a:schemeClr val="accent1"/>
+          </a:effectRef>
+          <a:fontRef idx="minor">
+            <a:schemeClr val="lt1"/>
+          </a:fontRef>
+        </p:style>
+        <p:txBody>
+          <a:bodyPr rtlCol="0" anchor="ctr" lIns="0" rIns="0" tIns="0" bIns="0"/>
+          <a:lstStyle/>
+          <a:p>
+            <a:pPr algn="ctr"/>
+            <a:r>
+              <a:rPr sz="1500" b="1">
+                <a:solidFill>
+                  <a:srgbClr val="202122"/>
+                </a:solidFill>
+                <a:latin typeface="Calibri"/>
+              </a:rPr>
+              <a:t>5</a:t>
+            </a:r>
+          </a:p>
+        </p:txBody>
+      </p:sp>
+      <p:sp>
+        <p:nvSpPr>
+          <p:cNvPr id="24" name="TextBox 23"/>
+          <p:cNvSpPr txBox="1"/>
+          <p:nvPr/>
+        </p:nvSpPr>
+        <p:spPr>
+          <a:xfrm>
+            <a:off x="5161178" y="4224528"/>
+            <a:ext cx="2509418" cy="512064"/>
+          </a:xfrm>
+          <a:prstGeom prst="rect">
+            <a:avLst/>
+          </a:prstGeom>
+          <a:noFill/>
+        </p:spPr>
+        <p:txBody>
+          <a:bodyPr wrap="square" anchor="ctr" lIns="0" rIns="0" tIns="0" bIns="0"/>
+          <a:lstStyle/>
+          <a:p>
+            <a:pPr algn="l"/>
+            <a:r>
+              <a:rPr sz="1900" b="1" i="0">
                 <a:solidFill>
                   <a:srgbClr val="03306E"/>
                 </a:solidFill>
                 <a:latin typeface="Calibri"/>
               </a:rPr>
-              <a:t>Any two of: standardising work, customer satisfaction, safety, training.</a:t>
+              <a:t>Cause and effect</a:t>
+            </a:r>
+          </a:p>
+        </p:txBody>
+      </p:sp>
+      <p:sp>
+        <p:nvSpPr>
+          <p:cNvPr id="25" name="TextBox 24"/>
+          <p:cNvSpPr txBox="1"/>
+          <p:nvPr/>
+        </p:nvSpPr>
+        <p:spPr>
+          <a:xfrm>
+            <a:off x="4566818" y="4892040"/>
+            <a:ext cx="3058058" cy="1143000"/>
+          </a:xfrm>
+          <a:prstGeom prst="rect">
+            <a:avLst/>
+          </a:prstGeom>
+          <a:noFill/>
+        </p:spPr>
+        <p:txBody>
+          <a:bodyPr wrap="square" anchor="t" lIns="0" rIns="0" tIns="0" bIns="0"/>
+          <a:lstStyle/>
+          <a:p>
+            <a:pPr algn="l"/>
+            <a:r>
+              <a:rPr sz="2000" b="0" i="0">
+                <a:solidFill>
+                  <a:srgbClr val="202122"/>
+                </a:solidFill>
+                <a:latin typeface="Calibri"/>
+              </a:rPr>
+              <a:t>Fishbone diagrams find root causes.</a:t>
+            </a:r>
+          </a:p>
+        </p:txBody>
+      </p:sp>
+      <p:sp>
+        <p:nvSpPr>
+          <p:cNvPr id="26" name="Rounded Rectangle 25"/>
+          <p:cNvSpPr/>
+          <p:nvPr/>
+        </p:nvSpPr>
+        <p:spPr>
+          <a:xfrm>
+            <a:off x="8127796" y="4023360"/>
+            <a:ext cx="3515258" cy="2148840"/>
+          </a:xfrm>
+          <a:prstGeom prst="roundRect">
+            <a:avLst>
+              <a:gd name="adj" fmla="val 6000"/>
+            </a:avLst>
+          </a:prstGeom>
+          <a:solidFill>
+            <a:srgbClr val="EAF3FF"/>
+          </a:solidFill>
+          <a:ln>
+            <a:noFill/>
+          </a:ln>
+          <a:effectLst/>
+        </p:spPr>
+        <p:style>
+          <a:lnRef idx="1">
+            <a:schemeClr val="accent1"/>
+          </a:lnRef>
+          <a:fillRef idx="3">
+            <a:schemeClr val="accent1"/>
+          </a:fillRef>
+          <a:effectRef idx="2">
+            <a:schemeClr val="accent1"/>
+          </a:effectRef>
+          <a:fontRef idx="minor">
+            <a:schemeClr val="lt1"/>
+          </a:fontRef>
+        </p:style>
+        <p:txBody>
+          <a:bodyPr rtlCol="0" anchor="ctr"/>
+          <a:lstStyle/>
+          <a:p/>
+        </p:txBody>
+      </p:sp>
+      <p:sp>
+        <p:nvSpPr>
+          <p:cNvPr id="27" name="Oval 26"/>
+          <p:cNvSpPr/>
+          <p:nvPr/>
+        </p:nvSpPr>
+        <p:spPr>
+          <a:xfrm>
+            <a:off x="8356396" y="4251960"/>
+            <a:ext cx="457200" cy="457200"/>
+          </a:xfrm>
+          <a:prstGeom prst="ellipse">
+            <a:avLst/>
+          </a:prstGeom>
+          <a:solidFill>
+            <a:srgbClr val="F2B705"/>
+          </a:solidFill>
+          <a:ln>
+            <a:noFill/>
+          </a:ln>
+          <a:effectLst/>
+        </p:spPr>
+        <p:style>
+          <a:lnRef idx="1">
+            <a:schemeClr val="accent1"/>
+          </a:lnRef>
+          <a:fillRef idx="3">
+            <a:schemeClr val="accent1"/>
+          </a:fillRef>
+          <a:effectRef idx="2">
+            <a:schemeClr val="accent1"/>
+          </a:effectRef>
+          <a:fontRef idx="minor">
+            <a:schemeClr val="lt1"/>
+          </a:fontRef>
+        </p:style>
+        <p:txBody>
+          <a:bodyPr rtlCol="0" anchor="ctr" lIns="0" rIns="0" tIns="0" bIns="0"/>
+          <a:lstStyle/>
+          <a:p>
+            <a:pPr algn="ctr"/>
+            <a:r>
+              <a:rPr sz="1500" b="1">
+                <a:solidFill>
+                  <a:srgbClr val="202122"/>
+                </a:solidFill>
+                <a:latin typeface="Calibri"/>
+              </a:rPr>
+              <a:t>6</a:t>
+            </a:r>
+          </a:p>
+        </p:txBody>
+      </p:sp>
+      <p:sp>
+        <p:nvSpPr>
+          <p:cNvPr id="28" name="TextBox 27"/>
+          <p:cNvSpPr txBox="1"/>
+          <p:nvPr/>
+        </p:nvSpPr>
+        <p:spPr>
+          <a:xfrm>
+            <a:off x="8950756" y="4224528"/>
+            <a:ext cx="2509418" cy="512064"/>
+          </a:xfrm>
+          <a:prstGeom prst="rect">
+            <a:avLst/>
+          </a:prstGeom>
+          <a:noFill/>
+        </p:spPr>
+        <p:txBody>
+          <a:bodyPr wrap="square" anchor="ctr" lIns="0" rIns="0" tIns="0" bIns="0"/>
+          <a:lstStyle/>
+          <a:p>
+            <a:pPr algn="l"/>
+            <a:r>
+              <a:rPr sz="1900" b="1" i="0">
+                <a:solidFill>
+                  <a:srgbClr val="03306E"/>
+                </a:solidFill>
+                <a:latin typeface="Calibri"/>
+              </a:rPr>
+              <a:t>Quality circles</a:t>
+            </a:r>
+          </a:p>
+        </p:txBody>
+      </p:sp>
+      <p:sp>
+        <p:nvSpPr>
+          <p:cNvPr id="29" name="TextBox 28"/>
+          <p:cNvSpPr txBox="1"/>
+          <p:nvPr/>
+        </p:nvSpPr>
+        <p:spPr>
+          <a:xfrm>
+            <a:off x="8356396" y="4892040"/>
+            <a:ext cx="3058058" cy="1143000"/>
+          </a:xfrm>
+          <a:prstGeom prst="rect">
+            <a:avLst/>
+          </a:prstGeom>
+          <a:noFill/>
+        </p:spPr>
+        <p:txBody>
+          <a:bodyPr wrap="square" anchor="t" lIns="0" rIns="0" tIns="0" bIns="0"/>
+          <a:lstStyle/>
+          <a:p>
+            <a:pPr algn="l"/>
+            <a:r>
+              <a:rPr sz="2000" b="0" i="0">
+                <a:solidFill>
+                  <a:srgbClr val="202122"/>
+                </a:solidFill>
+                <a:latin typeface="Calibri"/>
+              </a:rPr>
+              <a:t>Small teams of workers solving quality problems.</a:t>
             </a:r>
           </a:p>
         </p:txBody>
@@ -8963,7 +12057,7 @@
                 </a:solidFill>
                 <a:latin typeface="Cambria"/>
               </a:rPr>
-              <a:t>Activity: Write an SOP</a:t>
+              <a:t>Quick check: Improving quality</a:t>
             </a:r>
           </a:p>
         </p:txBody>
@@ -9036,19 +12130,17 @@
       </p:sp>
       <p:sp>
         <p:nvSpPr>
-          <p:cNvPr id="6" name="Rounded Rectangle 5"/>
+          <p:cNvPr id="6" name="Oval 5"/>
           <p:cNvSpPr/>
           <p:nvPr/>
         </p:nvSpPr>
         <p:spPr>
           <a:xfrm>
-            <a:off x="548640" y="1508760"/>
-            <a:ext cx="2011680" cy="457200"/>
-          </a:xfrm>
-          <a:prstGeom prst="roundRect">
-            <a:avLst>
-              <a:gd name="adj" fmla="val 50000"/>
-            </a:avLst>
+            <a:off x="548640" y="1691640"/>
+            <a:ext cx="502920" cy="502920"/>
+          </a:xfrm>
+          <a:prstGeom prst="ellipse">
+            <a:avLst/>
           </a:prstGeom>
           <a:solidFill>
             <a:srgbClr val="F2B705"/>
@@ -9073,9 +12165,20 @@
           </a:fontRef>
         </p:style>
         <p:txBody>
-          <a:bodyPr rtlCol="0" anchor="ctr"/>
-          <a:lstStyle/>
-          <a:p/>
+          <a:bodyPr rtlCol="0" anchor="ctr" lIns="0" rIns="0" tIns="0" bIns="0"/>
+          <a:lstStyle/>
+          <a:p>
+            <a:pPr algn="ctr"/>
+            <a:r>
+              <a:rPr sz="1600" b="1">
+                <a:solidFill>
+                  <a:srgbClr val="202122"/>
+                </a:solidFill>
+                <a:latin typeface="Calibri"/>
+              </a:rPr>
+              <a:t>1</a:t>
+            </a:r>
+          </a:p>
         </p:txBody>
       </p:sp>
       <p:sp>
@@ -9086,80 +12189,47 @@
         </p:nvSpPr>
         <p:spPr>
           <a:xfrm>
-            <a:off x="548640" y="1508760"/>
-            <a:ext cx="2011680" cy="457200"/>
-          </a:xfrm>
-          <a:prstGeom prst="rect">
-            <a:avLst/>
-          </a:prstGeom>
-          <a:noFill/>
-        </p:spPr>
-        <p:txBody>
-          <a:bodyPr wrap="square" anchor="ctr" lIns="0" rIns="0" tIns="0" bIns="0"/>
-          <a:lstStyle/>
-          <a:p>
-            <a:pPr algn="ctr"/>
-            <a:r>
-              <a:rPr sz="1400" b="1" i="0">
+            <a:off x="1371600" y="1645920"/>
+            <a:ext cx="10271455" cy="1188720"/>
+          </a:xfrm>
+          <a:prstGeom prst="rect">
+            <a:avLst/>
+          </a:prstGeom>
+          <a:noFill/>
+        </p:spPr>
+        <p:txBody>
+          <a:bodyPr wrap="square" anchor="t" lIns="0" rIns="0" tIns="0" bIns="0"/>
+          <a:lstStyle/>
+          <a:p>
+            <a:pPr algn="l"/>
+            <a:r>
+              <a:rPr sz="2400" b="0" i="0">
                 <a:solidFill>
                   <a:srgbClr val="202122"/>
                 </a:solidFill>
                 <a:latin typeface="Calibri"/>
               </a:rPr>
-              <a:t>25 minutes</a:t>
-            </a:r>
-          </a:p>
-        </p:txBody>
-      </p:sp>
-      <p:sp>
-        <p:nvSpPr>
-          <p:cNvPr id="8" name="TextBox 7"/>
-          <p:cNvSpPr txBox="1"/>
-          <p:nvPr/>
-        </p:nvSpPr>
-        <p:spPr>
-          <a:xfrm>
-            <a:off x="2743200" y="1508760"/>
-            <a:ext cx="4754880" cy="457200"/>
-          </a:xfrm>
-          <a:prstGeom prst="rect">
-            <a:avLst/>
-          </a:prstGeom>
-          <a:noFill/>
-        </p:spPr>
-        <p:txBody>
-          <a:bodyPr wrap="square" anchor="ctr" lIns="0" rIns="0" tIns="0" bIns="0"/>
-          <a:lstStyle/>
-          <a:p>
-            <a:pPr algn="l"/>
-            <a:r>
-              <a:rPr sz="1400" b="0" i="1">
-                <a:solidFill>
-                  <a:srgbClr val="54595D"/>
-                </a:solidFill>
-                <a:latin typeface="Calibri"/>
-              </a:rPr>
-              <a:t>Pairs</a:t>
-            </a:r>
-          </a:p>
-        </p:txBody>
-      </p:sp>
-      <p:sp>
-        <p:nvSpPr>
-          <p:cNvPr id="9" name="Oval 8"/>
+              <a:t>What does a Pareto chart show?</a:t>
+            </a:r>
+          </a:p>
+        </p:txBody>
+      </p:sp>
+      <p:sp>
+        <p:nvSpPr>
+          <p:cNvPr id="8" name="Oval 7"/>
           <p:cNvSpPr/>
           <p:nvPr/>
         </p:nvSpPr>
         <p:spPr>
           <a:xfrm>
-            <a:off x="548640" y="2482596"/>
-            <a:ext cx="384048" cy="384048"/>
+            <a:off x="548640" y="3108960"/>
+            <a:ext cx="502920" cy="502920"/>
           </a:xfrm>
           <a:prstGeom prst="ellipse">
             <a:avLst/>
           </a:prstGeom>
           <a:solidFill>
-            <a:srgbClr val="0645AD"/>
+            <a:srgbClr val="F2B705"/>
           </a:solidFill>
           <a:ln>
             <a:noFill/>
@@ -9186,66 +12256,66 @@
           <a:p>
             <a:pPr algn="ctr"/>
             <a:r>
-              <a:rPr sz="1300" b="1">
-                <a:solidFill>
-                  <a:srgbClr val="FFFFFF"/>
-                </a:solidFill>
-                <a:latin typeface="Calibri"/>
-              </a:rPr>
-              <a:t>1</a:t>
-            </a:r>
-          </a:p>
-        </p:txBody>
-      </p:sp>
-      <p:sp>
-        <p:nvSpPr>
-          <p:cNvPr id="10" name="TextBox 9"/>
-          <p:cNvSpPr txBox="1"/>
-          <p:nvPr/>
-        </p:nvSpPr>
-        <p:spPr>
-          <a:xfrm>
-            <a:off x="1143000" y="2240280"/>
-            <a:ext cx="5943600" cy="868680"/>
-          </a:xfrm>
-          <a:prstGeom prst="rect">
-            <a:avLst/>
-          </a:prstGeom>
-          <a:noFill/>
-        </p:spPr>
-        <p:txBody>
-          <a:bodyPr wrap="square" anchor="ctr" lIns="0" rIns="0" tIns="0" bIns="0"/>
+              <a:rPr sz="1600" b="1">
+                <a:solidFill>
+                  <a:srgbClr val="202122"/>
+                </a:solidFill>
+                <a:latin typeface="Calibri"/>
+              </a:rPr>
+              <a:t>2</a:t>
+            </a:r>
+          </a:p>
+        </p:txBody>
+      </p:sp>
+      <p:sp>
+        <p:nvSpPr>
+          <p:cNvPr id="9" name="TextBox 8"/>
+          <p:cNvSpPr txBox="1"/>
+          <p:nvPr/>
+        </p:nvSpPr>
+        <p:spPr>
+          <a:xfrm>
+            <a:off x="1371600" y="3063240"/>
+            <a:ext cx="10271455" cy="1188720"/>
+          </a:xfrm>
+          <a:prstGeom prst="rect">
+            <a:avLst/>
+          </a:prstGeom>
+          <a:noFill/>
+        </p:spPr>
+        <p:txBody>
+          <a:bodyPr wrap="square" anchor="t" lIns="0" rIns="0" tIns="0" bIns="0"/>
           <a:lstStyle/>
           <a:p>
             <a:pPr algn="l"/>
             <a:r>
-              <a:rPr sz="1700" b="0" i="0">
+              <a:rPr sz="2400" b="0" i="0">
                 <a:solidFill>
                   <a:srgbClr val="202122"/>
                 </a:solidFill>
                 <a:latin typeface="Calibri"/>
               </a:rPr>
-              <a:t>Choose a workshop task, e.g. setting up a pillar drill.</a:t>
-            </a:r>
-          </a:p>
-        </p:txBody>
-      </p:sp>
-      <p:sp>
-        <p:nvSpPr>
-          <p:cNvPr id="11" name="Oval 10"/>
+              <a:t>What is a quality circle?</a:t>
+            </a:r>
+          </a:p>
+        </p:txBody>
+      </p:sp>
+      <p:sp>
+        <p:nvSpPr>
+          <p:cNvPr id="10" name="Oval 9"/>
           <p:cNvSpPr/>
           <p:nvPr/>
         </p:nvSpPr>
         <p:spPr>
           <a:xfrm>
-            <a:off x="548640" y="3461004"/>
-            <a:ext cx="384048" cy="384048"/>
+            <a:off x="548640" y="4526280"/>
+            <a:ext cx="502920" cy="502920"/>
           </a:xfrm>
           <a:prstGeom prst="ellipse">
             <a:avLst/>
           </a:prstGeom>
           <a:solidFill>
-            <a:srgbClr val="0645AD"/>
+            <a:srgbClr val="F2B705"/>
           </a:solidFill>
           <a:ln>
             <a:noFill/>
@@ -9272,13 +12342,46 @@
           <a:p>
             <a:pPr algn="ctr"/>
             <a:r>
-              <a:rPr sz="1300" b="1">
-                <a:solidFill>
-                  <a:srgbClr val="FFFFFF"/>
-                </a:solidFill>
-                <a:latin typeface="Calibri"/>
-              </a:rPr>
-              <a:t>2</a:t>
+              <a:rPr sz="1600" b="1">
+                <a:solidFill>
+                  <a:srgbClr val="202122"/>
+                </a:solidFill>
+                <a:latin typeface="Calibri"/>
+              </a:rPr>
+              <a:t>3</a:t>
+            </a:r>
+          </a:p>
+        </p:txBody>
+      </p:sp>
+      <p:sp>
+        <p:nvSpPr>
+          <p:cNvPr id="11" name="TextBox 10"/>
+          <p:cNvSpPr txBox="1"/>
+          <p:nvPr/>
+        </p:nvSpPr>
+        <p:spPr>
+          <a:xfrm>
+            <a:off x="1371600" y="4480560"/>
+            <a:ext cx="10271455" cy="1188720"/>
+          </a:xfrm>
+          <a:prstGeom prst="rect">
+            <a:avLst/>
+          </a:prstGeom>
+          <a:noFill/>
+        </p:spPr>
+        <p:txBody>
+          <a:bodyPr wrap="square" anchor="t" lIns="0" rIns="0" tIns="0" bIns="0"/>
+          <a:lstStyle/>
+          <a:p>
+            <a:pPr algn="l"/>
+            <a:r>
+              <a:rPr sz="2400" b="0" i="0">
+                <a:solidFill>
+                  <a:srgbClr val="202122"/>
+                </a:solidFill>
+                <a:latin typeface="Calibri"/>
+              </a:rPr>
+              <a:t>What does six sigma aim to reduce?</a:t>
             </a:r>
           </a:p>
         </p:txBody>
@@ -9291,362 +12394,27 @@
         </p:nvSpPr>
         <p:spPr>
           <a:xfrm>
-            <a:off x="1143000" y="3218688"/>
-            <a:ext cx="5943600" cy="868680"/>
-          </a:xfrm>
-          <a:prstGeom prst="rect">
-            <a:avLst/>
-          </a:prstGeom>
-          <a:noFill/>
-        </p:spPr>
-        <p:txBody>
-          <a:bodyPr wrap="square" anchor="ctr" lIns="0" rIns="0" tIns="0" bIns="0"/>
+            <a:off x="548640" y="5852160"/>
+            <a:ext cx="11094415" cy="365760"/>
+          </a:xfrm>
+          <a:prstGeom prst="rect">
+            <a:avLst/>
+          </a:prstGeom>
+          <a:noFill/>
+        </p:spPr>
+        <p:txBody>
+          <a:bodyPr wrap="square" anchor="t" lIns="0" rIns="0" tIns="0" bIns="0"/>
           <a:lstStyle/>
           <a:p>
             <a:pPr algn="l"/>
             <a:r>
-              <a:rPr sz="1700" b="0" i="0">
-                <a:solidFill>
-                  <a:srgbClr val="202122"/>
-                </a:solidFill>
-                <a:latin typeface="Calibri"/>
-              </a:rPr>
-              <a:t>Write an SOP using the typical format.</a:t>
-            </a:r>
-          </a:p>
-        </p:txBody>
-      </p:sp>
-      <p:sp>
-        <p:nvSpPr>
-          <p:cNvPr id="13" name="Oval 12"/>
-          <p:cNvSpPr/>
-          <p:nvPr/>
-        </p:nvSpPr>
-        <p:spPr>
-          <a:xfrm>
-            <a:off x="548640" y="4439412"/>
-            <a:ext cx="384048" cy="384048"/>
-          </a:xfrm>
-          <a:prstGeom prst="ellipse">
-            <a:avLst/>
-          </a:prstGeom>
-          <a:solidFill>
-            <a:srgbClr val="0645AD"/>
-          </a:solidFill>
-          <a:ln>
-            <a:noFill/>
-          </a:ln>
-          <a:effectLst/>
-        </p:spPr>
-        <p:style>
-          <a:lnRef idx="1">
-            <a:schemeClr val="accent1"/>
-          </a:lnRef>
-          <a:fillRef idx="3">
-            <a:schemeClr val="accent1"/>
-          </a:fillRef>
-          <a:effectRef idx="2">
-            <a:schemeClr val="accent1"/>
-          </a:effectRef>
-          <a:fontRef idx="minor">
-            <a:schemeClr val="lt1"/>
-          </a:fontRef>
-        </p:style>
-        <p:txBody>
-          <a:bodyPr rtlCol="0" anchor="ctr" lIns="0" rIns="0" tIns="0" bIns="0"/>
-          <a:lstStyle/>
-          <a:p>
-            <a:pPr algn="ctr"/>
-            <a:r>
-              <a:rPr sz="1300" b="1">
-                <a:solidFill>
-                  <a:srgbClr val="FFFFFF"/>
-                </a:solidFill>
-                <a:latin typeface="Calibri"/>
-              </a:rPr>
-              <a:t>3</a:t>
-            </a:r>
-          </a:p>
-        </p:txBody>
-      </p:sp>
-      <p:sp>
-        <p:nvSpPr>
-          <p:cNvPr id="14" name="TextBox 13"/>
-          <p:cNvSpPr txBox="1"/>
-          <p:nvPr/>
-        </p:nvSpPr>
-        <p:spPr>
-          <a:xfrm>
-            <a:off x="1143000" y="4197096"/>
-            <a:ext cx="5943600" cy="868680"/>
-          </a:xfrm>
-          <a:prstGeom prst="rect">
-            <a:avLst/>
-          </a:prstGeom>
-          <a:noFill/>
-        </p:spPr>
-        <p:txBody>
-          <a:bodyPr wrap="square" anchor="ctr" lIns="0" rIns="0" tIns="0" bIns="0"/>
-          <a:lstStyle/>
-          <a:p>
-            <a:pPr algn="l"/>
-            <a:r>
-              <a:rPr sz="1700" b="0" i="0">
-                <a:solidFill>
-                  <a:srgbClr val="202122"/>
-                </a:solidFill>
-                <a:latin typeface="Calibri"/>
-              </a:rPr>
-              <a:t>Swap with another pair and follow it exactly.</a:t>
-            </a:r>
-          </a:p>
-        </p:txBody>
-      </p:sp>
-      <p:sp>
-        <p:nvSpPr>
-          <p:cNvPr id="15" name="Oval 14"/>
-          <p:cNvSpPr/>
-          <p:nvPr/>
-        </p:nvSpPr>
-        <p:spPr>
-          <a:xfrm>
-            <a:off x="548640" y="5417820"/>
-            <a:ext cx="384048" cy="384048"/>
-          </a:xfrm>
-          <a:prstGeom prst="ellipse">
-            <a:avLst/>
-          </a:prstGeom>
-          <a:solidFill>
-            <a:srgbClr val="0645AD"/>
-          </a:solidFill>
-          <a:ln>
-            <a:noFill/>
-          </a:ln>
-          <a:effectLst/>
-        </p:spPr>
-        <p:style>
-          <a:lnRef idx="1">
-            <a:schemeClr val="accent1"/>
-          </a:lnRef>
-          <a:fillRef idx="3">
-            <a:schemeClr val="accent1"/>
-          </a:fillRef>
-          <a:effectRef idx="2">
-            <a:schemeClr val="accent1"/>
-          </a:effectRef>
-          <a:fontRef idx="minor">
-            <a:schemeClr val="lt1"/>
-          </a:fontRef>
-        </p:style>
-        <p:txBody>
-          <a:bodyPr rtlCol="0" anchor="ctr" lIns="0" rIns="0" tIns="0" bIns="0"/>
-          <a:lstStyle/>
-          <a:p>
-            <a:pPr algn="ctr"/>
-            <a:r>
-              <a:rPr sz="1300" b="1">
-                <a:solidFill>
-                  <a:srgbClr val="FFFFFF"/>
-                </a:solidFill>
-                <a:latin typeface="Calibri"/>
-              </a:rPr>
-              <a:t>4</a:t>
-            </a:r>
-          </a:p>
-        </p:txBody>
-      </p:sp>
-      <p:sp>
-        <p:nvSpPr>
-          <p:cNvPr id="16" name="TextBox 15"/>
-          <p:cNvSpPr txBox="1"/>
-          <p:nvPr/>
-        </p:nvSpPr>
-        <p:spPr>
-          <a:xfrm>
-            <a:off x="1143000" y="5175504"/>
-            <a:ext cx="5943600" cy="868680"/>
-          </a:xfrm>
-          <a:prstGeom prst="rect">
-            <a:avLst/>
-          </a:prstGeom>
-          <a:noFill/>
-        </p:spPr>
-        <p:txBody>
-          <a:bodyPr wrap="square" anchor="ctr" lIns="0" rIns="0" tIns="0" bIns="0"/>
-          <a:lstStyle/>
-          <a:p>
-            <a:pPr algn="l"/>
-            <a:r>
-              <a:rPr sz="1700" b="0" i="0">
-                <a:solidFill>
-                  <a:srgbClr val="202122"/>
-                </a:solidFill>
-                <a:latin typeface="Calibri"/>
-              </a:rPr>
-              <a:t>Improve anything that was unclear.</a:t>
-            </a:r>
-          </a:p>
-        </p:txBody>
-      </p:sp>
-      <p:sp>
-        <p:nvSpPr>
-          <p:cNvPr id="17" name="Rounded Rectangle 16"/>
-          <p:cNvSpPr/>
-          <p:nvPr/>
-        </p:nvSpPr>
-        <p:spPr>
-          <a:xfrm>
-            <a:off x="7772400" y="1508760"/>
-            <a:ext cx="3867912" cy="4572000"/>
-          </a:xfrm>
-          <a:prstGeom prst="roundRect">
-            <a:avLst>
-              <a:gd name="adj" fmla="val 8000"/>
-            </a:avLst>
-          </a:prstGeom>
-          <a:solidFill>
-            <a:srgbClr val="EAF3FF"/>
-          </a:solidFill>
-          <a:ln>
-            <a:noFill/>
-          </a:ln>
-          <a:effectLst/>
-        </p:spPr>
-        <p:style>
-          <a:lnRef idx="1">
-            <a:schemeClr val="accent1"/>
-          </a:lnRef>
-          <a:fillRef idx="3">
-            <a:schemeClr val="accent1"/>
-          </a:fillRef>
-          <a:effectRef idx="2">
-            <a:schemeClr val="accent1"/>
-          </a:effectRef>
-          <a:fontRef idx="minor">
-            <a:schemeClr val="lt1"/>
-          </a:fontRef>
-        </p:style>
-        <p:txBody>
-          <a:bodyPr rtlCol="0" anchor="ctr"/>
-          <a:lstStyle/>
-          <a:p/>
-        </p:txBody>
-      </p:sp>
-      <p:sp>
-        <p:nvSpPr>
-          <p:cNvPr id="18" name="TextBox 17"/>
-          <p:cNvSpPr txBox="1"/>
-          <p:nvPr/>
-        </p:nvSpPr>
-        <p:spPr>
-          <a:xfrm>
-            <a:off x="8046720" y="1737360"/>
-            <a:ext cx="3291840" cy="365760"/>
-          </a:xfrm>
-          <a:prstGeom prst="rect">
-            <a:avLst/>
-          </a:prstGeom>
-          <a:noFill/>
-        </p:spPr>
-        <p:txBody>
-          <a:bodyPr wrap="square" anchor="t" lIns="0" rIns="0" tIns="0" bIns="0"/>
-          <a:lstStyle/>
-          <a:p>
-            <a:pPr algn="l"/>
-            <a:r>
-              <a:rPr sz="1300" b="1" i="0">
-                <a:solidFill>
-                  <a:srgbClr val="0645AD"/>
-                </a:solidFill>
-                <a:latin typeface="Calibri"/>
-              </a:rPr>
-              <a:t>SUCCESS CRITERIA</a:t>
-            </a:r>
-          </a:p>
-        </p:txBody>
-      </p:sp>
-      <p:sp>
-        <p:nvSpPr>
-          <p:cNvPr id="19" name="TextBox 18"/>
-          <p:cNvSpPr txBox="1"/>
-          <p:nvPr/>
-        </p:nvSpPr>
-        <p:spPr>
-          <a:xfrm>
-            <a:off x="8046720" y="2240280"/>
-            <a:ext cx="3337560" cy="3657600"/>
-          </a:xfrm>
-          <a:prstGeom prst="rect">
-            <a:avLst/>
-          </a:prstGeom>
-          <a:noFill/>
-        </p:spPr>
-        <p:txBody>
-          <a:bodyPr wrap="square" lIns="0" rIns="0" tIns="0" bIns="0">
-            <a:spAutoFit/>
-          </a:bodyPr>
-          <a:lstStyle/>
-          <a:p>
-            <a:pPr marL="274320" indent="-274320">
-              <a:spcAft>
-                <a:spcPts val="810"/>
-              </a:spcAft>
-              <a:buClr>
-                <a:srgbClr val="0645AD"/>
-              </a:buClr>
-              <a:buFont typeface="Arial"/>
-              <a:buChar char="•"/>
-            </a:pPr>
-            <a:r>
-              <a:rPr sz="1800" b="0">
-                <a:solidFill>
-                  <a:srgbClr val="202122"/>
-                </a:solidFill>
-                <a:latin typeface="Calibri"/>
-              </a:rPr>
-              <a:t>Safety steps included</a:t>
-            </a:r>
-          </a:p>
-          <a:p>
-            <a:pPr marL="274320" indent="-274320">
-              <a:spcAft>
-                <a:spcPts val="810"/>
-              </a:spcAft>
-              <a:buClr>
-                <a:srgbClr val="0645AD"/>
-              </a:buClr>
-              <a:buFont typeface="Arial"/>
-              <a:buChar char="•"/>
-            </a:pPr>
-            <a:r>
-              <a:rPr sz="1800" b="0">
-                <a:solidFill>
-                  <a:srgbClr val="202122"/>
-                </a:solidFill>
-                <a:latin typeface="Calibri"/>
-              </a:rPr>
-              <a:t>Another pair could follow it</a:t>
-            </a:r>
-          </a:p>
-          <a:p>
-            <a:pPr marL="274320" indent="-274320">
-              <a:spcAft>
-                <a:spcPts val="810"/>
-              </a:spcAft>
-              <a:buClr>
-                <a:srgbClr val="0645AD"/>
-              </a:buClr>
-              <a:buFont typeface="Arial"/>
-              <a:buChar char="•"/>
-            </a:pPr>
-            <a:r>
-              <a:rPr sz="1800" b="0">
-                <a:solidFill>
-                  <a:srgbClr val="202122"/>
-                </a:solidFill>
-                <a:latin typeface="Calibri"/>
-              </a:rPr>
-              <a:t>Revision history updated</a:t>
+              <a:rPr sz="1300" b="0" i="1">
+                <a:solidFill>
+                  <a:srgbClr val="54595D"/>
+                </a:solidFill>
+                <a:latin typeface="Calibri"/>
+              </a:rPr>
+              <a:t>Answer on mini whiteboards or in your book. Answers are in the speaker notes.</a:t>
             </a:r>
           </a:p>
         </p:txBody>
